--- a/presentations/competition-2026/baseball-decision-22-slides.pptx
+++ b/presentations/competition-2026/baseball-decision-22-slides.pptx
@@ -1746,7 +1746,7 @@
 </file>
 
 <file path=ppt/slides/slide12.xml><?xml version="1.0" encoding="utf-8"?>
-<p:sld xmlns:a="http://schemas.openxmlformats.org/drawingml/2006/main" xmlns:r="http://schemas.openxmlformats.org/officeDocument/2006/relationships" xmlns:p="http://schemas.openxmlformats.org/presentationml/2006/main">
+<p:sld xmlns:a="http://schemas.openxmlformats.org/drawingml/2006/main" xmlns:p="http://schemas.openxmlformats.org/presentationml/2006/main" xmlns:r="http://schemas.openxmlformats.org/officeDocument/2006/relationships">
   <p:cSld>
     <p:bg>
       <p:bgPr>
@@ -1837,21 +1837,21 @@
         </p:nvGrpSpPr>
         <p:grpSpPr>
           <a:xfrm>
-            <a:off x="592836" y="546100"/>
+            <a:off x="592836" y="546068"/>
             <a:ext cx="5808726" cy="645414"/>
-            <a:chOff x="592836" y="546100"/>
+            <a:chOff x="592836" y="546068"/>
             <a:chExt cx="5808726" cy="645414"/>
           </a:xfrm>
         </p:grpSpPr>
         <p:sp>
           <p:nvSpPr>
             <p:cNvPr id="4" name="TextBox 4"/>
-            <p:cNvSpPr txBox="1"/>
-            <p:nvPr/>
-          </p:nvSpPr>
-          <p:spPr>
-            <a:xfrm>
-              <a:off x="592836" y="546100"/>
+            <p:cNvSpPr/>
+            <p:nvPr/>
+          </p:nvSpPr>
+          <p:spPr>
+            <a:xfrm>
+              <a:off x="592836" y="546068"/>
               <a:ext cx="5808726" cy="645414"/>
             </a:xfrm>
             <a:prstGeom prst="rect">
@@ -1863,8 +1863,8 @@
             </a:ln>
           </p:spPr>
           <p:txBody>
-            <a:bodyPr wrap="none" lIns="0" tIns="0" rIns="0" bIns="0" anchor="t" anchorCtr="0">
-              <a:spAutoFit/>
+            <a:bodyPr wrap="none" lIns="0" tIns="32" rIns="0" bIns="0" anchor="t" anchorCtr="0">
+              <a:noAutofit/>
             </a:bodyPr>
             <a:lstStyle/>
             <a:p>
@@ -1872,190 +1872,13 @@
               <a:r>
                 <a:rPr lang="zh-TW" sz="3200" b="1" dirty="0">
                   <a:solidFill>
-                    <a:schemeClr val="accent1"/>
-                  </a:solidFill>
-                  <a:latin typeface="+mn-lt"/>
-                  <a:ea typeface="+mn-ea"/>
-                  <a:cs typeface="+mn-cs"/>
-                </a:rPr>
-                <a:t>先確認可用人選，再進行比較</a:t>
-              </a:r>
-            </a:p>
-          </p:txBody>
-        </p:sp>
-      </p:grpSp>
-      <p:grpSp>
-        <p:nvGrpSpPr>
-          <p:cNvPr id="8" name="lineup-step-one"/>
-          <p:cNvGrpSpPr/>
-          <p:nvPr/>
-        </p:nvGrpSpPr>
-        <p:grpSpPr>
-          <a:xfrm>
-            <a:off x="597408" y="1536700"/>
-            <a:ext cx="2659167" cy="469392"/>
-            <a:chOff x="597408" y="1536700"/>
-            <a:chExt cx="2659167" cy="469392"/>
-          </a:xfrm>
-        </p:grpSpPr>
-        <p:sp>
-          <p:nvSpPr>
-            <p:cNvPr id="7" name="TextBox 7"/>
-            <p:cNvSpPr txBox="1"/>
-            <p:nvPr/>
-          </p:nvSpPr>
-          <p:spPr>
-            <a:xfrm>
-              <a:off x="597408" y="1536700"/>
-              <a:ext cx="2659167" cy="469392"/>
-            </a:xfrm>
-            <a:prstGeom prst="rect">
-              <a:avLst/>
-            </a:prstGeom>
-            <a:noFill/>
-            <a:ln>
-              <a:noFill/>
-            </a:ln>
-          </p:spPr>
-          <p:txBody>
-            <a:bodyPr wrap="none" lIns="0" tIns="0" rIns="0" bIns="0" anchor="t" anchorCtr="0">
-              <a:spAutoFit/>
-            </a:bodyPr>
-            <a:lstStyle/>
-            <a:p>
-              <a:pPr algn="l">
-                <a:lnSpc>
-                  <a:spcPct val="150000"/>
-                </a:lnSpc>
-              </a:pPr>
-              <a:r>
-                <a:rPr lang="zh-TW" sz="2000" b="1" dirty="0">
-                  <a:solidFill>
-                    <a:schemeClr val="accent1"/>
-                  </a:solidFill>
-                  <a:latin typeface="+mn-lt"/>
-                  <a:ea typeface="+mn-ea"/>
-                  <a:cs typeface="+mn-cs"/>
-                </a:rPr>
-                <a:t>01　確認場上守位</a:t>
-              </a:r>
-            </a:p>
-          </p:txBody>
-        </p:sp>
-      </p:grpSp>
-      <p:grpSp>
-        <p:nvGrpSpPr>
-          <p:cNvPr id="12" name="lineup-step-two"/>
-          <p:cNvGrpSpPr/>
-          <p:nvPr/>
-        </p:nvGrpSpPr>
-        <p:grpSpPr>
-          <a:xfrm>
-            <a:off x="4191477" y="1536700"/>
-            <a:ext cx="2982255" cy="469392"/>
-            <a:chOff x="6369558" y="1536700"/>
-            <a:chExt cx="2982255" cy="469392"/>
-          </a:xfrm>
-        </p:grpSpPr>
-        <p:sp>
-          <p:nvSpPr>
-            <p:cNvPr id="11" name="TextBox 11"/>
-            <p:cNvSpPr txBox="1"/>
-            <p:nvPr/>
-          </p:nvSpPr>
-          <p:spPr>
-            <a:xfrm>
-              <a:off x="6369558" y="1536700"/>
-              <a:ext cx="2982255" cy="469392"/>
-            </a:xfrm>
-            <a:prstGeom prst="rect">
-              <a:avLst/>
-            </a:prstGeom>
-            <a:noFill/>
-            <a:ln>
-              <a:noFill/>
-            </a:ln>
-          </p:spPr>
-          <p:txBody>
-            <a:bodyPr wrap="none" lIns="0" tIns="0" rIns="0" bIns="0" anchor="t" anchorCtr="0">
-              <a:spAutoFit/>
-            </a:bodyPr>
-            <a:lstStyle/>
-            <a:p>
-              <a:pPr algn="l">
-                <a:lnSpc>
-                  <a:spcPct val="150000"/>
-                </a:lnSpc>
-              </a:pPr>
-              <a:r>
-                <a:rPr lang="zh-TW" sz="2000" b="1" dirty="0">
-                  <a:solidFill>
-                    <a:schemeClr val="accent1"/>
-                  </a:solidFill>
-                  <a:latin typeface="+mn-lt"/>
-                  <a:ea typeface="+mn-ea"/>
-                  <a:cs typeface="+mn-cs"/>
-                </a:rPr>
-                <a:t>02　調整棒次並套用</a:t>
-              </a:r>
-            </a:p>
-          </p:txBody>
-        </p:sp>
-      </p:grpSp>
-      <p:grpSp>
-        <p:nvGrpSpPr>
-          <p:cNvPr id="18" name="lineup-limit"/>
-          <p:cNvGrpSpPr/>
-          <p:nvPr/>
-        </p:nvGrpSpPr>
-        <p:grpSpPr>
-          <a:xfrm>
-            <a:off x="7566769" y="5568696"/>
-            <a:ext cx="4237101" cy="322707"/>
-            <a:chOff x="6373368" y="5988050"/>
-            <a:chExt cx="4237101" cy="322707"/>
-          </a:xfrm>
-        </p:grpSpPr>
-        <p:sp>
-          <p:nvSpPr>
-            <p:cNvPr id="17" name="TextBox 17"/>
-            <p:cNvSpPr txBox="1"/>
-            <p:nvPr/>
-          </p:nvSpPr>
-          <p:spPr>
-            <a:xfrm>
-              <a:off x="6373368" y="5988050"/>
-              <a:ext cx="4237101" cy="322707"/>
-            </a:xfrm>
-            <a:prstGeom prst="rect">
-              <a:avLst/>
-            </a:prstGeom>
-            <a:noFill/>
-            <a:ln>
-              <a:noFill/>
-            </a:ln>
-          </p:spPr>
-          <p:txBody>
-            <a:bodyPr wrap="none" lIns="0" tIns="0" rIns="0" bIns="0" anchor="t" anchorCtr="0">
-              <a:spAutoFit/>
-            </a:bodyPr>
-            <a:lstStyle/>
-            <a:p>
-              <a:pPr algn="l">
-                <a:lnSpc>
-                  <a:spcPct val="150000"/>
-                </a:lnSpc>
-              </a:pPr>
-              <a:r>
-                <a:rPr lang="zh-TW" sz="1600" dirty="0">
-                  <a:solidFill>
-                    <a:schemeClr val="accent5"/>
-                  </a:solidFill>
-                  <a:latin typeface="+mn-lt"/>
-                  <a:ea typeface="+mn-ea"/>
-                  <a:cs typeface="+mn-cs"/>
-                </a:rPr>
-                <a:t>出賽名單由使用者確認。</a:t>
+                    <a:srgbClr val="18344A"/>
+                  </a:solidFill>
+                  <a:latin typeface="Arial"/>
+                  <a:ea typeface="Microsoft JhengHei"/>
+                  <a:cs typeface="Arial"/>
+                </a:rPr>
+                <a:t>確認名單，排除場上球員</a:t>
               </a:r>
             </a:p>
           </p:txBody>
@@ -2101,237 +1924,309 @@
           </a:p>
         </p:txBody>
       </p:sp>
-      <p:pic>
-        <p:nvPicPr>
-          <p:cNvPr id="20" name="Picture 19" descr="lineup_field.png"/>
-          <p:cNvPicPr>
-            <a:picLocks noChangeAspect="1"/>
-          </p:cNvPicPr>
+      <p:sp>
+        <p:nvSpPr>
+          <p:cNvPr id="8" name="Rectangle 8"/>
+          <p:cNvSpPr/>
           <p:nvPr/>
-        </p:nvPicPr>
-        <p:blipFill>
-          <a:blip r:embed="rId5"/>
-          <a:stretch>
-            <a:fillRect/>
-          </a:stretch>
-        </p:blipFill>
+        </p:nvSpPr>
         <p:spPr>
           <a:xfrm>
-            <a:off x="612648" y="2093976"/>
-            <a:ext cx="3258789" cy="3886200"/>
+            <a:off x="609600" y="1257300"/>
+            <a:ext cx="857250" cy="38100"/>
           </a:xfrm>
           <a:prstGeom prst="rect">
             <a:avLst/>
           </a:prstGeom>
+          <a:solidFill>
+            <a:srgbClr val="B54836"/>
+          </a:solidFill>
+          <a:ln>
+            <a:noFill/>
+          </a:ln>
         </p:spPr>
-      </p:pic>
-      <p:pic>
-        <p:nvPicPr>
-          <p:cNvPr id="21" name="Picture 20" descr="lineup_order.png"/>
-          <p:cNvPicPr>
-            <a:picLocks noChangeAspect="1"/>
-          </p:cNvPicPr>
+      </p:sp>
+      <p:grpSp>
+        <p:nvGrpSpPr>
+          <p:cNvPr id="11" name="lineup-field"/>
+          <p:cNvGrpSpPr/>
           <p:nvPr/>
-        </p:nvPicPr>
-        <p:blipFill>
-          <a:blip r:embed="rId6"/>
-          <a:stretch>
-            <a:fillRect/>
-          </a:stretch>
-        </p:blipFill>
-        <p:spPr>
-          <a:xfrm>
-            <a:off x="4191477" y="2093976"/>
-            <a:ext cx="2963812" cy="3886200"/>
-          </a:xfrm>
-          <a:prstGeom prst="rect">
-            <a:avLst/>
-          </a:prstGeom>
-        </p:spPr>
-      </p:pic>
-      <p:sp>
-        <p:nvSpPr>
-          <p:cNvPr id="22" name="TextBox 21"/>
-          <p:cNvSpPr txBox="1"/>
+        </p:nvGrpSpPr>
+        <p:grpSpPr>
+          <a:xfrm>
+            <a:off x="609600" y="1562100"/>
+            <a:ext cx="10972800" cy="4762500"/>
+            <a:chOff x="609600" y="1562100"/>
+            <a:chExt cx="10972800" cy="4762500"/>
+          </a:xfrm>
+        </p:grpSpPr>
+        <p:sp>
+          <p:nvSpPr>
+            <p:cNvPr id="9" name="TextBox 9"/>
+            <p:cNvSpPr txBox="1"/>
+            <p:nvPr/>
+          </p:nvSpPr>
+          <p:spPr>
+            <a:xfrm>
+              <a:off x="609600" y="1562100"/>
+              <a:ext cx="10972800" cy="426720"/>
+            </a:xfrm>
+            <a:prstGeom prst="rect">
+              <a:avLst/>
+            </a:prstGeom>
+            <a:noFill/>
+            <a:ln>
+              <a:noFill/>
+            </a:ln>
+          </p:spPr>
+          <p:txBody>
+            <a:bodyPr wrap="none" lIns="0" tIns="40005" rIns="0" bIns="0" anchor="t" anchorCtr="0">
+              <a:noAutofit/>
+            </a:bodyPr>
+            <a:lstStyle/>
+            <a:p>
+              <a:pPr algn="l"/>
+              <a:r>
+                <a:rPr lang="zh-TW" sz="2100" b="1" dirty="0">
+                  <a:solidFill>
+                    <a:srgbClr val="18344A"/>
+                  </a:solidFill>
+                  <a:latin typeface="Microsoft JhengHei"/>
+                  <a:ea typeface="Microsoft JhengHei"/>
+                  <a:cs typeface="Microsoft JhengHei"/>
+                </a:rPr>
+                <a:t>01　確認守位與場上球員</a:t>
+              </a:r>
+            </a:p>
+          </p:txBody>
+        </p:sp>
+        <p:pic>
+          <p:nvPicPr>
+            <p:cNvPr id="10" name="Image 10"/>
+            <p:cNvPicPr>
+              <a:picLocks noChangeAspect="1"/>
+            </p:cNvPicPr>
+            <p:nvPr/>
+          </p:nvPicPr>
+          <p:blipFill>
+            <a:blip r:embed="rId7"/>
+            <a:stretch>
+              <a:fillRect/>
+            </a:stretch>
+          </p:blipFill>
+          <p:spPr>
+            <a:xfrm>
+              <a:off x="812275" y="2038350"/>
+              <a:ext cx="4357150" cy="4286250"/>
+            </a:xfrm>
+            <a:prstGeom prst="rect">
+              <a:avLst/>
+            </a:prstGeom>
+          </p:spPr>
+        </p:pic>
+      </p:grpSp>
+      <p:grpSp>
+        <p:nvGrpSpPr>
+          <p:cNvPr id="14" name="lineup-order"/>
+          <p:cNvGrpSpPr/>
           <p:nvPr/>
-        </p:nvSpPr>
-        <p:spPr>
-          <a:xfrm>
-            <a:off x="7566769" y="2185416"/>
-            <a:ext cx="4018679" cy="3291840"/>
-          </a:xfrm>
-          <a:prstGeom prst="rect">
-            <a:avLst/>
-          </a:prstGeom>
-          <a:noFill/>
-        </p:spPr>
-        <p:txBody>
-          <a:bodyPr wrap="square" lIns="0" rIns="0" tIns="0" bIns="0" anchor="t">
-            <a:spAutoFit/>
-          </a:bodyPr>
-          <a:lstStyle/>
-          <a:p>
-            <a:pPr algn="l">
-              <a:lnSpc>
-                <a:spcPct val="150000"/>
-              </a:lnSpc>
-            </a:pPr>
-            <a:r>
-              <a:rPr sz="1800" b="0">
-                <a:solidFill>
-                  <a:srgbClr val="5F6670"/>
-                </a:solidFill>
-              </a:rPr>
-              <a:t>預設帶入</a:t>
-            </a:r>
-            <a:r>
-              <a:rPr sz="2000" b="1">
-                <a:solidFill>
-                  <a:srgbClr val="1B334D"/>
-                </a:solidFill>
-              </a:rPr>
-              <a:t/>
-            </a:r>
-          </a:p>
-          <a:p>
-            <a:pPr algn="l">
-              <a:lnSpc>
-                <a:spcPct val="150000"/>
-              </a:lnSpc>
-            </a:pPr>
-            <a:r>
-              <a:rPr sz="2000" b="1">
-                <a:solidFill>
-                  <a:srgbClr val="1B334D"/>
-                </a:solidFill>
-              </a:rPr>
-              <a:t>2025 最後 30 場最常先發</a:t>
-            </a:r>
-            <a:r>
-              <a:rPr sz="1800" b="0">
-                <a:solidFill>
-                  <a:srgbClr val="1B334D"/>
-                </a:solidFill>
-              </a:rPr>
-              <a:t/>
-            </a:r>
-          </a:p>
-          <a:p>
-            <a:pPr algn="l">
-              <a:lnSpc>
-                <a:spcPct val="150000"/>
-              </a:lnSpc>
-            </a:pPr>
-            <a:r>
-              <a:rPr sz="1800" b="0">
-                <a:solidFill>
-                  <a:srgbClr val="1B334D"/>
-                </a:solidFill>
-              </a:rPr>
-              <a:t/>
-            </a:r>
-          </a:p>
-          <a:p>
-            <a:pPr algn="l">
-              <a:lnSpc>
-                <a:spcPct val="150000"/>
-              </a:lnSpc>
-            </a:pPr>
-            <a:r>
-              <a:rPr sz="1800" b="0">
-                <a:solidFill>
-                  <a:srgbClr val="1B334D"/>
-                </a:solidFill>
-              </a:rPr>
-              <a:t>可互換守位、調整棒次</a:t>
-            </a:r>
-            <a:r>
-              <a:rPr sz="1800" b="0">
-                <a:solidFill>
-                  <a:srgbClr val="1B334D"/>
-                </a:solidFill>
-              </a:rPr>
-              <a:t/>
-            </a:r>
-          </a:p>
-          <a:p>
-            <a:pPr algn="l">
-              <a:lnSpc>
-                <a:spcPct val="150000"/>
-              </a:lnSpc>
-            </a:pPr>
-            <a:r>
-              <a:rPr sz="1800" b="0">
-                <a:solidFill>
-                  <a:srgbClr val="1B334D"/>
-                </a:solidFill>
-              </a:rPr>
-              <a:t>按「套用配置」後</a:t>
-            </a:r>
-            <a:r>
-              <a:rPr sz="1800" b="0">
-                <a:solidFill>
-                  <a:srgbClr val="1B334D"/>
-                </a:solidFill>
-              </a:rPr>
-              <a:t/>
-            </a:r>
-          </a:p>
-          <a:p>
-            <a:pPr algn="l">
-              <a:lnSpc>
-                <a:spcPct val="150000"/>
-              </a:lnSpc>
-            </a:pPr>
-            <a:r>
-              <a:rPr sz="1800" b="0">
-                <a:solidFill>
-                  <a:srgbClr val="1B334D"/>
-                </a:solidFill>
-              </a:rPr>
-              <a:t>代打候選自動排除場上球員</a:t>
-            </a:r>
-            <a:r>
-              <a:rPr sz="1800" b="1">
-                <a:solidFill>
-                  <a:srgbClr val="237A53"/>
-                </a:solidFill>
-              </a:rPr>
-              <a:t/>
-            </a:r>
-          </a:p>
-          <a:p>
-            <a:pPr algn="l">
-              <a:lnSpc>
-                <a:spcPct val="150000"/>
-              </a:lnSpc>
-            </a:pPr>
-            <a:r>
-              <a:rPr sz="1800" b="1">
-                <a:solidFill>
-                  <a:srgbClr val="237A53"/>
-                </a:solidFill>
-              </a:rPr>
-              <a:t/>
-            </a:r>
-          </a:p>
-          <a:p>
-            <a:pPr algn="l">
-              <a:lnSpc>
-                <a:spcPct val="150000"/>
-              </a:lnSpc>
-            </a:pPr>
-            <a:r>
-              <a:rPr sz="1800" b="1">
-                <a:solidFill>
-                  <a:srgbClr val="237A53"/>
-                </a:solidFill>
-              </a:rPr>
-              <a:t>不設定名單也能直接評估</a:t>
-            </a:r>
-          </a:p>
-        </p:txBody>
-      </p:sp>
+        </p:nvGrpSpPr>
+        <p:grpSpPr>
+          <a:xfrm>
+            <a:off x="5943600" y="1562100"/>
+            <a:ext cx="5638800" cy="2943225"/>
+            <a:chOff x="5943600" y="1562100"/>
+            <a:chExt cx="5638800" cy="2943225"/>
+          </a:xfrm>
+        </p:grpSpPr>
+        <p:sp>
+          <p:nvSpPr>
+            <p:cNvPr id="12" name="TextBox 12"/>
+            <p:cNvSpPr txBox="1"/>
+            <p:nvPr/>
+          </p:nvSpPr>
+          <p:spPr>
+            <a:xfrm>
+              <a:off x="5943600" y="1562100"/>
+              <a:ext cx="5638800" cy="426720"/>
+            </a:xfrm>
+            <a:prstGeom prst="rect">
+              <a:avLst/>
+            </a:prstGeom>
+            <a:noFill/>
+            <a:ln>
+              <a:noFill/>
+            </a:ln>
+          </p:spPr>
+          <p:txBody>
+            <a:bodyPr wrap="none" lIns="0" tIns="40005" rIns="0" bIns="0" anchor="t" anchorCtr="0">
+              <a:noAutofit/>
+            </a:bodyPr>
+            <a:lstStyle/>
+            <a:p>
+              <a:pPr algn="l"/>
+              <a:r>
+                <a:rPr lang="zh-TW" sz="2100" b="1" dirty="0">
+                  <a:solidFill>
+                    <a:srgbClr val="18344A"/>
+                  </a:solidFill>
+                  <a:latin typeface="Microsoft JhengHei"/>
+                  <a:ea typeface="Microsoft JhengHei"/>
+                  <a:cs typeface="Microsoft JhengHei"/>
+                </a:rPr>
+                <a:t>02　調整棒次與守位</a:t>
+              </a:r>
+            </a:p>
+          </p:txBody>
+        </p:sp>
+        <p:pic>
+          <p:nvPicPr>
+            <p:cNvPr id="13" name="Image 13"/>
+            <p:cNvPicPr>
+              <a:picLocks noChangeAspect="1"/>
+            </p:cNvPicPr>
+            <p:nvPr/>
+          </p:nvPicPr>
+          <p:blipFill>
+            <a:blip r:embed="rId8"/>
+            <a:stretch>
+              <a:fillRect/>
+            </a:stretch>
+          </p:blipFill>
+          <p:spPr>
+            <a:xfrm>
+              <a:off x="5946141" y="2095500"/>
+              <a:ext cx="5633718" cy="2409825"/>
+            </a:xfrm>
+            <a:prstGeom prst="rect">
+              <a:avLst/>
+            </a:prstGeom>
+          </p:spPr>
+        </p:pic>
+      </p:grpSp>
+      <p:grpSp>
+        <p:nvGrpSpPr>
+          <p:cNvPr id="17" name="lineup-rules"/>
+          <p:cNvGrpSpPr/>
+          <p:nvPr/>
+        </p:nvGrpSpPr>
+        <p:grpSpPr>
+          <a:xfrm>
+            <a:off x="5943600" y="4705350"/>
+            <a:ext cx="5638800" cy="1556385"/>
+            <a:chOff x="5943600" y="4705350"/>
+            <a:chExt cx="5638800" cy="1556385"/>
+          </a:xfrm>
+        </p:grpSpPr>
+        <p:sp>
+          <p:nvSpPr>
+            <p:cNvPr id="15" name="TextBox 15"/>
+            <p:cNvSpPr txBox="1"/>
+            <p:nvPr/>
+          </p:nvSpPr>
+          <p:spPr>
+            <a:xfrm>
+              <a:off x="5943600" y="4705350"/>
+              <a:ext cx="5638800" cy="426720"/>
+            </a:xfrm>
+            <a:prstGeom prst="rect">
+              <a:avLst/>
+            </a:prstGeom>
+            <a:noFill/>
+            <a:ln>
+              <a:noFill/>
+            </a:ln>
+          </p:spPr>
+          <p:txBody>
+            <a:bodyPr wrap="none" lIns="0" tIns="40005" rIns="0" bIns="0" anchor="t" anchorCtr="0">
+              <a:noAutofit/>
+            </a:bodyPr>
+            <a:lstStyle/>
+            <a:p>
+              <a:pPr algn="l"/>
+              <a:r>
+                <a:rPr lang="zh-TW" sz="2100" b="1" dirty="0">
+                  <a:solidFill>
+                    <a:srgbClr val="18344A"/>
+                  </a:solidFill>
+                  <a:latin typeface="Microsoft JhengHei"/>
+                  <a:ea typeface="Microsoft JhengHei"/>
+                  <a:cs typeface="Microsoft JhengHei"/>
+                </a:rPr>
+                <a:t>套用配置後，排除場上球員</a:t>
+              </a:r>
+            </a:p>
+          </p:txBody>
+        </p:sp>
+        <p:sp>
+          <p:nvSpPr>
+            <p:cNvPr id="16" name="TextBox 16"/>
+            <p:cNvSpPr txBox="1"/>
+            <p:nvPr/>
+          </p:nvSpPr>
+          <p:spPr>
+            <a:xfrm>
+              <a:off x="5943600" y="5172075"/>
+              <a:ext cx="5638800" cy="1089660"/>
+            </a:xfrm>
+            <a:prstGeom prst="rect">
+              <a:avLst/>
+            </a:prstGeom>
+            <a:noFill/>
+            <a:ln>
+              <a:noFill/>
+            </a:ln>
+          </p:spPr>
+          <p:txBody>
+            <a:bodyPr wrap="none" lIns="0" tIns="34290" rIns="0" bIns="0" anchor="t" anchorCtr="0">
+              <a:noAutofit/>
+            </a:bodyPr>
+            <a:lstStyle/>
+            <a:p>
+              <a:pPr algn="l">
+                <a:lnSpc>
+                  <a:spcPts val="2850"/>
+                </a:lnSpc>
+              </a:pPr>
+              <a:r>
+                <a:rPr lang="zh-TW" sz="1800" dirty="0">
+                  <a:solidFill>
+                    <a:srgbClr val="58616B"/>
+                  </a:solidFill>
+                  <a:latin typeface="Microsoft JhengHei"/>
+                  <a:ea typeface="Microsoft JhengHei"/>
+                  <a:cs typeface="Microsoft JhengHei"/>
+                </a:rPr>
+                <a:t>預設依 2025 最後 30 場常見先發帶入，</a:t>
+              </a:r>
+              <a:br/>
+              <a:r>
+                <a:rPr lang="zh-TW" sz="1800" dirty="0">
+                  <a:solidFill>
+                    <a:srgbClr val="58616B"/>
+                  </a:solidFill>
+                  <a:latin typeface="Microsoft JhengHei"/>
+                  <a:ea typeface="Microsoft JhengHei"/>
+                  <a:cs typeface="Microsoft JhengHei"/>
+                </a:rPr>
+                <a:t>可由使用者調整；不設定也能直接評估。</a:t>
+              </a:r>
+              <a:br/>
+              <a:r>
+                <a:rPr lang="zh-TW" sz="1800" dirty="0">
+                  <a:solidFill>
+                    <a:srgbClr val="58616B"/>
+                  </a:solidFill>
+                  <a:latin typeface="Microsoft JhengHei"/>
+                  <a:ea typeface="Microsoft JhengHei"/>
+                  <a:cs typeface="Microsoft JhengHei"/>
+                </a:rPr>
+                <a:t>當日登錄與出賽資格仍需人工確認。</a:t>
+              </a:r>
+            </a:p>
+          </p:txBody>
+        </p:sp>
+      </p:grpSp>
     </p:spTree>
   </p:cSld>
   <p:clrMapOvr>
@@ -2341,7 +2236,7 @@
 </file>
 
 <file path=ppt/slides/slide13.xml><?xml version="1.0" encoding="utf-8"?>
-<p:sld xmlns:a="http://schemas.openxmlformats.org/drawingml/2006/main" xmlns:r="http://schemas.openxmlformats.org/officeDocument/2006/relationships" xmlns:p="http://schemas.openxmlformats.org/presentationml/2006/main">
+<p:sld xmlns:a="http://schemas.openxmlformats.org/drawingml/2006/main" xmlns:p="http://schemas.openxmlformats.org/presentationml/2006/main">
   <p:cSld>
     <p:bg>
       <p:bgPr>
@@ -2432,21 +2327,21 @@
         </p:nvGrpSpPr>
         <p:grpSpPr>
           <a:xfrm>
-            <a:off x="592836" y="546100"/>
+            <a:off x="592836" y="546068"/>
             <a:ext cx="6697218" cy="645414"/>
-            <a:chOff x="592836" y="546100"/>
+            <a:chOff x="592836" y="546068"/>
             <a:chExt cx="6697218" cy="645414"/>
           </a:xfrm>
         </p:grpSpPr>
         <p:sp>
           <p:nvSpPr>
             <p:cNvPr id="4" name="TextBox 4"/>
-            <p:cNvSpPr txBox="1"/>
-            <p:nvPr/>
-          </p:nvSpPr>
-          <p:spPr>
-            <a:xfrm>
-              <a:off x="592836" y="546100"/>
+            <p:cNvSpPr/>
+            <p:nvPr/>
+          </p:nvSpPr>
+          <p:spPr>
+            <a:xfrm>
+              <a:off x="592836" y="546068"/>
               <a:ext cx="6697218" cy="645414"/>
             </a:xfrm>
             <a:prstGeom prst="rect">
@@ -2458,8 +2353,8 @@
             </a:ln>
           </p:spPr>
           <p:txBody>
-            <a:bodyPr wrap="none" lIns="0" tIns="0" rIns="0" bIns="0" anchor="t" anchorCtr="0">
-              <a:spAutoFit/>
+            <a:bodyPr wrap="none" lIns="0" tIns="32" rIns="0" bIns="0" anchor="t" anchorCtr="0">
+              <a:noAutofit/>
             </a:bodyPr>
             <a:lstStyle/>
             <a:p>
@@ -2467,13 +2362,13 @@
               <a:r>
                 <a:rPr lang="zh-TW" sz="3200" b="1" dirty="0">
                   <a:solidFill>
-                    <a:schemeClr val="accent1"/>
-                  </a:solidFill>
-                  <a:latin typeface="+mn-lt"/>
-                  <a:ea typeface="+mn-ea"/>
-                  <a:cs typeface="+mn-cs"/>
-                </a:rPr>
-                <a:t>只改候選人選，才看得出換人差距</a:t>
+                    <a:srgbClr val="18344A"/>
+                  </a:solidFill>
+                  <a:latin typeface="Arial"/>
+                  <a:ea typeface="Microsoft JhengHei"/>
+                  <a:cs typeface="Arial"/>
+                </a:rPr>
+                <a:t>固定比較條件，只替換候選人選</a:t>
               </a:r>
             </a:p>
           </p:txBody>
@@ -3232,7 +3127,7 @@
 </file>
 
 <file path=ppt/slides/slide14.xml><?xml version="1.0" encoding="utf-8"?>
-<p:sld xmlns:a="http://schemas.openxmlformats.org/drawingml/2006/main" xmlns:r="http://schemas.openxmlformats.org/officeDocument/2006/relationships" xmlns:p="http://schemas.openxmlformats.org/presentationml/2006/main">
+<p:sld xmlns:a="http://schemas.openxmlformats.org/drawingml/2006/main" xmlns:p="http://schemas.openxmlformats.org/presentationml/2006/main">
   <p:cSld>
     <p:bg>
       <p:bgPr>
@@ -3323,21 +3218,21 @@
         </p:nvGrpSpPr>
         <p:grpSpPr>
           <a:xfrm>
-            <a:off x="592836" y="546100"/>
+            <a:off x="592836" y="546068"/>
             <a:ext cx="5808726" cy="645414"/>
-            <a:chOff x="592836" y="546100"/>
+            <a:chOff x="592836" y="546068"/>
             <a:chExt cx="5808726" cy="645414"/>
           </a:xfrm>
         </p:grpSpPr>
         <p:sp>
           <p:nvSpPr>
             <p:cNvPr id="4" name="TextBox 4"/>
-            <p:cNvSpPr txBox="1"/>
-            <p:nvPr/>
-          </p:nvSpPr>
-          <p:spPr>
-            <a:xfrm>
-              <a:off x="592836" y="546100"/>
+            <p:cNvSpPr/>
+            <p:nvPr/>
+          </p:nvSpPr>
+          <p:spPr>
+            <a:xfrm>
+              <a:off x="592836" y="546068"/>
               <a:ext cx="5808726" cy="645414"/>
             </a:xfrm>
             <a:prstGeom prst="rect">
@@ -3349,8 +3244,8 @@
             </a:ln>
           </p:spPr>
           <p:txBody>
-            <a:bodyPr wrap="none" lIns="0" tIns="0" rIns="0" bIns="0" anchor="t" anchorCtr="0">
-              <a:spAutoFit/>
+            <a:bodyPr wrap="none" lIns="0" tIns="32" rIns="0" bIns="0" anchor="t" anchorCtr="0">
+              <a:noAutofit/>
             </a:bodyPr>
             <a:lstStyle/>
             <a:p>
@@ -3358,13 +3253,13 @@
               <a:r>
                 <a:rPr lang="zh-TW" sz="3200" b="1" dirty="0">
                   <a:solidFill>
-                    <a:schemeClr val="accent1"/>
-                  </a:solidFill>
-                  <a:latin typeface="+mn-lt"/>
-                  <a:ea typeface="+mn-ea"/>
-                  <a:cs typeface="+mn-cs"/>
-                </a:rPr>
-                <a:t>優勢有多大？還需要誰接守？</a:t>
+                    <a:srgbClr val="18344A"/>
+                  </a:solidFill>
+                  <a:latin typeface="Arial"/>
+                  <a:ea typeface="Microsoft JhengHei"/>
+                  <a:cs typeface="Arial"/>
+                </a:rPr>
+                <a:t>模型差距與守備需求，一起看</a:t>
               </a:r>
             </a:p>
           </p:txBody>
@@ -3379,9 +3274,9 @@
         <p:grpSpPr>
           <a:xfrm>
             <a:off x="590550" y="1663700"/>
-            <a:ext cx="3422142" cy="1445768"/>
+            <a:ext cx="3422142" cy="1445736"/>
             <a:chOff x="590550" y="1663700"/>
-            <a:chExt cx="3422142" cy="1445768"/>
+            <a:chExt cx="3422142" cy="1445736"/>
           </a:xfrm>
         </p:grpSpPr>
         <p:sp>
@@ -3427,12 +3322,12 @@
         <p:sp>
           <p:nvSpPr>
             <p:cNvPr id="8" name="TextBox 8"/>
-            <p:cNvSpPr txBox="1"/>
-            <p:nvPr/>
-          </p:nvSpPr>
-          <p:spPr>
-            <a:xfrm>
-              <a:off x="598932" y="2698750"/>
+            <p:cNvSpPr/>
+            <p:nvPr/>
+          </p:nvSpPr>
+          <p:spPr>
+            <a:xfrm>
+              <a:off x="598932" y="2698718"/>
               <a:ext cx="3413760" cy="410718"/>
             </a:xfrm>
             <a:prstGeom prst="rect">
@@ -3444,26 +3339,22 @@
             </a:ln>
           </p:spPr>
           <p:txBody>
-            <a:bodyPr wrap="none" lIns="0" tIns="0" rIns="0" bIns="0" anchor="t" anchorCtr="0">
-              <a:spAutoFit/>
-            </a:bodyPr>
-            <a:lstStyle/>
-            <a:p>
-              <a:pPr algn="l">
-                <a:lnSpc>
-                  <a:spcPct val="150000"/>
-                </a:lnSpc>
-              </a:pPr>
+            <a:bodyPr wrap="none" lIns="0" tIns="88932" rIns="0" bIns="0" anchor="t" anchorCtr="0">
+              <a:noAutofit/>
+            </a:bodyPr>
+            <a:lstStyle/>
+            <a:p>
+              <a:pPr algn="l"/>
               <a:r>
                 <a:rPr lang="zh-TW" sz="1800" dirty="0">
                   <a:solidFill>
-                    <a:schemeClr val="accent1"/>
-                  </a:solidFill>
-                  <a:latin typeface="+mn-lt"/>
-                  <a:ea typeface="+mn-ea"/>
-                  <a:cs typeface="+mn-cs"/>
-                </a:rPr>
-                <a:t>相對林佳緯，單位為百分點</a:t>
+                    <a:srgbClr val="18344A"/>
+                  </a:solidFill>
+                  <a:latin typeface="Arial"/>
+                  <a:ea typeface="Microsoft JhengHei"/>
+                  <a:cs typeface="Arial"/>
+                </a:rPr>
+                <a:t>相對林佳緯的模型差距（百分點）</a:t>
               </a:r>
             </a:p>
           </p:txBody>
@@ -3576,52 +3467,48 @@
         </p:nvGrpSpPr>
         <p:grpSpPr>
           <a:xfrm>
-            <a:off x="597408" y="3403600"/>
-            <a:ext cx="6553185" cy="754507"/>
-            <a:chOff x="597408" y="3403600"/>
-            <a:chExt cx="6553185" cy="754507"/>
+            <a:off x="597408" y="3403568"/>
+            <a:ext cx="6553200" cy="754571"/>
+            <a:chOff x="597408" y="3403568"/>
+            <a:chExt cx="6553200" cy="754571"/>
           </a:xfrm>
         </p:grpSpPr>
         <p:sp>
           <p:nvSpPr>
             <p:cNvPr id="13" name="TextBox 13"/>
-            <p:cNvSpPr txBox="1"/>
-            <p:nvPr/>
-          </p:nvSpPr>
-          <p:spPr>
-            <a:xfrm>
-              <a:off x="597408" y="3403600"/>
-              <a:ext cx="6553185" cy="469392"/>
-            </a:xfrm>
-            <a:prstGeom prst="rect">
-              <a:avLst/>
-            </a:prstGeom>
-            <a:noFill/>
-            <a:ln>
-              <a:noFill/>
-            </a:ln>
-          </p:spPr>
-          <p:txBody>
-            <a:bodyPr wrap="none" lIns="0" tIns="0" rIns="0" bIns="0" anchor="t" anchorCtr="0">
-              <a:spAutoFit/>
-            </a:bodyPr>
-            <a:lstStyle/>
-            <a:p>
-              <a:pPr algn="l">
-                <a:lnSpc>
-                  <a:spcPct val="150000"/>
-                </a:lnSpc>
-              </a:pPr>
+            <p:cNvSpPr/>
+            <p:nvPr/>
+          </p:nvSpPr>
+          <p:spPr>
+            <a:xfrm>
+              <a:off x="597408" y="3403568"/>
+              <a:ext cx="6553200" cy="469392"/>
+            </a:xfrm>
+            <a:prstGeom prst="rect">
+              <a:avLst/>
+            </a:prstGeom>
+            <a:noFill/>
+            <a:ln>
+              <a:noFill/>
+            </a:ln>
+          </p:spPr>
+          <p:txBody>
+            <a:bodyPr wrap="none" lIns="0" tIns="101632" rIns="0" bIns="0" anchor="t" anchorCtr="0">
+              <a:noAutofit/>
+            </a:bodyPr>
+            <a:lstStyle/>
+            <a:p>
+              <a:pPr algn="l"/>
               <a:r>
                 <a:rPr lang="zh-TW" sz="2000" b="1" dirty="0">
                   <a:solidFill>
-                    <a:schemeClr val="accent1"/>
-                  </a:solidFill>
-                  <a:latin typeface="+mn-lt"/>
-                  <a:ea typeface="+mn-ea"/>
-                  <a:cs typeface="+mn-cs"/>
-                </a:rPr>
-                <a:t>超過 1 百分點門檻，系統建議胡金龍代打。</a:t>
+                    <a:srgbClr val="18344A"/>
+                  </a:solidFill>
+                  <a:latin typeface="Arial"/>
+                  <a:ea typeface="Microsoft JhengHei"/>
+                  <a:cs typeface="Arial"/>
+                </a:rPr>
+                <a:t>本例差距達 1 百分點門檻，建議胡金龍代打。</a:t>
               </a:r>
             </a:p>
           </p:txBody>
@@ -3629,12 +3516,12 @@
         <p:sp>
           <p:nvSpPr>
             <p:cNvPr id="14" name="TextBox 14"/>
-            <p:cNvSpPr txBox="1"/>
-            <p:nvPr/>
-          </p:nvSpPr>
-          <p:spPr>
-            <a:xfrm>
-              <a:off x="601218" y="3835400"/>
+            <p:cNvSpPr/>
+            <p:nvPr/>
+          </p:nvSpPr>
+          <p:spPr>
+            <a:xfrm>
+              <a:off x="601218" y="3835432"/>
               <a:ext cx="5791962" cy="322707"/>
             </a:xfrm>
             <a:prstGeom prst="rect">
@@ -3646,26 +3533,22 @@
             </a:ln>
           </p:spPr>
           <p:txBody>
-            <a:bodyPr wrap="none" lIns="0" tIns="0" rIns="0" bIns="0" anchor="t" anchorCtr="0">
-              <a:spAutoFit/>
-            </a:bodyPr>
-            <a:lstStyle/>
-            <a:p>
-              <a:pPr algn="l">
-                <a:lnSpc>
-                  <a:spcPct val="150000"/>
-                </a:lnSpc>
-              </a:pPr>
+            <a:bodyPr wrap="none" lIns="0" tIns="76168" rIns="0" bIns="0" anchor="t" anchorCtr="0">
+              <a:noAutofit/>
+            </a:bodyPr>
+            <a:lstStyle/>
+            <a:p>
+              <a:pPr algn="l"/>
               <a:r>
                 <a:rPr lang="zh-TW" sz="1600" dirty="0">
                   <a:solidFill>
-                    <a:schemeClr val="accent5"/>
-                  </a:solidFill>
-                  <a:latin typeface="+mn-lt"/>
-                  <a:ea typeface="+mn-ea"/>
-                  <a:cs typeface="+mn-cs"/>
-                </a:rPr>
-                <a:t>主要原因：右打對左投、整體打擊能力高於聯盟平均；模型差距不等於實際換人效益。</a:t>
+                    <a:srgbClr val="58616B"/>
+                  </a:solidFill>
+                  <a:latin typeface="Arial"/>
+                  <a:ea typeface="Microsoft JhengHei"/>
+                  <a:cs typeface="Arial"/>
+                </a:rPr>
+                <a:t>依據：左右對戰與整體打擊能力；模型差距不等於實際換人效益。</a:t>
               </a:r>
             </a:p>
           </p:txBody>
@@ -4791,7 +4674,7 @@
 </file>
 
 <file path=ppt/slides/slide16.xml><?xml version="1.0" encoding="utf-8"?>
-<p:sld xmlns:a="http://schemas.openxmlformats.org/drawingml/2006/main" xmlns:r="http://schemas.openxmlformats.org/officeDocument/2006/relationships" xmlns:p="http://schemas.openxmlformats.org/presentationml/2006/main">
+<p:sld xmlns:a="http://schemas.openxmlformats.org/drawingml/2006/main" xmlns:p="http://schemas.openxmlformats.org/presentationml/2006/main">
   <p:cSld>
     <p:bg>
       <p:bgPr>
@@ -4882,21 +4765,21 @@
         </p:nvGrpSpPr>
         <p:grpSpPr>
           <a:xfrm>
-            <a:off x="592836" y="546100"/>
+            <a:off x="592836" y="546068"/>
             <a:ext cx="6252972" cy="645414"/>
-            <a:chOff x="592836" y="546100"/>
+            <a:chOff x="592836" y="546068"/>
             <a:chExt cx="6252972" cy="645414"/>
           </a:xfrm>
         </p:grpSpPr>
         <p:sp>
           <p:nvSpPr>
             <p:cNvPr id="4" name="TextBox 4"/>
-            <p:cNvSpPr txBox="1"/>
-            <p:nvPr/>
-          </p:nvSpPr>
-          <p:spPr>
-            <a:xfrm>
-              <a:off x="592836" y="546100"/>
+            <p:cNvSpPr/>
+            <p:nvPr/>
+          </p:nvSpPr>
+          <p:spPr>
+            <a:xfrm>
+              <a:off x="592836" y="546068"/>
               <a:ext cx="6252972" cy="645414"/>
             </a:xfrm>
             <a:prstGeom prst="rect">
@@ -4908,8 +4791,8 @@
             </a:ln>
           </p:spPr>
           <p:txBody>
-            <a:bodyPr wrap="none" lIns="0" tIns="0" rIns="0" bIns="0" anchor="t" anchorCtr="0">
-              <a:spAutoFit/>
+            <a:bodyPr wrap="none" lIns="0" tIns="32" rIns="0" bIns="0" anchor="t" anchorCtr="0">
+              <a:noAutofit/>
             </a:bodyPr>
             <a:lstStyle/>
             <a:p>
@@ -4917,13 +4800,13 @@
               <a:r>
                 <a:rPr lang="zh-TW" sz="3200" b="1" dirty="0">
                   <a:solidFill>
-                    <a:schemeClr val="accent1"/>
-                  </a:solidFill>
-                  <a:latin typeface="+mn-lt"/>
-                  <a:ea typeface="+mn-ea"/>
-                  <a:cs typeface="+mn-cs"/>
-                </a:rPr>
-                <a:t>近期配球變了：魔力藍對右打多投低落</a:t>
+                    <a:srgbClr val="18344A"/>
+                  </a:solidFill>
+                  <a:latin typeface="Arial"/>
+                  <a:ea typeface="Microsoft JhengHei"/>
+                  <a:cs typeface="Arial"/>
+                </a:rPr>
+                <a:t>配球變化，提供代打準備線索</a:t>
               </a:r>
             </a:p>
           </p:txBody>
@@ -5055,12 +4938,12 @@
         <p:sp>
           <p:nvSpPr>
             <p:cNvPr id="11" name="TextBox 11"/>
-            <p:cNvSpPr txBox="1"/>
-            <p:nvPr/>
-          </p:nvSpPr>
-          <p:spPr>
-            <a:xfrm>
-              <a:off x="5645658" y="3651250"/>
+            <p:cNvSpPr/>
+            <p:nvPr/>
+          </p:nvSpPr>
+          <p:spPr>
+            <a:xfrm>
+              <a:off x="5645658" y="3651218"/>
               <a:ext cx="3901440" cy="469392"/>
             </a:xfrm>
             <a:prstGeom prst="rect">
@@ -5072,112 +4955,108 @@
             </a:ln>
           </p:spPr>
           <p:txBody>
-            <a:bodyPr wrap="none" lIns="0" tIns="0" rIns="0" bIns="0" anchor="t" anchorCtr="0">
-              <a:spAutoFit/>
+            <a:bodyPr wrap="none" lIns="0" tIns="101632" rIns="0" bIns="0" anchor="t" anchorCtr="0">
+              <a:noAutofit/>
+            </a:bodyPr>
+            <a:lstStyle/>
+            <a:p>
+              <a:pPr algn="l"/>
+              <a:r>
+                <a:rPr lang="zh-TW" sz="2000" b="1" dirty="0">
+                  <a:solidFill>
+                    <a:srgbClr val="9A6118"/>
+                  </a:solidFill>
+                  <a:latin typeface="Arial"/>
+                  <a:ea typeface="Microsoft JhengHei"/>
+                  <a:cs typeface="Arial"/>
+                </a:rPr>
+                <a:t>同條件比較，觀察配球變化</a:t>
+              </a:r>
+            </a:p>
+          </p:txBody>
+        </p:sp>
+        <p:sp>
+          <p:nvSpPr>
+            <p:cNvPr id="12" name="TextBox 12"/>
+            <p:cNvSpPr/>
+            <p:nvPr/>
+          </p:nvSpPr>
+          <p:spPr>
+            <a:xfrm>
+              <a:off x="5647182" y="4286250"/>
+              <a:ext cx="4555236" cy="1210818"/>
+            </a:xfrm>
+            <a:prstGeom prst="rect">
+              <a:avLst/>
+            </a:prstGeom>
+            <a:noFill/>
+            <a:ln>
+              <a:noFill/>
+            </a:ln>
+          </p:spPr>
+          <p:txBody>
+            <a:bodyPr wrap="none" lIns="0" tIns="25400" rIns="0" bIns="0" anchor="t" anchorCtr="0">
+              <a:noAutofit/>
             </a:bodyPr>
             <a:lstStyle/>
             <a:p>
               <a:pPr algn="l">
                 <a:lnSpc>
-                  <a:spcPct val="150000"/>
+                  <a:spcPts val="2850"/>
                 </a:lnSpc>
               </a:pPr>
               <a:r>
-                <a:rPr lang="zh-TW" sz="2000" b="1" dirty="0">
-                  <a:solidFill>
-                    <a:schemeClr val="accent3"/>
-                  </a:solidFill>
-                  <a:latin typeface="+mn-lt"/>
-                  <a:ea typeface="+mn-ea"/>
-                  <a:cs typeface="+mn-cs"/>
-                </a:rPr>
-                <a:t>樣本充足，變化明顯</a:t>
-              </a:r>
-            </a:p>
-          </p:txBody>
-        </p:sp>
-        <p:sp>
-          <p:nvSpPr>
-            <p:cNvPr id="12" name="TextBox 12"/>
-            <p:cNvSpPr txBox="1"/>
-            <p:nvPr/>
-          </p:nvSpPr>
-          <p:spPr>
-            <a:xfrm>
-              <a:off x="5647182" y="4286250"/>
-              <a:ext cx="4555236" cy="1210818"/>
-            </a:xfrm>
-            <a:prstGeom prst="rect">
-              <a:avLst/>
-            </a:prstGeom>
-            <a:noFill/>
-            <a:ln>
-              <a:noFill/>
-            </a:ln>
-          </p:spPr>
-          <p:txBody>
-            <a:bodyPr wrap="none" lIns="0" tIns="0" rIns="0" bIns="0" anchor="t" anchorCtr="0">
-              <a:spAutoFit/>
-            </a:bodyPr>
-            <a:lstStyle/>
-            <a:p>
-              <a:pPr algn="l">
-                <a:lnSpc>
-                  <a:spcPct val="150000"/>
-                </a:lnSpc>
-              </a:pPr>
-              <a:r>
                 <a:rPr lang="zh-TW" sz="1800" dirty="0">
                   <a:solidFill>
-                    <a:schemeClr val="dk1"/>
-                  </a:solidFill>
-                  <a:latin typeface="+mn-lt"/>
-                  <a:ea typeface="+mn-ea"/>
-                  <a:cs typeface="+mn-cs"/>
-                </a:rPr>
-                <a:t>低落球比例增加約 16 個百分點，</a:t>
+                    <a:srgbClr val="1D2934"/>
+                  </a:solidFill>
+                  <a:latin typeface="Arial"/>
+                  <a:ea typeface="Microsoft JhengHei"/>
+                  <a:cs typeface="Arial"/>
+                </a:rPr>
+                <a:t>低落球增加，速球比例下降。</a:t>
               </a:r>
               <a:br>
-                <a:rPr lang="zh-TW" sz="2100" dirty="0">
-                  <a:solidFill>
-                    <a:schemeClr val="dk1"/>
-                  </a:solidFill>
-                  <a:latin typeface="+mn-lt"/>
-                  <a:ea typeface="+mn-ea"/>
-                  <a:cs typeface="+mn-cs"/>
+                <a:rPr lang="zh-TW" sz="1800" dirty="0">
+                  <a:solidFill>
+                    <a:srgbClr val="1D2934"/>
+                  </a:solidFill>
+                  <a:latin typeface="Arial"/>
+                  <a:ea typeface="Microsoft JhengHei"/>
+                  <a:cs typeface="Arial"/>
                 </a:rPr>
               </a:br>
               <a:r>
                 <a:rPr lang="zh-TW" sz="1800" dirty="0">
                   <a:solidFill>
-                    <a:schemeClr val="dk1"/>
-                  </a:solidFill>
-                  <a:latin typeface="+mn-lt"/>
-                  <a:ea typeface="+mn-ea"/>
-                  <a:cs typeface="+mn-cs"/>
-                </a:rPr>
-                <a:t>速球減少約 11 個百分點；</a:t>
+                    <a:srgbClr val="1D2934"/>
+                  </a:solidFill>
+                  <a:latin typeface="Arial"/>
+                  <a:ea typeface="Microsoft JhengHei"/>
+                  <a:cs typeface="Arial"/>
+                </a:rPr>
+                <a:t>用於代打準備與判讀，</a:t>
               </a:r>
               <a:br>
-                <a:rPr lang="zh-TW" sz="2100" dirty="0">
-                  <a:solidFill>
-                    <a:schemeClr val="dk1"/>
-                  </a:solidFill>
-                  <a:latin typeface="+mn-lt"/>
-                  <a:ea typeface="+mn-ea"/>
-                  <a:cs typeface="+mn-cs"/>
+                <a:rPr lang="zh-TW" sz="1800" dirty="0">
+                  <a:solidFill>
+                    <a:srgbClr val="1D2934"/>
+                  </a:solidFill>
+                  <a:latin typeface="Arial"/>
+                  <a:ea typeface="Microsoft JhengHei"/>
+                  <a:cs typeface="Arial"/>
                 </a:rPr>
               </a:br>
               <a:r>
                 <a:rPr lang="zh-TW" sz="1800" dirty="0">
                   <a:solidFill>
-                    <a:schemeClr val="dk1"/>
-                  </a:solidFill>
-                  <a:latin typeface="+mn-lt"/>
-                  <a:ea typeface="+mn-ea"/>
-                  <a:cs typeface="+mn-cs"/>
-                </a:rPr>
-                <a:t>可作為右打代打的準備參考。</a:t>
+                    <a:srgbClr val="1D2934"/>
+                  </a:solidFill>
+                  <a:latin typeface="Arial"/>
+                  <a:ea typeface="Microsoft JhengHei"/>
+                  <a:cs typeface="Arial"/>
+                </a:rPr>
+                <a:t>預設不直接調整候選分數。</a:t>
               </a:r>
             </a:p>
           </p:txBody>
@@ -5656,7 +5535,7 @@
       <p:sp>
         <p:nvSpPr>
           <p:cNvPr id="23" name="TextBox 22"/>
-          <p:cNvSpPr txBox="1"/>
+          <p:cNvSpPr/>
           <p:nvPr/>
         </p:nvSpPr>
         <p:spPr>
@@ -5668,64 +5547,52 @@
             <a:avLst/>
           </a:prstGeom>
           <a:noFill/>
+          <a:ln>
+            <a:noFill/>
+          </a:ln>
         </p:spPr>
         <p:txBody>
-          <a:bodyPr wrap="square" lIns="0" rIns="0" tIns="0" bIns="0" anchor="t">
-            <a:spAutoFit/>
+          <a:bodyPr wrap="none" lIns="0" tIns="0" rIns="0" bIns="0" anchor="t" anchorCtr="0">
+            <a:noAutofit/>
           </a:bodyPr>
           <a:lstStyle/>
           <a:p>
             <a:pPr algn="l">
               <a:lnSpc>
-                <a:spcPct val="150000"/>
+                <a:spcPts val="2850"/>
               </a:lnSpc>
             </a:pPr>
             <a:r>
-              <a:rPr sz="1600" b="1">
+              <a:rPr lang="zh-TW" sz="1600" b="1" dirty="0">
                 <a:solidFill>
                   <a:srgbClr val="1B334D"/>
                 </a:solidFill>
+                <a:latin typeface="Arial"/>
+                <a:ea typeface="Microsoft JhengHei"/>
+                <a:cs typeface="Arial"/>
               </a:rPr>
               <a:t>低落　18% → 34%</a:t>
             </a:r>
-            <a:r>
-              <a:rPr sz="1600" b="1">
-                <a:solidFill>
-                  <a:srgbClr val="B54736"/>
-                </a:solidFill>
-              </a:rPr>
-              <a:t>（+16）</a:t>
-            </a:r>
-            <a:r>
-              <a:rPr sz="1600" b="0">
+            <a:br>
+              <a:rPr lang="zh-TW" sz="1600" b="1" dirty="0">
                 <a:solidFill>
                   <a:srgbClr val="1B334D"/>
                 </a:solidFill>
+                <a:latin typeface="Arial"/>
+                <a:ea typeface="Microsoft JhengHei"/>
+                <a:cs typeface="Arial"/>
               </a:rPr>
-              <a:t/>
-            </a:r>
-          </a:p>
-          <a:p>
-            <a:pPr algn="l">
-              <a:lnSpc>
-                <a:spcPct val="150000"/>
-              </a:lnSpc>
-            </a:pPr>
+            </a:br>
             <a:r>
-              <a:rPr sz="1600" b="0">
+              <a:rPr lang="zh-TW" sz="1600" b="1" dirty="0">
                 <a:solidFill>
                   <a:srgbClr val="1B334D"/>
                 </a:solidFill>
+                <a:latin typeface="Arial"/>
+                <a:ea typeface="Microsoft JhengHei"/>
+                <a:cs typeface="Arial"/>
               </a:rPr>
               <a:t>速球　53% → 41%</a:t>
-            </a:r>
-            <a:r>
-              <a:rPr sz="1600" b="0">
-                <a:solidFill>
-                  <a:srgbClr val="5F6670"/>
-                </a:solidFill>
-              </a:rPr>
-              <a:t>（−11）</a:t>
             </a:r>
           </a:p>
         </p:txBody>
@@ -5739,7 +5606,7 @@
 </file>
 
 <file path=ppt/slides/slide17.xml><?xml version="1.0" encoding="utf-8"?>
-<p:sld xmlns:a="http://schemas.openxmlformats.org/drawingml/2006/main" xmlns:r="http://schemas.openxmlformats.org/officeDocument/2006/relationships" xmlns:p="http://schemas.openxmlformats.org/presentationml/2006/main">
+<p:sld xmlns:a="http://schemas.openxmlformats.org/drawingml/2006/main" xmlns:p="http://schemas.openxmlformats.org/presentationml/2006/main">
   <p:cSld>
     <p:bg>
       <p:bgPr>
@@ -5944,21 +5811,21 @@
         </p:nvGrpSpPr>
         <p:grpSpPr>
           <a:xfrm>
-            <a:off x="7722108" y="2136775"/>
-            <a:ext cx="2384679" cy="1784731"/>
-            <a:chOff x="7722108" y="2136775"/>
-            <a:chExt cx="2384679" cy="1784731"/>
+            <a:off x="7722108" y="2136743"/>
+            <a:ext cx="2384679" cy="1784795"/>
+            <a:chOff x="7722108" y="2136743"/>
+            <a:chExt cx="2384679" cy="1784795"/>
           </a:xfrm>
         </p:grpSpPr>
         <p:sp>
           <p:nvSpPr>
             <p:cNvPr id="11" name="TextBox 11"/>
-            <p:cNvSpPr txBox="1"/>
-            <p:nvPr/>
-          </p:nvSpPr>
-          <p:spPr>
-            <a:xfrm>
-              <a:off x="7722108" y="2136775"/>
+            <p:cNvSpPr/>
+            <p:nvPr/>
+          </p:nvSpPr>
+          <p:spPr>
+            <a:xfrm>
+              <a:off x="7722108" y="2136743"/>
               <a:ext cx="2286000" cy="469392"/>
             </a:xfrm>
             <a:prstGeom prst="rect">
@@ -5970,91 +5837,87 @@
             </a:ln>
           </p:spPr>
           <p:txBody>
-            <a:bodyPr wrap="none" lIns="0" tIns="0" rIns="0" bIns="0" anchor="t" anchorCtr="0">
-              <a:spAutoFit/>
+            <a:bodyPr wrap="none" lIns="0" tIns="101632" rIns="0" bIns="0" anchor="t" anchorCtr="0">
+              <a:noAutofit/>
+            </a:bodyPr>
+            <a:lstStyle/>
+            <a:p>
+              <a:pPr algn="l"/>
+              <a:r>
+                <a:rPr lang="zh-TW" sz="2000" b="1" dirty="0">
+                  <a:solidFill>
+                    <a:srgbClr val="18344A"/>
+                  </a:solidFill>
+                  <a:latin typeface="Arial"/>
+                  <a:ea typeface="Microsoft JhengHei"/>
+                  <a:cs typeface="Arial"/>
+                </a:rPr>
+                <a:t>區分差距與建議</a:t>
+              </a:r>
+            </a:p>
+          </p:txBody>
+        </p:sp>
+        <p:sp>
+          <p:nvSpPr>
+            <p:cNvPr id="12" name="TextBox 12"/>
+            <p:cNvSpPr/>
+            <p:nvPr/>
+          </p:nvSpPr>
+          <p:spPr>
+            <a:xfrm>
+              <a:off x="7724394" y="2676525"/>
+              <a:ext cx="2248662" cy="781431"/>
+            </a:xfrm>
+            <a:prstGeom prst="rect">
+              <a:avLst/>
+            </a:prstGeom>
+            <a:noFill/>
+            <a:ln>
+              <a:noFill/>
+            </a:ln>
+          </p:spPr>
+          <p:txBody>
+            <a:bodyPr wrap="none" lIns="0" tIns="25400" rIns="0" bIns="0" anchor="t" anchorCtr="0">
+              <a:noAutofit/>
             </a:bodyPr>
             <a:lstStyle/>
             <a:p>
               <a:pPr algn="l">
                 <a:lnSpc>
-                  <a:spcPct val="150000"/>
+                  <a:spcPts val="2850"/>
                 </a:lnSpc>
               </a:pPr>
               <a:r>
-                <a:rPr lang="zh-TW" sz="2000" b="1" dirty="0">
-                  <a:solidFill>
-                    <a:schemeClr val="accent1"/>
-                  </a:solidFill>
-                  <a:latin typeface="+mn-lt"/>
-                  <a:ea typeface="+mn-ea"/>
-                  <a:cs typeface="+mn-cs"/>
-                </a:rPr>
-                <a:t>回到當時的資訊</a:t>
-              </a:r>
-            </a:p>
-          </p:txBody>
-        </p:sp>
-        <p:sp>
-          <p:nvSpPr>
-            <p:cNvPr id="12" name="TextBox 12"/>
-            <p:cNvSpPr txBox="1"/>
-            <p:nvPr/>
-          </p:nvSpPr>
-          <p:spPr>
-            <a:xfrm>
-              <a:off x="7724394" y="2676525"/>
-              <a:ext cx="2248662" cy="781431"/>
-            </a:xfrm>
-            <a:prstGeom prst="rect">
-              <a:avLst/>
-            </a:prstGeom>
-            <a:noFill/>
-            <a:ln>
-              <a:noFill/>
-            </a:ln>
-          </p:spPr>
-          <p:txBody>
-            <a:bodyPr wrap="none" lIns="0" tIns="0" rIns="0" bIns="0" anchor="t" anchorCtr="0">
-              <a:spAutoFit/>
-            </a:bodyPr>
-            <a:lstStyle/>
-            <a:p>
-              <a:pPr algn="l">
-                <a:lnSpc>
-                  <a:spcPct val="150000"/>
-                </a:lnSpc>
-              </a:pPr>
-              <a:r>
                 <a:rPr lang="zh-TW" sz="1800" dirty="0">
                   <a:solidFill>
-                    <a:schemeClr val="accent5"/>
-                  </a:solidFill>
-                  <a:latin typeface="+mn-lt"/>
-                  <a:ea typeface="+mn-ea"/>
-                  <a:cs typeface="+mn-cs"/>
-                </a:rPr>
-                <a:t>對照模型與實際調度</a:t>
+                    <a:srgbClr val="58616B"/>
+                  </a:solidFill>
+                  <a:latin typeface="Arial"/>
+                  <a:ea typeface="Microsoft JhengHei"/>
+                  <a:cs typeface="Arial"/>
+                </a:rPr>
+                <a:t>可直接接守二壘</a:t>
               </a:r>
               <a:br>
-                <a:rPr lang="zh-TW" sz="1950" dirty="0">
-                  <a:solidFill>
-                    <a:schemeClr val="accent5"/>
-                  </a:solidFill>
-                  <a:latin typeface="+mn-lt"/>
-                  <a:ea typeface="+mn-ea"/>
-                  <a:cs typeface="+mn-cs"/>
+                <a:rPr lang="zh-TW" sz="1800" dirty="0">
+                  <a:solidFill>
+                    <a:srgbClr val="58616B"/>
+                  </a:solidFill>
+                  <a:latin typeface="Arial"/>
+                  <a:ea typeface="Microsoft JhengHei"/>
+                  <a:cs typeface="Arial"/>
                 </a:rPr>
               </a:br>
               <a:r>
                 <a:rPr lang="zh-TW" sz="1800" dirty="0">
                   <a:solidFill>
-                    <a:schemeClr val="accent5"/>
-                  </a:solidFill>
-                  <a:latin typeface="+mn-lt"/>
-                  <a:ea typeface="+mn-ea"/>
-                  <a:cs typeface="+mn-cs"/>
-                </a:rPr>
-                <a:t>單一打席結果</a:t>
+                    <a:srgbClr val="58616B"/>
+                  </a:solidFill>
+                  <a:latin typeface="Arial"/>
+                  <a:ea typeface="Microsoft JhengHei"/>
+                  <a:cs typeface="Arial"/>
+                </a:rPr>
+                <a:t>仍未達系統建議門檻</a:t>
               </a:r>
             </a:p>
           </p:txBody>
@@ -6062,12 +5925,12 @@
         <p:sp>
           <p:nvSpPr>
             <p:cNvPr id="13" name="TextBox 13"/>
-            <p:cNvSpPr txBox="1"/>
-            <p:nvPr/>
-          </p:nvSpPr>
-          <p:spPr>
-            <a:xfrm>
-              <a:off x="7724394" y="3540125"/>
+            <p:cNvSpPr/>
+            <p:nvPr/>
+          </p:nvSpPr>
+          <p:spPr>
+            <a:xfrm>
+              <a:off x="7724394" y="3540157"/>
               <a:ext cx="2382393" cy="381381"/>
             </a:xfrm>
             <a:prstGeom prst="rect">
@@ -6079,26 +5942,22 @@
             </a:ln>
           </p:spPr>
           <p:txBody>
-            <a:bodyPr wrap="none" lIns="0" tIns="0" rIns="0" bIns="0" anchor="t" anchorCtr="0">
-              <a:spAutoFit/>
-            </a:bodyPr>
-            <a:lstStyle/>
-            <a:p>
-              <a:pPr algn="l">
-                <a:lnSpc>
-                  <a:spcPct val="150000"/>
-                </a:lnSpc>
-              </a:pPr>
+            <a:bodyPr wrap="none" lIns="0" tIns="88868" rIns="0" bIns="0" anchor="t" anchorCtr="0">
+              <a:noAutofit/>
+            </a:bodyPr>
+            <a:lstStyle/>
+            <a:p>
+              <a:pPr algn="l"/>
               <a:r>
                 <a:rPr lang="zh-TW" sz="1800" dirty="0">
                   <a:solidFill>
-                    <a:schemeClr val="accent5"/>
-                  </a:solidFill>
-                  <a:latin typeface="+mn-lt"/>
-                  <a:ea typeface="+mn-ea"/>
-                  <a:cs typeface="+mn-cs"/>
-                </a:rPr>
-                <a:t>不足以判定調度優劣</a:t>
+                    <a:srgbClr val="58616B"/>
+                  </a:solidFill>
+                  <a:latin typeface="Arial"/>
+                  <a:ea typeface="Microsoft JhengHei"/>
+                  <a:cs typeface="Arial"/>
+                </a:rPr>
+                <a:t>網站可重現當時情境</a:t>
               </a:r>
             </a:p>
           </p:txBody>
@@ -6112,21 +5971,21 @@
         </p:nvGrpSpPr>
         <p:grpSpPr>
           <a:xfrm>
-            <a:off x="598932" y="4702175"/>
-            <a:ext cx="2282952" cy="836168"/>
-            <a:chOff x="598932" y="4702175"/>
-            <a:chExt cx="2282952" cy="836168"/>
+            <a:off x="598932" y="4702207"/>
+            <a:ext cx="2282952" cy="836104"/>
+            <a:chOff x="598932" y="4702207"/>
+            <a:chExt cx="2282952" cy="836104"/>
           </a:xfrm>
         </p:grpSpPr>
         <p:sp>
           <p:nvSpPr>
             <p:cNvPr id="15" name="TextBox 15"/>
-            <p:cNvSpPr txBox="1"/>
-            <p:nvPr/>
-          </p:nvSpPr>
-          <p:spPr>
-            <a:xfrm>
-              <a:off x="601218" y="4702175"/>
+            <p:cNvSpPr/>
+            <p:nvPr/>
+          </p:nvSpPr>
+          <p:spPr>
+            <a:xfrm>
+              <a:off x="601218" y="4702207"/>
               <a:ext cx="905256" cy="322707"/>
             </a:xfrm>
             <a:prstGeom prst="rect">
@@ -6138,26 +5997,22 @@
             </a:ln>
           </p:spPr>
           <p:txBody>
-            <a:bodyPr wrap="none" lIns="0" tIns="0" rIns="0" bIns="0" anchor="t" anchorCtr="0">
-              <a:spAutoFit/>
-            </a:bodyPr>
-            <a:lstStyle/>
-            <a:p>
-              <a:pPr algn="l">
-                <a:lnSpc>
-                  <a:spcPct val="150000"/>
-                </a:lnSpc>
-              </a:pPr>
+            <a:bodyPr wrap="none" lIns="0" tIns="76168" rIns="0" bIns="0" anchor="t" anchorCtr="0">
+              <a:noAutofit/>
+            </a:bodyPr>
+            <a:lstStyle/>
+            <a:p>
+              <a:pPr algn="l"/>
               <a:r>
                 <a:rPr lang="zh-TW" sz="1600" dirty="0">
                   <a:solidFill>
-                    <a:schemeClr val="accent2"/>
-                  </a:solidFill>
-                  <a:latin typeface="+mn-lt"/>
-                  <a:ea typeface="+mn-ea"/>
-                  <a:cs typeface="+mn-cs"/>
-                </a:rPr>
-                <a:t>系統評估</a:t>
+                    <a:srgbClr val="B54836"/>
+                  </a:solidFill>
+                  <a:latin typeface="Arial"/>
+                  <a:ea typeface="Microsoft JhengHei"/>
+                  <a:cs typeface="Arial"/>
+                </a:rPr>
+                <a:t>候選差距</a:t>
               </a:r>
             </a:p>
           </p:txBody>
@@ -6165,12 +6020,12 @@
         <p:sp>
           <p:nvSpPr>
             <p:cNvPr id="16" name="TextBox 16"/>
-            <p:cNvSpPr txBox="1"/>
-            <p:nvPr/>
-          </p:nvSpPr>
-          <p:spPr>
-            <a:xfrm>
-              <a:off x="598932" y="5127625"/>
+            <p:cNvSpPr/>
+            <p:nvPr/>
+          </p:nvSpPr>
+          <p:spPr>
+            <a:xfrm>
+              <a:off x="598932" y="5127593"/>
               <a:ext cx="2282952" cy="410718"/>
             </a:xfrm>
             <a:prstGeom prst="rect">
@@ -6182,26 +6037,22 @@
             </a:ln>
           </p:spPr>
           <p:txBody>
-            <a:bodyPr wrap="none" lIns="0" tIns="0" rIns="0" bIns="0" anchor="t" anchorCtr="0">
-              <a:spAutoFit/>
-            </a:bodyPr>
-            <a:lstStyle/>
-            <a:p>
-              <a:pPr algn="l">
-                <a:lnSpc>
-                  <a:spcPct val="150000"/>
-                </a:lnSpc>
-              </a:pPr>
+            <a:bodyPr wrap="none" lIns="0" tIns="88932" rIns="0" bIns="0" anchor="t" anchorCtr="0">
+              <a:noAutofit/>
+            </a:bodyPr>
+            <a:lstStyle/>
+            <a:p>
+              <a:pPr algn="l"/>
               <a:r>
                 <a:rPr lang="zh-TW" sz="1800" b="1" dirty="0">
                   <a:solidFill>
-                    <a:schemeClr val="accent1"/>
-                  </a:solidFill>
-                  <a:latin typeface="+mn-lt"/>
-                  <a:ea typeface="+mn-ea"/>
-                  <a:cs typeface="+mn-cs"/>
-                </a:rPr>
-                <a:t>郭永維 +0.54，可直接接守</a:t>
+                    <a:srgbClr val="18344A"/>
+                  </a:solidFill>
+                  <a:latin typeface="Arial"/>
+                  <a:ea typeface="Microsoft JhengHei"/>
+                  <a:cs typeface="Arial"/>
+                </a:rPr>
+                <a:t>郭永維 +0.54 百分點</a:t>
               </a:r>
             </a:p>
           </p:txBody>
@@ -6421,21 +6272,21 @@
         </p:nvGrpSpPr>
         <p:grpSpPr>
           <a:xfrm>
-            <a:off x="601218" y="5921375"/>
+            <a:off x="601218" y="5921407"/>
             <a:ext cx="5569839" cy="322707"/>
-            <a:chOff x="601218" y="5921375"/>
+            <a:chOff x="601218" y="5921407"/>
             <a:chExt cx="5569839" cy="322707"/>
           </a:xfrm>
         </p:grpSpPr>
         <p:sp>
           <p:nvSpPr>
             <p:cNvPr id="24" name="TextBox 24"/>
-            <p:cNvSpPr txBox="1"/>
-            <p:nvPr/>
-          </p:nvSpPr>
-          <p:spPr>
-            <a:xfrm>
-              <a:off x="601218" y="5921375"/>
+            <p:cNvSpPr/>
+            <p:nvPr/>
+          </p:nvSpPr>
+          <p:spPr>
+            <a:xfrm>
+              <a:off x="601218" y="5921407"/>
               <a:ext cx="5569839" cy="322707"/>
             </a:xfrm>
             <a:prstGeom prst="rect">
@@ -6447,26 +6298,22 @@
             </a:ln>
           </p:spPr>
           <p:txBody>
-            <a:bodyPr wrap="none" lIns="0" tIns="0" rIns="0" bIns="0" anchor="t" anchorCtr="0">
-              <a:spAutoFit/>
-            </a:bodyPr>
-            <a:lstStyle/>
-            <a:p>
-              <a:pPr algn="l">
-                <a:lnSpc>
-                  <a:spcPct val="150000"/>
-                </a:lnSpc>
-              </a:pPr>
+            <a:bodyPr wrap="none" lIns="0" tIns="76168" rIns="0" bIns="0" anchor="t" anchorCtr="0">
+              <a:noAutofit/>
+            </a:bodyPr>
+            <a:lstStyle/>
+            <a:p>
+              <a:pPr algn="l"/>
               <a:r>
                 <a:rPr lang="zh-TW" sz="1600" dirty="0">
                   <a:solidFill>
-                    <a:schemeClr val="accent5"/>
-                  </a:solidFill>
-                  <a:latin typeface="+mn-lt"/>
-                  <a:ea typeface="+mn-ea"/>
-                  <a:cs typeface="+mn-cs"/>
-                </a:rPr>
-                <a:t>教練的選擇也在系統的正向名單中；網站「2025 單日分析」可點選此打席重現。</a:t>
+                    <a:srgbClr val="58616B"/>
+                  </a:solidFill>
+                  <a:latin typeface="Arial"/>
+                  <a:ea typeface="Microsoft JhengHei"/>
+                  <a:cs typeface="Arial"/>
+                </a:rPr>
+                <a:t>差距為正，但未達 1 百分點門檻；單一結果不能驗證調度優劣。</a:t>
               </a:r>
             </a:p>
           </p:txBody>
@@ -7332,7 +7179,7 @@
 </file>
 
 <file path=ppt/slides/slide19.xml><?xml version="1.0" encoding="utf-8"?>
-<p:sld xmlns:a="http://schemas.openxmlformats.org/drawingml/2006/main" xmlns:r="http://schemas.openxmlformats.org/officeDocument/2006/relationships" xmlns:p="http://schemas.openxmlformats.org/presentationml/2006/main">
+<p:sld xmlns:a="http://schemas.openxmlformats.org/drawingml/2006/main" xmlns:p="http://schemas.openxmlformats.org/presentationml/2006/main" xmlns:r="http://schemas.openxmlformats.org/officeDocument/2006/relationships">
   <p:cSld>
     <p:bg>
       <p:bgPr>
@@ -7665,9 +7512,9 @@
         <p:grpSpPr>
           <a:xfrm>
             <a:off x="5247132" y="3270250"/>
-            <a:ext cx="3979164" cy="1020318"/>
+            <a:ext cx="3979164" cy="1020286"/>
             <a:chOff x="5247132" y="3270250"/>
-            <a:chExt cx="3979164" cy="1020318"/>
+            <a:chExt cx="3979164" cy="1020286"/>
           </a:xfrm>
         </p:grpSpPr>
         <p:sp>
@@ -7761,12 +7608,12 @@
         <p:sp>
           <p:nvSpPr>
             <p:cNvPr id="17" name="TextBox 17"/>
-            <p:cNvSpPr txBox="1"/>
-            <p:nvPr/>
-          </p:nvSpPr>
-          <p:spPr>
-            <a:xfrm>
-              <a:off x="5247132" y="3879850"/>
+            <p:cNvSpPr/>
+            <p:nvPr/>
+          </p:nvSpPr>
+          <p:spPr>
+            <a:xfrm>
+              <a:off x="5247132" y="3879818"/>
               <a:ext cx="3979164" cy="410718"/>
             </a:xfrm>
             <a:prstGeom prst="rect">
@@ -7778,26 +7625,22 @@
             </a:ln>
           </p:spPr>
           <p:txBody>
-            <a:bodyPr wrap="none" lIns="0" tIns="0" rIns="0" bIns="0" anchor="t" anchorCtr="0">
-              <a:spAutoFit/>
-            </a:bodyPr>
-            <a:lstStyle/>
-            <a:p>
-              <a:pPr algn="l">
-                <a:lnSpc>
-                  <a:spcPct val="150000"/>
-                </a:lnSpc>
-              </a:pPr>
+            <a:bodyPr wrap="none" lIns="0" tIns="88932" rIns="0" bIns="0" anchor="t" anchorCtr="0">
+              <a:noAutofit/>
+            </a:bodyPr>
+            <a:lstStyle/>
+            <a:p>
+              <a:pPr algn="l"/>
               <a:r>
                 <a:rPr lang="zh-TW" sz="1800" dirty="0">
                   <a:solidFill>
-                    <a:schemeClr val="accent5"/>
-                  </a:solidFill>
-                  <a:latin typeface="+mn-lt"/>
-                  <a:ea typeface="+mn-ea"/>
-                  <a:cs typeface="+mn-cs"/>
-                </a:rPr>
-                <a:t>標示估計結果存在分歧的人選。</a:t>
+                    <a:srgbClr val="58616B"/>
+                  </a:solidFill>
+                  <a:latin typeface="Arial"/>
+                  <a:ea typeface="Microsoft JhengHei"/>
+                  <a:cs typeface="Arial"/>
+                </a:rPr>
+                <a:t>提醒兩種模型的估計結果不同。</a:t>
               </a:r>
             </a:p>
           </p:txBody>
@@ -7851,9 +7694,9 @@
         <p:grpSpPr>
           <a:xfrm>
             <a:off x="5247132" y="4813300"/>
-            <a:ext cx="4261866" cy="1020318"/>
+            <a:ext cx="4261866" cy="1020286"/>
             <a:chOff x="5247132" y="4813300"/>
-            <a:chExt cx="4261866" cy="1020318"/>
+            <a:chExt cx="4261866" cy="1020286"/>
           </a:xfrm>
         </p:grpSpPr>
         <p:sp>
@@ -7947,12 +7790,12 @@
         <p:sp>
           <p:nvSpPr>
             <p:cNvPr id="23" name="TextBox 23"/>
-            <p:cNvSpPr txBox="1"/>
-            <p:nvPr/>
-          </p:nvSpPr>
-          <p:spPr>
-            <a:xfrm>
-              <a:off x="5247132" y="5422900"/>
+            <p:cNvSpPr/>
+            <p:nvPr/>
+          </p:nvSpPr>
+          <p:spPr>
+            <a:xfrm>
+              <a:off x="5247132" y="5422868"/>
               <a:ext cx="4261866" cy="410718"/>
             </a:xfrm>
             <a:prstGeom prst="rect">
@@ -7964,26 +7807,22 @@
             </a:ln>
           </p:spPr>
           <p:txBody>
-            <a:bodyPr wrap="none" lIns="0" tIns="0" rIns="0" bIns="0" anchor="t" anchorCtr="0">
-              <a:spAutoFit/>
-            </a:bodyPr>
-            <a:lstStyle/>
-            <a:p>
-              <a:pPr algn="l">
-                <a:lnSpc>
-                  <a:spcPct val="150000"/>
-                </a:lnSpc>
-              </a:pPr>
+            <a:bodyPr wrap="none" lIns="0" tIns="88932" rIns="0" bIns="0" anchor="t" anchorCtr="0">
+              <a:noAutofit/>
+            </a:bodyPr>
+            <a:lstStyle/>
+            <a:p>
+              <a:pPr algn="l"/>
               <a:r>
                 <a:rPr lang="zh-TW" sz="1800" dirty="0">
                   <a:solidFill>
-                    <a:schemeClr val="accent5"/>
-                  </a:solidFill>
-                  <a:latin typeface="+mn-lt"/>
-                  <a:ea typeface="+mn-ea"/>
-                  <a:cs typeface="+mn-cs"/>
-                </a:rPr>
-                <a:t>比較差距時，同步看見樣本限制。</a:t>
+                    <a:srgbClr val="58616B"/>
+                  </a:solidFill>
+                  <a:latin typeface="Arial"/>
+                  <a:ea typeface="Microsoft JhengHei"/>
+                  <a:cs typeface="Arial"/>
+                </a:rPr>
+                <a:t>保留樣本限制，避免只看排序。</a:t>
               </a:r>
             </a:p>
           </p:txBody>
@@ -8696,7 +8535,7 @@
 </file>
 
 <file path=ppt/slides/slide20.xml><?xml version="1.0" encoding="utf-8"?>
-<p:sld xmlns:a="http://schemas.openxmlformats.org/drawingml/2006/main" xmlns:r="http://schemas.openxmlformats.org/officeDocument/2006/relationships" xmlns:p="http://schemas.openxmlformats.org/presentationml/2006/main">
+<p:sld xmlns:a="http://schemas.openxmlformats.org/drawingml/2006/main" xmlns:p="http://schemas.openxmlformats.org/presentationml/2006/main">
   <p:cSld>
     <p:bg>
       <p:bgPr>
@@ -8787,21 +8626,21 @@
         </p:nvGrpSpPr>
         <p:grpSpPr>
           <a:xfrm>
-            <a:off x="592836" y="546100"/>
+            <a:off x="592836" y="546068"/>
             <a:ext cx="6697218" cy="645414"/>
-            <a:chOff x="592836" y="546100"/>
+            <a:chOff x="592836" y="546068"/>
             <a:chExt cx="6697218" cy="645414"/>
           </a:xfrm>
         </p:grpSpPr>
         <p:sp>
           <p:nvSpPr>
             <p:cNvPr id="4" name="TextBox 4"/>
-            <p:cNvSpPr txBox="1"/>
-            <p:nvPr/>
-          </p:nvSpPr>
-          <p:spPr>
-            <a:xfrm>
-              <a:off x="592836" y="546100"/>
+            <p:cNvSpPr/>
+            <p:nvPr/>
+          </p:nvSpPr>
+          <p:spPr>
+            <a:xfrm>
+              <a:off x="592836" y="546068"/>
               <a:ext cx="6697218" cy="645414"/>
             </a:xfrm>
             <a:prstGeom prst="rect">
@@ -8813,8 +8652,8 @@
             </a:ln>
           </p:spPr>
           <p:txBody>
-            <a:bodyPr wrap="none" lIns="0" tIns="0" rIns="0" bIns="0" anchor="t" anchorCtr="0">
-              <a:spAutoFit/>
+            <a:bodyPr wrap="none" lIns="0" tIns="32" rIns="0" bIns="0" anchor="t" anchorCtr="0">
+              <a:noAutofit/>
             </a:bodyPr>
             <a:lstStyle/>
             <a:p>
@@ -8822,872 +8661,13 @@
               <a:r>
                 <a:rPr lang="zh-TW" sz="3200" b="1" dirty="0">
                   <a:solidFill>
-                    <a:schemeClr val="accent1"/>
-                  </a:solidFill>
-                  <a:latin typeface="+mn-lt"/>
-                  <a:ea typeface="+mn-ea"/>
-                  <a:cs typeface="+mn-cs"/>
-                </a:rPr>
-                <a:t>成果亮點：可驗證、可操作、可重現</a:t>
-              </a:r>
-            </a:p>
-          </p:txBody>
-        </p:sp>
-      </p:grpSp>
-      <p:grpSp>
-        <p:nvGrpSpPr>
-          <p:cNvPr id="12" name="rank"/>
-          <p:cNvGrpSpPr/>
-          <p:nvPr/>
-        </p:nvGrpSpPr>
-        <p:grpSpPr>
-          <a:xfrm>
-            <a:off x="590550" y="1758950"/>
-            <a:ext cx="2753106" cy="3086481"/>
-            <a:chOff x="590550" y="1758950"/>
-            <a:chExt cx="2753106" cy="3086481"/>
-          </a:xfrm>
-        </p:grpSpPr>
-        <p:sp>
-          <p:nvSpPr>
-            <p:cNvPr id="7" name="TextBox 7"/>
-            <p:cNvSpPr txBox="1"/>
-            <p:nvPr/>
-          </p:nvSpPr>
-          <p:spPr>
-            <a:xfrm>
-              <a:off x="601218" y="1758950"/>
-              <a:ext cx="2015871" cy="322707"/>
-            </a:xfrm>
-            <a:prstGeom prst="rect">
-              <a:avLst/>
-            </a:prstGeom>
-            <a:noFill/>
-            <a:ln>
-              <a:noFill/>
-            </a:ln>
-          </p:spPr>
-          <p:txBody>
-            <a:bodyPr wrap="none" lIns="0" tIns="0" rIns="0" bIns="0" anchor="t" anchorCtr="0">
-              <a:spAutoFit/>
-            </a:bodyPr>
-            <a:lstStyle/>
-            <a:p>
-              <a:pPr algn="l">
-                <a:lnSpc>
-                  <a:spcPct val="150000"/>
-                </a:lnSpc>
-              </a:pPr>
-              <a:r>
-                <a:rPr lang="zh-TW" sz="1600" dirty="0">
-                  <a:solidFill>
-                    <a:schemeClr val="accent2"/>
-                  </a:solidFill>
-                  <a:latin typeface="+mn-lt"/>
-                  <a:ea typeface="+mn-ea"/>
-                  <a:cs typeface="+mn-cs"/>
-                </a:rPr>
-                <a:t>資料規模</a:t>
-              </a:r>
-            </a:p>
-          </p:txBody>
-        </p:sp>
-        <p:sp>
-          <p:nvSpPr>
-            <p:cNvPr id="8" name="TextBox 8"/>
-            <p:cNvSpPr txBox="1"/>
-            <p:nvPr/>
-          </p:nvSpPr>
-          <p:spPr>
-            <a:xfrm>
-              <a:off x="597408" y="2184400"/>
-              <a:ext cx="1316736" cy="469392"/>
-            </a:xfrm>
-            <a:prstGeom prst="rect">
-              <a:avLst/>
-            </a:prstGeom>
-            <a:noFill/>
-            <a:ln>
-              <a:noFill/>
-            </a:ln>
-          </p:spPr>
-          <p:txBody>
-            <a:bodyPr wrap="none" lIns="0" tIns="0" rIns="0" bIns="0" anchor="t" anchorCtr="0">
-              <a:spAutoFit/>
-            </a:bodyPr>
-            <a:lstStyle/>
-            <a:p>
-              <a:pPr algn="l">
-                <a:lnSpc>
-                  <a:spcPct val="150000"/>
-                </a:lnSpc>
-              </a:pPr>
-              <a:r>
-                <a:rPr lang="zh-TW" sz="2000" b="1" dirty="0">
-                  <a:solidFill>
-                    <a:schemeClr val="accent1"/>
-                  </a:solidFill>
-                  <a:latin typeface="+mn-lt"/>
-                  <a:ea typeface="+mn-ea"/>
-                  <a:cs typeface="+mn-cs"/>
-                </a:rPr>
-                <a:t>2024–2025 中職</a:t>
-              </a:r>
-            </a:p>
-          </p:txBody>
-        </p:sp>
-        <p:sp>
-          <p:nvSpPr>
-            <p:cNvPr id="9" name="TextBox 9"/>
-            <p:cNvSpPr txBox="1"/>
-            <p:nvPr/>
-          </p:nvSpPr>
-          <p:spPr>
-            <a:xfrm>
-              <a:off x="590550" y="2736850"/>
-              <a:ext cx="1903933" cy="933450"/>
-            </a:xfrm>
-            <a:prstGeom prst="rect">
-              <a:avLst/>
-            </a:prstGeom>
-            <a:noFill/>
-            <a:ln>
-              <a:noFill/>
-            </a:ln>
-          </p:spPr>
-          <p:txBody>
-            <a:bodyPr wrap="none" lIns="0" tIns="0" rIns="0" bIns="0" anchor="t" anchorCtr="0">
-              <a:spAutoFit/>
-            </a:bodyPr>
-            <a:lstStyle/>
-            <a:p>
-              <a:pPr algn="l"/>
-              <a:r>
-                <a:rPr lang="zh-TW" sz="4800" b="1" dirty="0">
-                  <a:solidFill>
-                    <a:schemeClr val="accent1"/>
-                  </a:solidFill>
-                  <a:latin typeface="+mn-lt"/>
-                  <a:ea typeface="+mn-ea"/>
-                  <a:cs typeface="+mn-cs"/>
-                </a:rPr>
-                <a:t>2 季</a:t>
-              </a:r>
-            </a:p>
-          </p:txBody>
-        </p:sp>
-        <p:sp>
-          <p:nvSpPr>
-            <p:cNvPr id="10" name="TextBox 10"/>
-            <p:cNvSpPr txBox="1"/>
-            <p:nvPr/>
-          </p:nvSpPr>
-          <p:spPr>
-            <a:xfrm>
-              <a:off x="599694" y="3651250"/>
-              <a:ext cx="2743962" cy="762381"/>
-            </a:xfrm>
-            <a:prstGeom prst="rect">
-              <a:avLst/>
-            </a:prstGeom>
-            <a:noFill/>
-            <a:ln>
-              <a:noFill/>
-            </a:ln>
-          </p:spPr>
-          <p:txBody>
-            <a:bodyPr wrap="none" lIns="0" tIns="0" rIns="0" bIns="0" anchor="t" anchorCtr="0">
-              <a:spAutoFit/>
-            </a:bodyPr>
-            <a:lstStyle/>
-            <a:p>
-              <a:pPr algn="l">
-                <a:lnSpc>
-                  <a:spcPct val="150000"/>
-                </a:lnSpc>
-              </a:pPr>
-              <a:r>
-                <a:rPr lang="zh-TW" sz="1800" dirty="0">
-                  <a:solidFill>
-                    <a:schemeClr val="accent1"/>
-                  </a:solidFill>
-                  <a:latin typeface="+mn-lt"/>
-                  <a:ea typeface="+mn-ea"/>
-                  <a:cs typeface="+mn-cs"/>
-                </a:rPr>
-                <a:t>逐球與守位紀錄</a:t>
-              </a:r>
-              <a:br>
-                <a:rPr lang="zh-TW" sz="1950" dirty="0">
-                  <a:solidFill>
-                    <a:schemeClr val="accent1"/>
-                  </a:solidFill>
-                  <a:latin typeface="+mn-lt"/>
-                  <a:ea typeface="+mn-ea"/>
-                  <a:cs typeface="+mn-cs"/>
-                </a:rPr>
-              </a:br>
-              <a:r>
-                <a:rPr lang="zh-TW" sz="1800" dirty="0">
-                  <a:solidFill>
-                    <a:schemeClr val="accent1"/>
-                  </a:solidFill>
-                  <a:latin typeface="+mn-lt"/>
-                  <a:ea typeface="+mn-ea"/>
-                  <a:cs typeface="+mn-cs"/>
-                </a:rPr>
-                <a:t>只用決策日前的資料</a:t>
-              </a:r>
-            </a:p>
-          </p:txBody>
-        </p:sp>
-        <p:sp>
-          <p:nvSpPr>
-            <p:cNvPr id="11" name="TextBox 11"/>
-            <p:cNvSpPr txBox="1"/>
-            <p:nvPr/>
-          </p:nvSpPr>
-          <p:spPr>
-            <a:xfrm>
-              <a:off x="599694" y="4464050"/>
-              <a:ext cx="2644902" cy="381381"/>
-            </a:xfrm>
-            <a:prstGeom prst="rect">
-              <a:avLst/>
-            </a:prstGeom>
-            <a:noFill/>
-            <a:ln>
-              <a:noFill/>
-            </a:ln>
-          </p:spPr>
-          <p:txBody>
-            <a:bodyPr wrap="none" lIns="0" tIns="0" rIns="0" bIns="0" anchor="t" anchorCtr="0">
-              <a:spAutoFit/>
-            </a:bodyPr>
-            <a:lstStyle/>
-            <a:p>
-              <a:pPr algn="l">
-                <a:lnSpc>
-                  <a:spcPct val="150000"/>
-                </a:lnSpc>
-              </a:pPr>
-              <a:r>
-                <a:rPr lang="zh-TW" sz="1800" dirty="0">
-                  <a:solidFill>
-                    <a:schemeClr val="accent1"/>
-                  </a:solidFill>
-                  <a:latin typeface="+mn-lt"/>
-                  <a:ea typeface="+mn-ea"/>
-                  <a:cs typeface="+mn-cs"/>
-                </a:rPr>
-                <a:t>6 隊預設名單與守位</a:t>
-              </a:r>
-            </a:p>
-          </p:txBody>
-        </p:sp>
-      </p:grpSp>
-      <p:grpSp>
-        <p:nvGrpSpPr>
-          <p:cNvPr id="18" name="difference"/>
-          <p:cNvGrpSpPr/>
-          <p:nvPr/>
-        </p:nvGrpSpPr>
-        <p:grpSpPr>
-          <a:xfrm>
-            <a:off x="4286250" y="1758950"/>
-            <a:ext cx="2391537" cy="3086481"/>
-            <a:chOff x="4286250" y="1758950"/>
-            <a:chExt cx="2391537" cy="3086481"/>
-          </a:xfrm>
-        </p:grpSpPr>
-        <p:sp>
-          <p:nvSpPr>
-            <p:cNvPr id="13" name="TextBox 13"/>
-            <p:cNvSpPr txBox="1"/>
-            <p:nvPr/>
-          </p:nvSpPr>
-          <p:spPr>
-            <a:xfrm>
-              <a:off x="4296918" y="1758950"/>
-              <a:ext cx="1571625" cy="322707"/>
-            </a:xfrm>
-            <a:prstGeom prst="rect">
-              <a:avLst/>
-            </a:prstGeom>
-            <a:noFill/>
-            <a:ln>
-              <a:noFill/>
-            </a:ln>
-          </p:spPr>
-          <p:txBody>
-            <a:bodyPr wrap="none" lIns="0" tIns="0" rIns="0" bIns="0" anchor="t" anchorCtr="0">
-              <a:spAutoFit/>
-            </a:bodyPr>
-            <a:lstStyle/>
-            <a:p>
-              <a:pPr algn="l">
-                <a:lnSpc>
-                  <a:spcPct val="150000"/>
-                </a:lnSpc>
-              </a:pPr>
-              <a:r>
-                <a:rPr lang="zh-TW" sz="1600" dirty="0">
-                  <a:solidFill>
-                    <a:schemeClr val="accent2"/>
-                  </a:solidFill>
-                  <a:latin typeface="+mn-lt"/>
-                  <a:ea typeface="+mn-ea"/>
-                  <a:cs typeface="+mn-cs"/>
-                </a:rPr>
-                <a:t>實證結果</a:t>
-              </a:r>
-            </a:p>
-          </p:txBody>
-        </p:sp>
-        <p:sp>
-          <p:nvSpPr>
-            <p:cNvPr id="14" name="TextBox 14"/>
-            <p:cNvSpPr txBox="1"/>
-            <p:nvPr/>
-          </p:nvSpPr>
-          <p:spPr>
-            <a:xfrm>
-              <a:off x="4293108" y="2184400"/>
-              <a:ext cx="1639824" cy="469392"/>
-            </a:xfrm>
-            <a:prstGeom prst="rect">
-              <a:avLst/>
-            </a:prstGeom>
-            <a:noFill/>
-            <a:ln>
-              <a:noFill/>
-            </a:ln>
-          </p:spPr>
-          <p:txBody>
-            <a:bodyPr wrap="none" lIns="0" tIns="0" rIns="0" bIns="0" anchor="t" anchorCtr="0">
-              <a:spAutoFit/>
-            </a:bodyPr>
-            <a:lstStyle/>
-            <a:p>
-              <a:pPr algn="l">
-                <a:lnSpc>
-                  <a:spcPct val="150000"/>
-                </a:lnSpc>
-              </a:pPr>
-              <a:r>
-                <a:rPr lang="zh-TW" sz="2000" b="1" dirty="0">
-                  <a:solidFill>
-                    <a:schemeClr val="accent1"/>
-                  </a:solidFill>
-                  <a:latin typeface="+mn-lt"/>
-                  <a:ea typeface="+mn-ea"/>
-                  <a:cs typeface="+mn-cs"/>
-                </a:rPr>
-                <a:t>換投時機回測</a:t>
-              </a:r>
-            </a:p>
-          </p:txBody>
-        </p:sp>
-        <p:sp>
-          <p:nvSpPr>
-            <p:cNvPr id="15" name="TextBox 15"/>
-            <p:cNvSpPr txBox="1"/>
-            <p:nvPr/>
-          </p:nvSpPr>
-          <p:spPr>
-            <a:xfrm>
-              <a:off x="4286250" y="2736850"/>
-              <a:ext cx="1903933" cy="933450"/>
-            </a:xfrm>
-            <a:prstGeom prst="rect">
-              <a:avLst/>
-            </a:prstGeom>
-            <a:noFill/>
-            <a:ln>
-              <a:noFill/>
-            </a:ln>
-          </p:spPr>
-          <p:txBody>
-            <a:bodyPr wrap="none" lIns="0" tIns="0" rIns="0" bIns="0" anchor="t" anchorCtr="0">
-              <a:spAutoFit/>
-            </a:bodyPr>
-            <a:lstStyle/>
-            <a:p>
-              <a:pPr algn="l"/>
-              <a:r>
-                <a:rPr lang="zh-TW" sz="4800" b="1" dirty="0">
-                  <a:solidFill>
-                    <a:srgbClr val="237A53"/>
-                  </a:solidFill>
-                  <a:latin typeface="+mn-lt"/>
-                  <a:ea typeface="+mn-ea"/>
-                  <a:cs typeface="+mn-cs"/>
-                </a:rPr>
-                <a:t>+0.043</a:t>
-              </a:r>
-            </a:p>
-          </p:txBody>
-        </p:sp>
-        <p:sp>
-          <p:nvSpPr>
-            <p:cNvPr id="16" name="TextBox 16"/>
-            <p:cNvSpPr txBox="1"/>
-            <p:nvPr/>
-          </p:nvSpPr>
-          <p:spPr>
-            <a:xfrm>
-              <a:off x="4295394" y="3651250"/>
-              <a:ext cx="1753362" cy="762381"/>
-            </a:xfrm>
-            <a:prstGeom prst="rect">
-              <a:avLst/>
-            </a:prstGeom>
-            <a:noFill/>
-            <a:ln>
-              <a:noFill/>
-            </a:ln>
-          </p:spPr>
-          <p:txBody>
-            <a:bodyPr wrap="none" lIns="0" tIns="0" rIns="0" bIns="0" anchor="t" anchorCtr="0">
-              <a:spAutoFit/>
-            </a:bodyPr>
-            <a:lstStyle/>
-            <a:p>
-              <a:pPr algn="l">
-                <a:lnSpc>
-                  <a:spcPct val="150000"/>
-                </a:lnSpc>
-              </a:pPr>
-              <a:r>
-                <a:rPr lang="zh-TW" sz="1800" dirty="0">
-                  <a:solidFill>
-                    <a:schemeClr val="accent1"/>
-                  </a:solidFill>
-                  <a:latin typeface="+mn-lt"/>
-                  <a:ea typeface="+mn-ea"/>
-                  <a:cs typeface="+mn-cs"/>
-                </a:rPr>
-                <a:t>95% 區間不含 0</a:t>
-              </a:r>
-              <a:br>
-                <a:rPr lang="zh-TW" sz="1950" dirty="0">
-                  <a:solidFill>
-                    <a:schemeClr val="accent1"/>
-                  </a:solidFill>
-                  <a:latin typeface="+mn-lt"/>
-                  <a:ea typeface="+mn-ea"/>
-                  <a:cs typeface="+mn-cs"/>
-                </a:rPr>
-              </a:br>
-              <a:r>
-                <a:rPr lang="zh-TW" sz="1800" dirty="0">
-                  <a:solidFill>
-                    <a:schemeClr val="accent1"/>
-                  </a:solidFill>
-                  <a:latin typeface="+mn-lt"/>
-                  <a:ea typeface="+mn-ea"/>
-                  <a:cs typeface="+mn-cs"/>
-                </a:rPr>
-                <a:t>11,962 個打席驗證</a:t>
-              </a:r>
-            </a:p>
-          </p:txBody>
-        </p:sp>
-        <p:sp>
-          <p:nvSpPr>
-            <p:cNvPr id="17" name="TextBox 17"/>
-            <p:cNvSpPr txBox="1"/>
-            <p:nvPr/>
-          </p:nvSpPr>
-          <p:spPr>
-            <a:xfrm>
-              <a:off x="4295394" y="4464050"/>
-              <a:ext cx="2382393" cy="381381"/>
-            </a:xfrm>
-            <a:prstGeom prst="rect">
-              <a:avLst/>
-            </a:prstGeom>
-            <a:noFill/>
-            <a:ln>
-              <a:noFill/>
-            </a:ln>
-          </p:spPr>
-          <p:txBody>
-            <a:bodyPr wrap="none" lIns="0" tIns="0" rIns="0" bIns="0" anchor="t" anchorCtr="0">
-              <a:spAutoFit/>
-            </a:bodyPr>
-            <a:lstStyle/>
-            <a:p>
-              <a:pPr algn="l">
-                <a:lnSpc>
-                  <a:spcPct val="150000"/>
-                </a:lnSpc>
-              </a:pPr>
-              <a:r>
-                <a:rPr lang="zh-TW" sz="1800" dirty="0">
-                  <a:solidFill>
-                    <a:schemeClr val="accent1"/>
-                  </a:solidFill>
-                  <a:latin typeface="+mn-lt"/>
-                  <a:ea typeface="+mn-ea"/>
-                  <a:cs typeface="+mn-cs"/>
-                </a:rPr>
-                <a:t>系統挑出的時機站得住</a:t>
-              </a:r>
-            </a:p>
-          </p:txBody>
-        </p:sp>
-      </p:grpSp>
-      <p:grpSp>
-        <p:nvGrpSpPr>
-          <p:cNvPr id="24" name="uncertainty"/>
-          <p:cNvGrpSpPr/>
-          <p:nvPr/>
-        </p:nvGrpSpPr>
-        <p:grpSpPr>
-          <a:xfrm>
-            <a:off x="7984236" y="1758950"/>
-            <a:ext cx="2503170" cy="3086481"/>
-            <a:chOff x="7984236" y="1758950"/>
-            <a:chExt cx="2503170" cy="3086481"/>
-          </a:xfrm>
-        </p:grpSpPr>
-        <p:sp>
-          <p:nvSpPr>
-            <p:cNvPr id="19" name="TextBox 19"/>
-            <p:cNvSpPr txBox="1"/>
-            <p:nvPr/>
-          </p:nvSpPr>
-          <p:spPr>
-            <a:xfrm>
-              <a:off x="7992618" y="1758950"/>
-              <a:ext cx="1793748" cy="322707"/>
-            </a:xfrm>
-            <a:prstGeom prst="rect">
-              <a:avLst/>
-            </a:prstGeom>
-            <a:noFill/>
-            <a:ln>
-              <a:noFill/>
-            </a:ln>
-          </p:spPr>
-          <p:txBody>
-            <a:bodyPr wrap="none" lIns="0" tIns="0" rIns="0" bIns="0" anchor="t" anchorCtr="0">
-              <a:spAutoFit/>
-            </a:bodyPr>
-            <a:lstStyle/>
-            <a:p>
-              <a:pPr algn="l">
-                <a:lnSpc>
-                  <a:spcPct val="150000"/>
-                </a:lnSpc>
-              </a:pPr>
-              <a:r>
-                <a:rPr lang="zh-TW" sz="1600" dirty="0">
-                  <a:solidFill>
-                    <a:schemeClr val="accent2"/>
-                  </a:solidFill>
-                  <a:latin typeface="+mn-lt"/>
-                  <a:ea typeface="+mn-ea"/>
-                  <a:cs typeface="+mn-cs"/>
-                </a:rPr>
-                <a:t>即開即用</a:t>
-              </a:r>
-            </a:p>
-          </p:txBody>
-        </p:sp>
-        <p:sp>
-          <p:nvSpPr>
-            <p:cNvPr id="20" name="TextBox 20"/>
-            <p:cNvSpPr txBox="1"/>
-            <p:nvPr/>
-          </p:nvSpPr>
-          <p:spPr>
-            <a:xfrm>
-              <a:off x="7988808" y="2184400"/>
-              <a:ext cx="993648" cy="469392"/>
-            </a:xfrm>
-            <a:prstGeom prst="rect">
-              <a:avLst/>
-            </a:prstGeom>
-            <a:noFill/>
-            <a:ln>
-              <a:noFill/>
-            </a:ln>
-          </p:spPr>
-          <p:txBody>
-            <a:bodyPr wrap="none" lIns="0" tIns="0" rIns="0" bIns="0" anchor="t" anchorCtr="0">
-              <a:spAutoFit/>
-            </a:bodyPr>
-            <a:lstStyle/>
-            <a:p>
-              <a:pPr algn="l">
-                <a:lnSpc>
-                  <a:spcPct val="150000"/>
-                </a:lnSpc>
-              </a:pPr>
-              <a:r>
-                <a:rPr lang="zh-TW" sz="2000" b="1" dirty="0">
-                  <a:solidFill>
-                    <a:schemeClr val="accent1"/>
-                  </a:solidFill>
-                  <a:latin typeface="+mn-lt"/>
-                  <a:ea typeface="+mn-ea"/>
-                  <a:cs typeface="+mn-cs"/>
-                </a:rPr>
-                <a:t>網頁版操作</a:t>
-              </a:r>
-            </a:p>
-          </p:txBody>
-        </p:sp>
-        <p:sp>
-          <p:nvSpPr>
-            <p:cNvPr id="21" name="TextBox 21"/>
-            <p:cNvSpPr txBox="1"/>
-            <p:nvPr/>
-          </p:nvSpPr>
-          <p:spPr>
-            <a:xfrm>
-              <a:off x="7984236" y="2927350"/>
-              <a:ext cx="1810512" cy="645414"/>
-            </a:xfrm>
-            <a:prstGeom prst="rect">
-              <a:avLst/>
-            </a:prstGeom>
-            <a:noFill/>
-            <a:ln>
-              <a:noFill/>
-            </a:ln>
-          </p:spPr>
-          <p:txBody>
-            <a:bodyPr wrap="none" lIns="0" tIns="0" rIns="0" bIns="0" anchor="t" anchorCtr="0">
-              <a:spAutoFit/>
-            </a:bodyPr>
-            <a:lstStyle/>
-            <a:p>
-              <a:pPr algn="l"/>
-              <a:r>
-                <a:rPr lang="zh-TW" sz="3200" b="1" dirty="0">
-                  <a:solidFill>
-                    <a:schemeClr val="accent1"/>
-                  </a:solidFill>
-                  <a:latin typeface="+mn-lt"/>
-                  <a:ea typeface="+mn-ea"/>
-                  <a:cs typeface="+mn-cs"/>
-                </a:rPr>
-                <a:t>25 秒</a:t>
-              </a:r>
-            </a:p>
-          </p:txBody>
-        </p:sp>
-        <p:sp>
-          <p:nvSpPr>
-            <p:cNvPr id="22" name="TextBox 22"/>
-            <p:cNvSpPr txBox="1"/>
-            <p:nvPr/>
-          </p:nvSpPr>
-          <p:spPr>
-            <a:xfrm>
-              <a:off x="7991094" y="3651250"/>
-              <a:ext cx="2496312" cy="762381"/>
-            </a:xfrm>
-            <a:prstGeom prst="rect">
-              <a:avLst/>
-            </a:prstGeom>
-            <a:noFill/>
-            <a:ln>
-              <a:noFill/>
-            </a:ln>
-          </p:spPr>
-          <p:txBody>
-            <a:bodyPr wrap="none" lIns="0" tIns="0" rIns="0" bIns="0" anchor="t" anchorCtr="0">
-              <a:spAutoFit/>
-            </a:bodyPr>
-            <a:lstStyle/>
-            <a:p>
-              <a:pPr algn="l">
-                <a:lnSpc>
-                  <a:spcPct val="150000"/>
-                </a:lnSpc>
-              </a:pPr>
-              <a:r>
-                <a:rPr lang="zh-TW" sz="1800" dirty="0">
-                  <a:solidFill>
-                    <a:schemeClr val="accent1"/>
-                  </a:solidFill>
-                  <a:latin typeface="+mn-lt"/>
-                  <a:ea typeface="+mn-ea"/>
-                  <a:cs typeface="+mn-cs"/>
-                </a:rPr>
-                <a:t>完成一次代打比較</a:t>
-              </a:r>
-              <a:br>
-                <a:rPr lang="zh-TW" sz="1950" dirty="0">
-                  <a:solidFill>
-                    <a:schemeClr val="accent1"/>
-                  </a:solidFill>
-                  <a:latin typeface="+mn-lt"/>
-                  <a:ea typeface="+mn-ea"/>
-                  <a:cs typeface="+mn-cs"/>
-                </a:rPr>
-              </a:br>
-              <a:r>
-                <a:rPr lang="zh-TW" sz="1800" dirty="0">
-                  <a:solidFill>
-                    <a:schemeClr val="accent1"/>
-                  </a:solidFill>
-                  <a:latin typeface="+mn-lt"/>
-                  <a:ea typeface="+mn-ea"/>
-                  <a:cs typeface="+mn-cs"/>
-                </a:rPr>
-                <a:t>免安裝，手機也能用</a:t>
-              </a:r>
-            </a:p>
-          </p:txBody>
-        </p:sp>
-        <p:sp>
-          <p:nvSpPr>
-            <p:cNvPr id="23" name="TextBox 23"/>
-            <p:cNvSpPr txBox="1"/>
-            <p:nvPr/>
-          </p:nvSpPr>
-          <p:spPr>
-            <a:xfrm>
-              <a:off x="7991094" y="4464050"/>
-              <a:ext cx="2382393" cy="381381"/>
-            </a:xfrm>
-            <a:prstGeom prst="rect">
-              <a:avLst/>
-            </a:prstGeom>
-            <a:noFill/>
-            <a:ln>
-              <a:noFill/>
-            </a:ln>
-          </p:spPr>
-          <p:txBody>
-            <a:bodyPr wrap="none" lIns="0" tIns="0" rIns="0" bIns="0" anchor="t" anchorCtr="0">
-              <a:spAutoFit/>
-            </a:bodyPr>
-            <a:lstStyle/>
-            <a:p>
-              <a:pPr algn="l">
-                <a:lnSpc>
-                  <a:spcPct val="150000"/>
-                </a:lnSpc>
-              </a:pPr>
-              <a:r>
-                <a:rPr lang="zh-TW" sz="1800" dirty="0">
-                  <a:solidFill>
-                    <a:schemeClr val="accent1"/>
-                  </a:solidFill>
-                  <a:latin typeface="+mn-lt"/>
-                  <a:ea typeface="+mn-ea"/>
-                  <a:cs typeface="+mn-cs"/>
-                </a:rPr>
-                <a:t>簡報案例都能在網站重現</a:t>
-              </a:r>
-            </a:p>
-          </p:txBody>
-        </p:sp>
-      </p:grpSp>
-      <p:grpSp>
-        <p:nvGrpSpPr>
-          <p:cNvPr id="27" name="boundaries"/>
-          <p:cNvGrpSpPr/>
-          <p:nvPr/>
-        </p:nvGrpSpPr>
-        <p:grpSpPr>
-          <a:xfrm>
-            <a:off x="598932" y="5413375"/>
-            <a:ext cx="6960394" cy="811657"/>
-            <a:chOff x="598932" y="5413375"/>
-            <a:chExt cx="6960394" cy="811657"/>
-          </a:xfrm>
-        </p:grpSpPr>
-        <p:sp>
-          <p:nvSpPr>
-            <p:cNvPr id="25" name="TextBox 25"/>
-            <p:cNvSpPr txBox="1"/>
-            <p:nvPr/>
-          </p:nvSpPr>
-          <p:spPr>
-            <a:xfrm>
-              <a:off x="598932" y="5413375"/>
-              <a:ext cx="3979164" cy="410718"/>
-            </a:xfrm>
-            <a:prstGeom prst="rect">
-              <a:avLst/>
-            </a:prstGeom>
-            <a:noFill/>
-            <a:ln>
-              <a:noFill/>
-            </a:ln>
-          </p:spPr>
-          <p:txBody>
-            <a:bodyPr wrap="none" lIns="0" tIns="0" rIns="0" bIns="0" anchor="t" anchorCtr="0">
-              <a:spAutoFit/>
-            </a:bodyPr>
-            <a:lstStyle/>
-            <a:p>
-              <a:pPr algn="l">
-                <a:lnSpc>
-                  <a:spcPct val="150000"/>
-                </a:lnSpc>
-              </a:pPr>
-              <a:r>
-                <a:rPr lang="zh-TW" sz="1800" b="1" dirty="0">
-                  <a:solidFill>
-                    <a:schemeClr val="accent1"/>
-                  </a:solidFill>
-                  <a:latin typeface="+mn-lt"/>
-                  <a:ea typeface="+mn-ea"/>
-                  <a:cs typeface="+mn-cs"/>
-                </a:rPr>
-                <a:t>從「憑感覺換人」到「看清差距與代價再換人」</a:t>
-              </a:r>
-            </a:p>
-          </p:txBody>
-        </p:sp>
-        <p:sp>
-          <p:nvSpPr>
-            <p:cNvPr id="26" name="TextBox 26"/>
-            <p:cNvSpPr txBox="1"/>
-            <p:nvPr/>
-          </p:nvSpPr>
-          <p:spPr>
-            <a:xfrm>
-              <a:off x="601218" y="5902325"/>
-              <a:ext cx="6958108" cy="322707"/>
-            </a:xfrm>
-            <a:prstGeom prst="rect">
-              <a:avLst/>
-            </a:prstGeom>
-            <a:noFill/>
-            <a:ln>
-              <a:noFill/>
-            </a:ln>
-          </p:spPr>
-          <p:txBody>
-            <a:bodyPr wrap="none" lIns="0" tIns="0" rIns="0" bIns="0" anchor="t" anchorCtr="0">
-              <a:spAutoFit/>
-            </a:bodyPr>
-            <a:lstStyle/>
-            <a:p>
-              <a:pPr algn="l">
-                <a:lnSpc>
-                  <a:spcPct val="150000"/>
-                </a:lnSpc>
-              </a:pPr>
-              <a:r>
-                <a:rPr lang="zh-TW" sz="1600" dirty="0">
-                  <a:solidFill>
-                    <a:schemeClr val="accent5"/>
-                  </a:solidFill>
-                  <a:latin typeface="+mn-lt"/>
-                  <a:ea typeface="+mn-ea"/>
-                  <a:cs typeface="+mn-cs"/>
-                </a:rPr>
-                <a:t>差多少、誰接守、憑什麼：三個問題，一個畫面回答。</a:t>
+                    <a:srgbClr val="18344A"/>
+                  </a:solidFill>
+                  <a:latin typeface="Arial"/>
+                  <a:ea typeface="Microsoft JhengHei"/>
+                  <a:cs typeface="Arial"/>
+                </a:rPr>
+                <a:t>成果總結：可比較、可追溯、可操作</a:t>
               </a:r>
             </a:p>
           </p:txBody>
@@ -9733,6 +8713,732 @@
           </a:p>
         </p:txBody>
       </p:sp>
+      <p:sp>
+        <p:nvSpPr>
+          <p:cNvPr id="8" name="Rectangle 8"/>
+          <p:cNvSpPr/>
+          <p:nvPr/>
+        </p:nvSpPr>
+        <p:spPr>
+          <a:xfrm>
+            <a:off x="609600" y="1257300"/>
+            <a:ext cx="857250" cy="38100"/>
+          </a:xfrm>
+          <a:prstGeom prst="rect">
+            <a:avLst/>
+          </a:prstGeom>
+          <a:solidFill>
+            <a:srgbClr val="B54836"/>
+          </a:solidFill>
+          <a:ln>
+            <a:noFill/>
+          </a:ln>
+        </p:spPr>
+      </p:sp>
+      <p:grpSp>
+        <p:nvGrpSpPr>
+          <p:cNvPr id="13" name="compare"/>
+          <p:cNvGrpSpPr/>
+          <p:nvPr/>
+        </p:nvGrpSpPr>
+        <p:grpSpPr>
+          <a:xfrm>
+            <a:off x="609600" y="1695450"/>
+            <a:ext cx="3238500" cy="3310890"/>
+            <a:chOff x="609600" y="1695450"/>
+            <a:chExt cx="3238500" cy="3310890"/>
+          </a:xfrm>
+        </p:grpSpPr>
+        <p:sp>
+          <p:nvSpPr>
+            <p:cNvPr id="9" name="TextBox 9"/>
+            <p:cNvSpPr txBox="1"/>
+            <p:nvPr/>
+          </p:nvSpPr>
+          <p:spPr>
+            <a:xfrm>
+              <a:off x="609600" y="1695450"/>
+              <a:ext cx="3238500" cy="335280"/>
+            </a:xfrm>
+            <a:prstGeom prst="rect">
+              <a:avLst/>
+            </a:prstGeom>
+            <a:noFill/>
+            <a:ln>
+              <a:noFill/>
+            </a:ln>
+          </p:spPr>
+          <p:txBody>
+            <a:bodyPr wrap="none" lIns="0" tIns="31433" rIns="0" bIns="0" anchor="t" anchorCtr="0">
+              <a:noAutofit/>
+            </a:bodyPr>
+            <a:lstStyle/>
+            <a:p>
+              <a:pPr algn="l"/>
+              <a:r>
+                <a:rPr lang="zh-TW" sz="1650" dirty="0">
+                  <a:solidFill>
+                    <a:srgbClr val="B54836"/>
+                  </a:solidFill>
+                  <a:latin typeface="Microsoft JhengHei"/>
+                  <a:ea typeface="Microsoft JhengHei"/>
+                  <a:cs typeface="Microsoft JhengHei"/>
+                </a:rPr>
+                <a:t>01</a:t>
+              </a:r>
+            </a:p>
+          </p:txBody>
+        </p:sp>
+        <p:sp>
+          <p:nvSpPr>
+            <p:cNvPr id="10" name="TextBox 10"/>
+            <p:cNvSpPr txBox="1"/>
+            <p:nvPr/>
+          </p:nvSpPr>
+          <p:spPr>
+            <a:xfrm>
+              <a:off x="609600" y="2133600"/>
+              <a:ext cx="3238500" cy="457200"/>
+            </a:xfrm>
+            <a:prstGeom prst="rect">
+              <a:avLst/>
+            </a:prstGeom>
+            <a:noFill/>
+            <a:ln>
+              <a:noFill/>
+            </a:ln>
+          </p:spPr>
+          <p:txBody>
+            <a:bodyPr wrap="none" lIns="0" tIns="42862" rIns="0" bIns="0" anchor="t" anchorCtr="0">
+              <a:noAutofit/>
+            </a:bodyPr>
+            <a:lstStyle/>
+            <a:p>
+              <a:pPr algn="l"/>
+              <a:r>
+                <a:rPr lang="zh-TW" sz="2250" b="1" dirty="0">
+                  <a:solidFill>
+                    <a:srgbClr val="18344A"/>
+                  </a:solidFill>
+                  <a:latin typeface="Microsoft JhengHei"/>
+                  <a:ea typeface="Microsoft JhengHei"/>
+                  <a:cs typeface="Microsoft JhengHei"/>
+                </a:rPr>
+                <a:t>情境比較</a:t>
+              </a:r>
+            </a:p>
+          </p:txBody>
+        </p:sp>
+        <p:sp>
+          <p:nvSpPr>
+            <p:cNvPr id="11" name="TextBox 11"/>
+            <p:cNvSpPr txBox="1"/>
+            <p:nvPr/>
+          </p:nvSpPr>
+          <p:spPr>
+            <a:xfrm>
+              <a:off x="609600" y="2828925"/>
+              <a:ext cx="3238500" cy="640080"/>
+            </a:xfrm>
+            <a:prstGeom prst="rect">
+              <a:avLst/>
+            </a:prstGeom>
+            <a:noFill/>
+            <a:ln>
+              <a:noFill/>
+            </a:ln>
+          </p:spPr>
+          <p:txBody>
+            <a:bodyPr wrap="none" lIns="0" tIns="60008" rIns="0" bIns="0" anchor="t" anchorCtr="0">
+              <a:noAutofit/>
+            </a:bodyPr>
+            <a:lstStyle/>
+            <a:p>
+              <a:pPr algn="l"/>
+              <a:r>
+                <a:rPr lang="zh-TW" sz="3150" b="1" dirty="0">
+                  <a:solidFill>
+                    <a:srgbClr val="18344A"/>
+                  </a:solidFill>
+                  <a:latin typeface="Microsoft JhengHei"/>
+                  <a:ea typeface="Microsoft JhengHei"/>
+                  <a:cs typeface="Microsoft JhengHei"/>
+                </a:rPr>
+                <a:t>代打／換投</a:t>
+              </a:r>
+            </a:p>
+          </p:txBody>
+        </p:sp>
+        <p:sp>
+          <p:nvSpPr>
+            <p:cNvPr id="12" name="TextBox 12"/>
+            <p:cNvSpPr txBox="1"/>
+            <p:nvPr/>
+          </p:nvSpPr>
+          <p:spPr>
+            <a:xfrm>
+              <a:off x="609600" y="3714750"/>
+              <a:ext cx="3238500" cy="1291590"/>
+            </a:xfrm>
+            <a:prstGeom prst="rect">
+              <a:avLst/>
+            </a:prstGeom>
+            <a:noFill/>
+            <a:ln>
+              <a:noFill/>
+            </a:ln>
+          </p:spPr>
+          <p:txBody>
+            <a:bodyPr wrap="none" lIns="0" tIns="37147" rIns="0" bIns="0" anchor="t" anchorCtr="0">
+              <a:noAutofit/>
+            </a:bodyPr>
+            <a:lstStyle/>
+            <a:p>
+              <a:pPr algn="l">
+                <a:lnSpc>
+                  <a:spcPts val="3525"/>
+                </a:lnSpc>
+              </a:pPr>
+              <a:r>
+                <a:rPr lang="zh-TW" sz="1950" dirty="0">
+                  <a:solidFill>
+                    <a:srgbClr val="58616B"/>
+                  </a:solidFill>
+                  <a:latin typeface="Microsoft JhengHei"/>
+                  <a:ea typeface="Microsoft JhengHei"/>
+                  <a:cs typeface="Microsoft JhengHei"/>
+                </a:rPr>
+                <a:t>同一局勢下比較人選差距</a:t>
+              </a:r>
+              <a:br/>
+              <a:r>
+                <a:rPr lang="zh-TW" sz="1950" dirty="0">
+                  <a:solidFill>
+                    <a:srgbClr val="58616B"/>
+                  </a:solidFill>
+                  <a:latin typeface="Microsoft JhengHei"/>
+                  <a:ea typeface="Microsoft JhengHei"/>
+                  <a:cs typeface="Microsoft JhengHei"/>
+                </a:rPr>
+                <a:t>一起查看守位與接守需求</a:t>
+              </a:r>
+              <a:br/>
+              <a:r>
+                <a:rPr lang="zh-TW" sz="1950" dirty="0">
+                  <a:solidFill>
+                    <a:srgbClr val="58616B"/>
+                  </a:solidFill>
+                  <a:latin typeface="Microsoft JhengHei"/>
+                  <a:ea typeface="Microsoft JhengHei"/>
+                  <a:cs typeface="Microsoft JhengHei"/>
+                </a:rPr>
+                <a:t>2024–2025 兩季資料</a:t>
+              </a:r>
+            </a:p>
+          </p:txBody>
+        </p:sp>
+      </p:grpSp>
+      <p:grpSp>
+        <p:nvGrpSpPr>
+          <p:cNvPr id="18" name="trace"/>
+          <p:cNvGrpSpPr/>
+          <p:nvPr/>
+        </p:nvGrpSpPr>
+        <p:grpSpPr>
+          <a:xfrm>
+            <a:off x="4305300" y="1695450"/>
+            <a:ext cx="3238500" cy="3310890"/>
+            <a:chOff x="4305300" y="1695450"/>
+            <a:chExt cx="3238500" cy="3310890"/>
+          </a:xfrm>
+        </p:grpSpPr>
+        <p:sp>
+          <p:nvSpPr>
+            <p:cNvPr id="14" name="TextBox 14"/>
+            <p:cNvSpPr txBox="1"/>
+            <p:nvPr/>
+          </p:nvSpPr>
+          <p:spPr>
+            <a:xfrm>
+              <a:off x="4305300" y="1695450"/>
+              <a:ext cx="3238500" cy="335280"/>
+            </a:xfrm>
+            <a:prstGeom prst="rect">
+              <a:avLst/>
+            </a:prstGeom>
+            <a:noFill/>
+            <a:ln>
+              <a:noFill/>
+            </a:ln>
+          </p:spPr>
+          <p:txBody>
+            <a:bodyPr wrap="none" lIns="0" tIns="31433" rIns="0" bIns="0" anchor="t" anchorCtr="0">
+              <a:noAutofit/>
+            </a:bodyPr>
+            <a:lstStyle/>
+            <a:p>
+              <a:pPr algn="l"/>
+              <a:r>
+                <a:rPr lang="zh-TW" sz="1650" dirty="0">
+                  <a:solidFill>
+                    <a:srgbClr val="B54836"/>
+                  </a:solidFill>
+                  <a:latin typeface="Microsoft JhengHei"/>
+                  <a:ea typeface="Microsoft JhengHei"/>
+                  <a:cs typeface="Microsoft JhengHei"/>
+                </a:rPr>
+                <a:t>02</a:t>
+              </a:r>
+            </a:p>
+          </p:txBody>
+        </p:sp>
+        <p:sp>
+          <p:nvSpPr>
+            <p:cNvPr id="15" name="TextBox 15"/>
+            <p:cNvSpPr txBox="1"/>
+            <p:nvPr/>
+          </p:nvSpPr>
+          <p:spPr>
+            <a:xfrm>
+              <a:off x="4305300" y="2133600"/>
+              <a:ext cx="3238500" cy="457200"/>
+            </a:xfrm>
+            <a:prstGeom prst="rect">
+              <a:avLst/>
+            </a:prstGeom>
+            <a:noFill/>
+            <a:ln>
+              <a:noFill/>
+            </a:ln>
+          </p:spPr>
+          <p:txBody>
+            <a:bodyPr wrap="none" lIns="0" tIns="42862" rIns="0" bIns="0" anchor="t" anchorCtr="0">
+              <a:noAutofit/>
+            </a:bodyPr>
+            <a:lstStyle/>
+            <a:p>
+              <a:pPr algn="l"/>
+              <a:r>
+                <a:rPr lang="zh-TW" sz="2250" b="1" dirty="0">
+                  <a:solidFill>
+                    <a:srgbClr val="18344A"/>
+                  </a:solidFill>
+                  <a:latin typeface="Microsoft JhengHei"/>
+                  <a:ea typeface="Microsoft JhengHei"/>
+                  <a:cs typeface="Microsoft JhengHei"/>
+                </a:rPr>
+                <a:t>依據可查</a:t>
+              </a:r>
+            </a:p>
+          </p:txBody>
+        </p:sp>
+        <p:sp>
+          <p:nvSpPr>
+            <p:cNvPr id="16" name="TextBox 16"/>
+            <p:cNvSpPr txBox="1"/>
+            <p:nvPr/>
+          </p:nvSpPr>
+          <p:spPr>
+            <a:xfrm>
+              <a:off x="4305300" y="2847975"/>
+              <a:ext cx="3238500" cy="609600"/>
+            </a:xfrm>
+            <a:prstGeom prst="rect">
+              <a:avLst/>
+            </a:prstGeom>
+            <a:noFill/>
+            <a:ln>
+              <a:noFill/>
+            </a:ln>
+          </p:spPr>
+          <p:txBody>
+            <a:bodyPr wrap="none" lIns="0" tIns="57150" rIns="0" bIns="0" anchor="t" anchorCtr="0">
+              <a:noAutofit/>
+            </a:bodyPr>
+            <a:lstStyle/>
+            <a:p>
+              <a:pPr algn="l"/>
+              <a:r>
+                <a:rPr lang="zh-TW" sz="3000" b="1" dirty="0">
+                  <a:solidFill>
+                    <a:srgbClr val="18344A"/>
+                  </a:solidFill>
+                  <a:latin typeface="Microsoft JhengHei"/>
+                  <a:ea typeface="Microsoft JhengHei"/>
+                  <a:cs typeface="Microsoft JhengHei"/>
+                </a:rPr>
+                <a:t>樣本與提醒</a:t>
+              </a:r>
+            </a:p>
+          </p:txBody>
+        </p:sp>
+        <p:sp>
+          <p:nvSpPr>
+            <p:cNvPr id="17" name="TextBox 17"/>
+            <p:cNvSpPr txBox="1"/>
+            <p:nvPr/>
+          </p:nvSpPr>
+          <p:spPr>
+            <a:xfrm>
+              <a:off x="4305300" y="3714750"/>
+              <a:ext cx="3238500" cy="1291590"/>
+            </a:xfrm>
+            <a:prstGeom prst="rect">
+              <a:avLst/>
+            </a:prstGeom>
+            <a:noFill/>
+            <a:ln>
+              <a:noFill/>
+            </a:ln>
+          </p:spPr>
+          <p:txBody>
+            <a:bodyPr wrap="none" lIns="0" tIns="37147" rIns="0" bIns="0" anchor="t" anchorCtr="0">
+              <a:noAutofit/>
+            </a:bodyPr>
+            <a:lstStyle/>
+            <a:p>
+              <a:pPr algn="l">
+                <a:lnSpc>
+                  <a:spcPts val="3525"/>
+                </a:lnSpc>
+              </a:pPr>
+              <a:r>
+                <a:rPr lang="zh-TW" sz="1950" dirty="0">
+                  <a:solidFill>
+                    <a:srgbClr val="58616B"/>
+                  </a:solidFill>
+                  <a:latin typeface="Microsoft JhengHei"/>
+                  <a:ea typeface="Microsoft JhengHei"/>
+                  <a:cs typeface="Microsoft JhengHei"/>
+                </a:rPr>
+                <a:t>查核模型分歧與樣本量</a:t>
+              </a:r>
+              <a:br/>
+              <a:r>
+                <a:rPr lang="zh-TW" sz="1950" dirty="0">
+                  <a:solidFill>
+                    <a:srgbClr val="58616B"/>
+                  </a:solidFill>
+                  <a:latin typeface="Microsoft JhengHei"/>
+                  <a:ea typeface="Microsoft JhengHei"/>
+                  <a:cs typeface="Microsoft JhengHei"/>
+                </a:rPr>
+                <a:t>歷史回放使用賽前資料</a:t>
+              </a:r>
+              <a:br/>
+              <a:r>
+                <a:rPr lang="zh-TW" sz="1950" dirty="0">
+                  <a:solidFill>
+                    <a:srgbClr val="58616B"/>
+                  </a:solidFill>
+                  <a:latin typeface="Microsoft JhengHei"/>
+                  <a:ea typeface="Microsoft JhengHei"/>
+                  <a:cs typeface="Microsoft JhengHei"/>
+                </a:rPr>
+                <a:t>回測提供風險線索</a:t>
+              </a:r>
+            </a:p>
+          </p:txBody>
+        </p:sp>
+      </p:grpSp>
+      <p:grpSp>
+        <p:nvGrpSpPr>
+          <p:cNvPr id="23" name="operate"/>
+          <p:cNvGrpSpPr/>
+          <p:nvPr/>
+        </p:nvGrpSpPr>
+        <p:grpSpPr>
+          <a:xfrm>
+            <a:off x="8001000" y="1695450"/>
+            <a:ext cx="3581400" cy="3310890"/>
+            <a:chOff x="8001000" y="1695450"/>
+            <a:chExt cx="3581400" cy="3310890"/>
+          </a:xfrm>
+        </p:grpSpPr>
+        <p:sp>
+          <p:nvSpPr>
+            <p:cNvPr id="19" name="TextBox 19"/>
+            <p:cNvSpPr txBox="1"/>
+            <p:nvPr/>
+          </p:nvSpPr>
+          <p:spPr>
+            <a:xfrm>
+              <a:off x="8001000" y="1695450"/>
+              <a:ext cx="3581400" cy="335280"/>
+            </a:xfrm>
+            <a:prstGeom prst="rect">
+              <a:avLst/>
+            </a:prstGeom>
+            <a:noFill/>
+            <a:ln>
+              <a:noFill/>
+            </a:ln>
+          </p:spPr>
+          <p:txBody>
+            <a:bodyPr wrap="none" lIns="0" tIns="31433" rIns="0" bIns="0" anchor="t" anchorCtr="0">
+              <a:noAutofit/>
+            </a:bodyPr>
+            <a:lstStyle/>
+            <a:p>
+              <a:pPr algn="l"/>
+              <a:r>
+                <a:rPr lang="zh-TW" sz="1650" dirty="0">
+                  <a:solidFill>
+                    <a:srgbClr val="B54836"/>
+                  </a:solidFill>
+                  <a:latin typeface="Microsoft JhengHei"/>
+                  <a:ea typeface="Microsoft JhengHei"/>
+                  <a:cs typeface="Microsoft JhengHei"/>
+                </a:rPr>
+                <a:t>03</a:t>
+              </a:r>
+            </a:p>
+          </p:txBody>
+        </p:sp>
+        <p:sp>
+          <p:nvSpPr>
+            <p:cNvPr id="20" name="TextBox 20"/>
+            <p:cNvSpPr txBox="1"/>
+            <p:nvPr/>
+          </p:nvSpPr>
+          <p:spPr>
+            <a:xfrm>
+              <a:off x="8001000" y="2133600"/>
+              <a:ext cx="3581400" cy="457200"/>
+            </a:xfrm>
+            <a:prstGeom prst="rect">
+              <a:avLst/>
+            </a:prstGeom>
+            <a:noFill/>
+            <a:ln>
+              <a:noFill/>
+            </a:ln>
+          </p:spPr>
+          <p:txBody>
+            <a:bodyPr wrap="none" lIns="0" tIns="42862" rIns="0" bIns="0" anchor="t" anchorCtr="0">
+              <a:noAutofit/>
+            </a:bodyPr>
+            <a:lstStyle/>
+            <a:p>
+              <a:pPr algn="l"/>
+              <a:r>
+                <a:rPr lang="zh-TW" sz="2250" b="1" dirty="0">
+                  <a:solidFill>
+                    <a:srgbClr val="18344A"/>
+                  </a:solidFill>
+                  <a:latin typeface="Microsoft JhengHei"/>
+                  <a:ea typeface="Microsoft JhengHei"/>
+                  <a:cs typeface="Microsoft JhengHei"/>
+                </a:rPr>
+                <a:t>網站實作</a:t>
+              </a:r>
+            </a:p>
+          </p:txBody>
+        </p:sp>
+        <p:sp>
+          <p:nvSpPr>
+            <p:cNvPr id="21" name="TextBox 21"/>
+            <p:cNvSpPr txBox="1"/>
+            <p:nvPr/>
+          </p:nvSpPr>
+          <p:spPr>
+            <a:xfrm>
+              <a:off x="8001000" y="2847975"/>
+              <a:ext cx="3581400" cy="609600"/>
+            </a:xfrm>
+            <a:prstGeom prst="rect">
+              <a:avLst/>
+            </a:prstGeom>
+            <a:noFill/>
+            <a:ln>
+              <a:noFill/>
+            </a:ln>
+          </p:spPr>
+          <p:txBody>
+            <a:bodyPr wrap="none" lIns="0" tIns="57150" rIns="0" bIns="0" anchor="t" anchorCtr="0">
+              <a:noAutofit/>
+            </a:bodyPr>
+            <a:lstStyle/>
+            <a:p>
+              <a:pPr algn="l"/>
+              <a:r>
+                <a:rPr lang="zh-TW" sz="3000" b="1" dirty="0">
+                  <a:solidFill>
+                    <a:srgbClr val="18344A"/>
+                  </a:solidFill>
+                  <a:latin typeface="Microsoft JhengHei"/>
+                  <a:ea typeface="Microsoft JhengHei"/>
+                  <a:cs typeface="Microsoft JhengHei"/>
+                </a:rPr>
+                <a:t>25 秒實錄</a:t>
+              </a:r>
+            </a:p>
+          </p:txBody>
+        </p:sp>
+        <p:sp>
+          <p:nvSpPr>
+            <p:cNvPr id="22" name="TextBox 22"/>
+            <p:cNvSpPr txBox="1"/>
+            <p:nvPr/>
+          </p:nvSpPr>
+          <p:spPr>
+            <a:xfrm>
+              <a:off x="8001000" y="3714750"/>
+              <a:ext cx="3581400" cy="1291590"/>
+            </a:xfrm>
+            <a:prstGeom prst="rect">
+              <a:avLst/>
+            </a:prstGeom>
+            <a:noFill/>
+            <a:ln>
+              <a:noFill/>
+            </a:ln>
+          </p:spPr>
+          <p:txBody>
+            <a:bodyPr wrap="none" lIns="0" tIns="37147" rIns="0" bIns="0" anchor="t" anchorCtr="0">
+              <a:noAutofit/>
+            </a:bodyPr>
+            <a:lstStyle/>
+            <a:p>
+              <a:pPr algn="l">
+                <a:lnSpc>
+                  <a:spcPts val="3525"/>
+                </a:lnSpc>
+              </a:pPr>
+              <a:r>
+                <a:rPr lang="zh-TW" sz="1950" dirty="0">
+                  <a:solidFill>
+                    <a:srgbClr val="58616B"/>
+                  </a:solidFill>
+                  <a:latin typeface="Microsoft JhengHei"/>
+                  <a:ea typeface="Microsoft JhengHei"/>
+                  <a:cs typeface="Microsoft JhengHei"/>
+                </a:rPr>
+                <a:t>本簡報內嵌操作示範</a:t>
+              </a:r>
+              <a:br/>
+              <a:r>
+                <a:rPr lang="zh-TW" sz="1950" dirty="0">
+                  <a:solidFill>
+                    <a:srgbClr val="58616B"/>
+                  </a:solidFill>
+                  <a:latin typeface="Microsoft JhengHei"/>
+                  <a:ea typeface="Microsoft JhengHei"/>
+                  <a:cs typeface="Microsoft JhengHei"/>
+                </a:rPr>
+                <a:t>瀏覽器即可開啟網站</a:t>
+              </a:r>
+              <a:br/>
+              <a:r>
+                <a:rPr lang="zh-TW" sz="1950" dirty="0">
+                  <a:solidFill>
+                    <a:srgbClr val="58616B"/>
+                  </a:solidFill>
+                  <a:latin typeface="Microsoft JhengHei"/>
+                  <a:ea typeface="Microsoft JhengHei"/>
+                  <a:cs typeface="Microsoft JhengHei"/>
+                </a:rPr>
+                <a:t>案例可在網站重現</a:t>
+              </a:r>
+            </a:p>
+          </p:txBody>
+        </p:sp>
+      </p:grpSp>
+      <p:grpSp>
+        <p:nvGrpSpPr>
+          <p:cNvPr id="26" name="product-takeaway"/>
+          <p:cNvGrpSpPr/>
+          <p:nvPr/>
+        </p:nvGrpSpPr>
+        <p:grpSpPr>
+          <a:xfrm>
+            <a:off x="609600" y="5429250"/>
+            <a:ext cx="10972800" cy="849630"/>
+            <a:chOff x="609600" y="5429250"/>
+            <a:chExt cx="10972800" cy="849630"/>
+          </a:xfrm>
+        </p:grpSpPr>
+        <p:sp>
+          <p:nvSpPr>
+            <p:cNvPr id="24" name="TextBox 24"/>
+            <p:cNvSpPr txBox="1"/>
+            <p:nvPr/>
+          </p:nvSpPr>
+          <p:spPr>
+            <a:xfrm>
+              <a:off x="609600" y="5429250"/>
+              <a:ext cx="10972800" cy="426720"/>
+            </a:xfrm>
+            <a:prstGeom prst="rect">
+              <a:avLst/>
+            </a:prstGeom>
+            <a:noFill/>
+            <a:ln>
+              <a:noFill/>
+            </a:ln>
+          </p:spPr>
+          <p:txBody>
+            <a:bodyPr wrap="none" lIns="0" tIns="40005" rIns="0" bIns="0" anchor="t" anchorCtr="0">
+              <a:noAutofit/>
+            </a:bodyPr>
+            <a:lstStyle/>
+            <a:p>
+              <a:pPr algn="l"/>
+              <a:r>
+                <a:rPr lang="zh-TW" sz="2100" b="1" dirty="0">
+                  <a:solidFill>
+                    <a:srgbClr val="18344A"/>
+                  </a:solidFill>
+                  <a:latin typeface="Microsoft JhengHei"/>
+                  <a:ea typeface="Microsoft JhengHei"/>
+                  <a:cs typeface="Microsoft JhengHei"/>
+                </a:rPr>
+                <a:t>差多少、誰接守、憑什麼：把比較條件與判讀依據放在一起。</a:t>
+              </a:r>
+            </a:p>
+          </p:txBody>
+        </p:sp>
+        <p:sp>
+          <p:nvSpPr>
+            <p:cNvPr id="25" name="TextBox 25"/>
+            <p:cNvSpPr txBox="1"/>
+            <p:nvPr/>
+          </p:nvSpPr>
+          <p:spPr>
+            <a:xfrm>
+              <a:off x="609600" y="5943600"/>
+              <a:ext cx="10972800" cy="335280"/>
+            </a:xfrm>
+            <a:prstGeom prst="rect">
+              <a:avLst/>
+            </a:prstGeom>
+            <a:noFill/>
+            <a:ln>
+              <a:noFill/>
+            </a:ln>
+          </p:spPr>
+          <p:txBody>
+            <a:bodyPr wrap="none" lIns="0" tIns="31432" rIns="0" bIns="0" anchor="t" anchorCtr="0">
+              <a:noAutofit/>
+            </a:bodyPr>
+            <a:lstStyle/>
+            <a:p>
+              <a:pPr algn="l"/>
+              <a:r>
+                <a:rPr lang="zh-TW" sz="1650" dirty="0">
+                  <a:solidFill>
+                    <a:srgbClr val="58616B"/>
+                  </a:solidFill>
+                  <a:latin typeface="Microsoft JhengHei"/>
+                  <a:ea typeface="Microsoft JhengHei"/>
+                  <a:cs typeface="Microsoft JhengHei"/>
+                </a:rPr>
+                <a:t>回測為觀察性比較；影片長度不代表使用者完成任務所需的時間。</a:t>
+              </a:r>
+            </a:p>
+          </p:txBody>
+        </p:sp>
+      </p:grpSp>
     </p:spTree>
   </p:cSld>
   <p:clrMapOvr>
@@ -9742,7 +9448,7 @@
 </file>
 
 <file path=ppt/slides/slide21.xml><?xml version="1.0" encoding="utf-8"?>
-<p:sld xmlns:a="http://schemas.openxmlformats.org/drawingml/2006/main" xmlns:r="http://schemas.openxmlformats.org/officeDocument/2006/relationships" xmlns:p="http://schemas.openxmlformats.org/presentationml/2006/main">
+<p:sld xmlns:a="http://schemas.openxmlformats.org/drawingml/2006/main" xmlns:p="http://schemas.openxmlformats.org/presentationml/2006/main">
   <p:cSld>
     <p:bg>
       <p:bgPr>
@@ -9833,21 +9539,21 @@
         </p:nvGrpSpPr>
         <p:grpSpPr>
           <a:xfrm>
-            <a:off x="592836" y="546100"/>
+            <a:off x="592836" y="546068"/>
             <a:ext cx="6697218" cy="645414"/>
-            <a:chOff x="592836" y="546100"/>
+            <a:chOff x="592836" y="546068"/>
             <a:chExt cx="6697218" cy="645414"/>
           </a:xfrm>
         </p:grpSpPr>
         <p:sp>
           <p:nvSpPr>
             <p:cNvPr id="4" name="TextBox 4"/>
-            <p:cNvSpPr txBox="1"/>
-            <p:nvPr/>
-          </p:nvSpPr>
-          <p:spPr>
-            <a:xfrm>
-              <a:off x="592836" y="546100"/>
+            <p:cNvSpPr/>
+            <p:nvPr/>
+          </p:nvSpPr>
+          <p:spPr>
+            <a:xfrm>
+              <a:off x="592836" y="546068"/>
               <a:ext cx="6697218" cy="645414"/>
             </a:xfrm>
             <a:prstGeom prst="rect">
@@ -9859,8 +9565,8 @@
             </a:ln>
           </p:spPr>
           <p:txBody>
-            <a:bodyPr wrap="none" lIns="0" tIns="0" rIns="0" bIns="0" anchor="t" anchorCtr="0">
-              <a:spAutoFit/>
+            <a:bodyPr wrap="none" lIns="0" tIns="32" rIns="0" bIns="0" anchor="t" anchorCtr="0">
+              <a:noAutofit/>
             </a:bodyPr>
             <a:lstStyle/>
             <a:p>
@@ -9868,738 +9574,13 @@
               <a:r>
                 <a:rPr lang="zh-TW" sz="3200" b="1" dirty="0">
                   <a:solidFill>
-                    <a:schemeClr val="accent1"/>
-                  </a:solidFill>
-                  <a:latin typeface="+mn-lt"/>
-                  <a:ea typeface="+mn-ea"/>
-                  <a:cs typeface="+mn-cs"/>
-                </a:rPr>
-                <a:t>目前的限制與未來規劃</a:t>
-              </a:r>
-            </a:p>
-          </p:txBody>
-        </p:sp>
-      </p:grpSp>
-      <p:grpSp>
-        <p:nvGrpSpPr>
-          <p:cNvPr id="8" name="fixed-title"/>
-          <p:cNvGrpSpPr/>
-          <p:nvPr/>
-        </p:nvGrpSpPr>
-        <p:grpSpPr>
-          <a:xfrm>
-            <a:off x="597408" y="1631950"/>
-            <a:ext cx="2932176" cy="469392"/>
-            <a:chOff x="597408" y="1631950"/>
-            <a:chExt cx="2932176" cy="469392"/>
-          </a:xfrm>
-        </p:grpSpPr>
-        <p:sp>
-          <p:nvSpPr>
-            <p:cNvPr id="7" name="TextBox 7"/>
-            <p:cNvSpPr txBox="1"/>
-            <p:nvPr/>
-          </p:nvSpPr>
-          <p:spPr>
-            <a:xfrm>
-              <a:off x="597408" y="1631950"/>
-              <a:ext cx="2932176" cy="469392"/>
-            </a:xfrm>
-            <a:prstGeom prst="rect">
-              <a:avLst/>
-            </a:prstGeom>
-            <a:noFill/>
-            <a:ln>
-              <a:noFill/>
-            </a:ln>
-          </p:spPr>
-          <p:txBody>
-            <a:bodyPr wrap="none" lIns="0" tIns="0" rIns="0" bIns="0" anchor="t" anchorCtr="0">
-              <a:spAutoFit/>
-            </a:bodyPr>
-            <a:lstStyle/>
-            <a:p>
-              <a:pPr algn="l">
-                <a:lnSpc>
-                  <a:spcPct val="150000"/>
-                </a:lnSpc>
-              </a:pPr>
-              <a:r>
-                <a:rPr lang="zh-TW" sz="2000" b="1" dirty="0">
-                  <a:solidFill>
-                    <a:schemeClr val="accent1"/>
-                  </a:solidFill>
-                  <a:latin typeface="+mn-lt"/>
-                  <a:ea typeface="+mn-ea"/>
-                  <a:cs typeface="+mn-cs"/>
-                </a:rPr>
-                <a:t>三項主要限制，對應三個改進方向</a:t>
-              </a:r>
-            </a:p>
-          </p:txBody>
-        </p:sp>
-      </p:grpSp>
-      <p:grpSp>
-        <p:nvGrpSpPr>
-          <p:cNvPr id="12" name="pitcher"/>
-          <p:cNvGrpSpPr/>
-          <p:nvPr/>
-        </p:nvGrpSpPr>
-        <p:grpSpPr>
-          <a:xfrm>
-            <a:off x="597408" y="2463800"/>
-            <a:ext cx="1316736" cy="1369568"/>
-            <a:chOff x="597408" y="2463800"/>
-            <a:chExt cx="1316736" cy="1369568"/>
-          </a:xfrm>
-        </p:grpSpPr>
-        <p:sp>
-          <p:nvSpPr>
-            <p:cNvPr id="9" name="TextBox 9"/>
-            <p:cNvSpPr txBox="1"/>
-            <p:nvPr/>
-          </p:nvSpPr>
-          <p:spPr>
-            <a:xfrm>
-              <a:off x="601218" y="2463800"/>
-              <a:ext cx="261099" cy="322707"/>
-            </a:xfrm>
-            <a:prstGeom prst="rect">
-              <a:avLst/>
-            </a:prstGeom>
-            <a:noFill/>
-            <a:ln>
-              <a:noFill/>
-            </a:ln>
-          </p:spPr>
-          <p:txBody>
-            <a:bodyPr wrap="none" lIns="0" tIns="0" rIns="0" bIns="0" anchor="t" anchorCtr="0">
-              <a:spAutoFit/>
-            </a:bodyPr>
-            <a:lstStyle/>
-            <a:p>
-              <a:pPr algn="l">
-                <a:lnSpc>
-                  <a:spcPct val="150000"/>
-                </a:lnSpc>
-              </a:pPr>
-              <a:r>
-                <a:rPr lang="zh-TW" sz="1600" dirty="0">
-                  <a:solidFill>
-                    <a:schemeClr val="accent2"/>
-                  </a:solidFill>
-                  <a:latin typeface="+mn-lt"/>
-                  <a:ea typeface="+mn-ea"/>
-                  <a:cs typeface="+mn-cs"/>
-                </a:rPr>
-                <a:t>01</a:t>
-              </a:r>
-            </a:p>
-          </p:txBody>
-        </p:sp>
-        <p:sp>
-          <p:nvSpPr>
-            <p:cNvPr id="10" name="TextBox 10"/>
-            <p:cNvSpPr txBox="1"/>
-            <p:nvPr/>
-          </p:nvSpPr>
-          <p:spPr>
-            <a:xfrm>
-              <a:off x="597408" y="2841625"/>
-              <a:ext cx="1316736" cy="469392"/>
-            </a:xfrm>
-            <a:prstGeom prst="rect">
-              <a:avLst/>
-            </a:prstGeom>
-            <a:noFill/>
-            <a:ln>
-              <a:noFill/>
-            </a:ln>
-          </p:spPr>
-          <p:txBody>
-            <a:bodyPr wrap="none" lIns="0" tIns="0" rIns="0" bIns="0" anchor="t" anchorCtr="0">
-              <a:spAutoFit/>
-            </a:bodyPr>
-            <a:lstStyle/>
-            <a:p>
-              <a:pPr algn="l">
-                <a:lnSpc>
-                  <a:spcPct val="150000"/>
-                </a:lnSpc>
-              </a:pPr>
-              <a:r>
-                <a:rPr lang="zh-TW" sz="2000" b="1" dirty="0">
-                  <a:solidFill>
-                    <a:schemeClr val="accent1"/>
-                  </a:solidFill>
-                  <a:latin typeface="+mn-lt"/>
-                  <a:ea typeface="+mn-ea"/>
-                  <a:cs typeface="+mn-cs"/>
-                </a:rPr>
-                <a:t>可用名單</a:t>
-              </a:r>
-            </a:p>
-          </p:txBody>
-        </p:sp>
-        <p:sp>
-          <p:nvSpPr>
-            <p:cNvPr id="11" name="TextBox 11"/>
-            <p:cNvSpPr txBox="1"/>
-            <p:nvPr/>
-          </p:nvSpPr>
-          <p:spPr>
-            <a:xfrm>
-              <a:off x="598932" y="3422650"/>
-              <a:ext cx="586740" cy="410718"/>
-            </a:xfrm>
-            <a:prstGeom prst="rect">
-              <a:avLst/>
-            </a:prstGeom>
-            <a:noFill/>
-            <a:ln>
-              <a:noFill/>
-            </a:ln>
-          </p:spPr>
-          <p:txBody>
-            <a:bodyPr wrap="none" lIns="0" tIns="0" rIns="0" bIns="0" anchor="t" anchorCtr="0">
-              <a:spAutoFit/>
-            </a:bodyPr>
-            <a:lstStyle/>
-            <a:p>
-              <a:pPr algn="l">
-                <a:lnSpc>
-                  <a:spcPct val="150000"/>
-                </a:lnSpc>
-              </a:pPr>
-              <a:r>
-                <a:rPr lang="zh-TW" sz="1800" dirty="0">
-                  <a:solidFill>
-                    <a:schemeClr val="accent1"/>
-                  </a:solidFill>
-                  <a:latin typeface="+mn-lt"/>
-                  <a:ea typeface="+mn-ea"/>
-                  <a:cs typeface="+mn-cs"/>
-                </a:rPr>
-                <a:t>現況：出賽名單需人工確認</a:t>
-              </a:r>
-              <a:br>
-                <a:rPr lang="zh-TW" sz="2100" dirty="0">
-                  <a:solidFill>
-                    <a:schemeClr val="accent1"/>
-                  </a:solidFill>
-                  <a:latin typeface="+mn-lt"/>
-                  <a:ea typeface="+mn-ea"/>
-                  <a:cs typeface="+mn-cs"/>
-                </a:rPr>
-              </a:br>
-              <a:r>
-                <a:rPr lang="zh-TW" sz="1800" dirty="0">
-                  <a:solidFill>
-                    <a:schemeClr val="accent1"/>
-                  </a:solidFill>
-                  <a:latin typeface="+mn-lt"/>
-                  <a:ea typeface="+mn-ea"/>
-                  <a:cs typeface="+mn-cs"/>
-                </a:rPr>
-                <a:t>規劃：串接官方登錄與傷兵資訊</a:t>
-              </a:r>
-            </a:p>
-          </p:txBody>
-        </p:sp>
-      </p:grpSp>
-      <p:grpSp>
-        <p:nvGrpSpPr>
-          <p:cNvPr id="16" name="situation"/>
-          <p:cNvGrpSpPr/>
-          <p:nvPr/>
-        </p:nvGrpSpPr>
-        <p:grpSpPr>
-          <a:xfrm>
-            <a:off x="4293108" y="2463800"/>
-            <a:ext cx="2423160" cy="1718818"/>
-            <a:chOff x="4293108" y="2463800"/>
-            <a:chExt cx="2423160" cy="1718818"/>
-          </a:xfrm>
-        </p:grpSpPr>
-        <p:sp>
-          <p:nvSpPr>
-            <p:cNvPr id="13" name="TextBox 13"/>
-            <p:cNvSpPr txBox="1"/>
-            <p:nvPr/>
-          </p:nvSpPr>
-          <p:spPr>
-            <a:xfrm>
-              <a:off x="4296918" y="2463800"/>
-              <a:ext cx="261099" cy="322707"/>
-            </a:xfrm>
-            <a:prstGeom prst="rect">
-              <a:avLst/>
-            </a:prstGeom>
-            <a:noFill/>
-            <a:ln>
-              <a:noFill/>
-            </a:ln>
-          </p:spPr>
-          <p:txBody>
-            <a:bodyPr wrap="none" lIns="0" tIns="0" rIns="0" bIns="0" anchor="t" anchorCtr="0">
-              <a:spAutoFit/>
-            </a:bodyPr>
-            <a:lstStyle/>
-            <a:p>
-              <a:pPr algn="l">
-                <a:lnSpc>
-                  <a:spcPct val="150000"/>
-                </a:lnSpc>
-              </a:pPr>
-              <a:r>
-                <a:rPr lang="zh-TW" sz="1600" dirty="0">
-                  <a:solidFill>
-                    <a:schemeClr val="accent2"/>
-                  </a:solidFill>
-                  <a:latin typeface="+mn-lt"/>
-                  <a:ea typeface="+mn-ea"/>
-                  <a:cs typeface="+mn-cs"/>
-                </a:rPr>
-                <a:t>02</a:t>
-              </a:r>
-            </a:p>
-          </p:txBody>
-        </p:sp>
-        <p:sp>
-          <p:nvSpPr>
-            <p:cNvPr id="14" name="TextBox 14"/>
-            <p:cNvSpPr txBox="1"/>
-            <p:nvPr/>
-          </p:nvSpPr>
-          <p:spPr>
-            <a:xfrm>
-              <a:off x="4293108" y="2841625"/>
-              <a:ext cx="1316736" cy="469392"/>
-            </a:xfrm>
-            <a:prstGeom prst="rect">
-              <a:avLst/>
-            </a:prstGeom>
-            <a:noFill/>
-            <a:ln>
-              <a:noFill/>
-            </a:ln>
-          </p:spPr>
-          <p:txBody>
-            <a:bodyPr wrap="none" lIns="0" tIns="0" rIns="0" bIns="0" anchor="t" anchorCtr="0">
-              <a:spAutoFit/>
-            </a:bodyPr>
-            <a:lstStyle/>
-            <a:p>
-              <a:pPr algn="l">
-                <a:lnSpc>
-                  <a:spcPct val="150000"/>
-                </a:lnSpc>
-              </a:pPr>
-              <a:r>
-                <a:rPr lang="zh-TW" sz="2000" b="1" dirty="0">
-                  <a:solidFill>
-                    <a:schemeClr val="accent1"/>
-                  </a:solidFill>
-                  <a:latin typeface="+mn-lt"/>
-                  <a:ea typeface="+mn-ea"/>
-                  <a:cs typeface="+mn-cs"/>
-                </a:rPr>
-                <a:t>代打時機</a:t>
-              </a:r>
-            </a:p>
-          </p:txBody>
-        </p:sp>
-        <p:sp>
-          <p:nvSpPr>
-            <p:cNvPr id="15" name="TextBox 15"/>
-            <p:cNvSpPr txBox="1"/>
-            <p:nvPr/>
-          </p:nvSpPr>
-          <p:spPr>
-            <a:xfrm>
-              <a:off x="4294632" y="3371850"/>
-              <a:ext cx="2421636" cy="810768"/>
-            </a:xfrm>
-            <a:prstGeom prst="rect">
-              <a:avLst/>
-            </a:prstGeom>
-            <a:noFill/>
-            <a:ln>
-              <a:noFill/>
-            </a:ln>
-          </p:spPr>
-          <p:txBody>
-            <a:bodyPr wrap="none" lIns="0" tIns="0" rIns="0" bIns="0" anchor="t" anchorCtr="0">
-              <a:spAutoFit/>
-            </a:bodyPr>
-            <a:lstStyle/>
-            <a:p>
-              <a:pPr algn="l">
-                <a:lnSpc>
-                  <a:spcPct val="150000"/>
-                </a:lnSpc>
-              </a:pPr>
-              <a:r>
-                <a:rPr lang="zh-TW" sz="1800" dirty="0">
-                  <a:solidFill>
-                    <a:schemeClr val="accent1"/>
-                  </a:solidFill>
-                  <a:latin typeface="+mn-lt"/>
-                  <a:ea typeface="+mn-ea"/>
-                  <a:cs typeface="+mn-cs"/>
-                </a:rPr>
-                <a:t>現況：回測差異尚不明顯</a:t>
-              </a:r>
-              <a:br>
-                <a:rPr lang="zh-TW" sz="2100" dirty="0">
-                  <a:solidFill>
-                    <a:schemeClr val="accent1"/>
-                  </a:solidFill>
-                  <a:latin typeface="+mn-lt"/>
-                  <a:ea typeface="+mn-ea"/>
-                  <a:cs typeface="+mn-cs"/>
-                </a:rPr>
-              </a:br>
-              <a:r>
-                <a:rPr lang="zh-TW" sz="1800" dirty="0">
-                  <a:solidFill>
-                    <a:schemeClr val="accent1"/>
-                  </a:solidFill>
-                  <a:latin typeface="+mn-lt"/>
-                  <a:ea typeface="+mn-ea"/>
-                  <a:cs typeface="+mn-cs"/>
-                </a:rPr>
-                <a:t>規劃：納入 2026 資料重訓驗證</a:t>
-              </a:r>
-            </a:p>
-          </p:txBody>
-        </p:sp>
-      </p:grpSp>
-      <p:grpSp>
-        <p:nvGrpSpPr>
-          <p:cNvPr id="20" name="current"/>
-          <p:cNvGrpSpPr/>
-          <p:nvPr/>
-        </p:nvGrpSpPr>
-        <p:grpSpPr>
-          <a:xfrm>
-            <a:off x="7988808" y="2463800"/>
-            <a:ext cx="1356360" cy="1718818"/>
-            <a:chOff x="7988808" y="2463800"/>
-            <a:chExt cx="1356360" cy="1718818"/>
-          </a:xfrm>
-        </p:grpSpPr>
-        <p:sp>
-          <p:nvSpPr>
-            <p:cNvPr id="17" name="TextBox 17"/>
-            <p:cNvSpPr txBox="1"/>
-            <p:nvPr/>
-          </p:nvSpPr>
-          <p:spPr>
-            <a:xfrm>
-              <a:off x="7992618" y="2463800"/>
-              <a:ext cx="261099" cy="322707"/>
-            </a:xfrm>
-            <a:prstGeom prst="rect">
-              <a:avLst/>
-            </a:prstGeom>
-            <a:noFill/>
-            <a:ln>
-              <a:noFill/>
-            </a:ln>
-          </p:spPr>
-          <p:txBody>
-            <a:bodyPr wrap="none" lIns="0" tIns="0" rIns="0" bIns="0" anchor="t" anchorCtr="0">
-              <a:spAutoFit/>
-            </a:bodyPr>
-            <a:lstStyle/>
-            <a:p>
-              <a:pPr algn="l">
-                <a:lnSpc>
-                  <a:spcPct val="150000"/>
-                </a:lnSpc>
-              </a:pPr>
-              <a:r>
-                <a:rPr lang="zh-TW" sz="1600" dirty="0">
-                  <a:solidFill>
-                    <a:schemeClr val="accent2"/>
-                  </a:solidFill>
-                  <a:latin typeface="+mn-lt"/>
-                  <a:ea typeface="+mn-ea"/>
-                  <a:cs typeface="+mn-cs"/>
-                </a:rPr>
-                <a:t>03</a:t>
-              </a:r>
-            </a:p>
-          </p:txBody>
-        </p:sp>
-        <p:sp>
-          <p:nvSpPr>
-            <p:cNvPr id="18" name="TextBox 18"/>
-            <p:cNvSpPr txBox="1"/>
-            <p:nvPr/>
-          </p:nvSpPr>
-          <p:spPr>
-            <a:xfrm>
-              <a:off x="7988808" y="2841625"/>
-              <a:ext cx="1316736" cy="469392"/>
-            </a:xfrm>
-            <a:prstGeom prst="rect">
-              <a:avLst/>
-            </a:prstGeom>
-            <a:noFill/>
-            <a:ln>
-              <a:noFill/>
-            </a:ln>
-          </p:spPr>
-          <p:txBody>
-            <a:bodyPr wrap="none" lIns="0" tIns="0" rIns="0" bIns="0" anchor="t" anchorCtr="0">
-              <a:spAutoFit/>
-            </a:bodyPr>
-            <a:lstStyle/>
-            <a:p>
-              <a:pPr algn="l">
-                <a:lnSpc>
-                  <a:spcPct val="150000"/>
-                </a:lnSpc>
-              </a:pPr>
-              <a:r>
-                <a:rPr lang="zh-TW" sz="2000" b="1" dirty="0">
-                  <a:solidFill>
-                    <a:schemeClr val="accent1"/>
-                  </a:solidFill>
-                  <a:latin typeface="+mn-lt"/>
-                  <a:ea typeface="+mn-ea"/>
-                  <a:cs typeface="+mn-cs"/>
-                </a:rPr>
-                <a:t>疲勞與近況</a:t>
-              </a:r>
-            </a:p>
-          </p:txBody>
-        </p:sp>
-        <p:sp>
-          <p:nvSpPr>
-            <p:cNvPr id="19" name="TextBox 19"/>
-            <p:cNvSpPr txBox="1"/>
-            <p:nvPr/>
-          </p:nvSpPr>
-          <p:spPr>
-            <a:xfrm>
-              <a:off x="7990332" y="3371850"/>
-              <a:ext cx="1354836" cy="810768"/>
-            </a:xfrm>
-            <a:prstGeom prst="rect">
-              <a:avLst/>
-            </a:prstGeom>
-            <a:noFill/>
-            <a:ln>
-              <a:noFill/>
-            </a:ln>
-          </p:spPr>
-          <p:txBody>
-            <a:bodyPr wrap="none" lIns="0" tIns="0" rIns="0" bIns="0" anchor="t" anchorCtr="0">
-              <a:spAutoFit/>
-            </a:bodyPr>
-            <a:lstStyle/>
-            <a:p>
-              <a:pPr algn="l">
-                <a:lnSpc>
-                  <a:spcPct val="150000"/>
-                </a:lnSpc>
-              </a:pPr>
-              <a:r>
-                <a:rPr lang="zh-TW" sz="1800" dirty="0">
-                  <a:solidFill>
-                    <a:schemeClr val="accent1"/>
-                  </a:solidFill>
-                  <a:latin typeface="+mn-lt"/>
-                  <a:ea typeface="+mn-ea"/>
-                  <a:cs typeface="+mn-cs"/>
-                </a:rPr>
-                <a:t>現況：連投影響尚未證實</a:t>
-              </a:r>
-              <a:br>
-                <a:rPr lang="zh-TW" sz="2100" dirty="0">
-                  <a:solidFill>
-                    <a:schemeClr val="accent1"/>
-                  </a:solidFill>
-                  <a:latin typeface="+mn-lt"/>
-                  <a:ea typeface="+mn-ea"/>
-                  <a:cs typeface="+mn-cs"/>
-                </a:rPr>
-              </a:br>
-              <a:r>
-                <a:rPr lang="zh-TW" sz="1800" dirty="0">
-                  <a:solidFill>
-                    <a:schemeClr val="accent1"/>
-                  </a:solidFill>
-                  <a:latin typeface="+mn-lt"/>
-                  <a:ea typeface="+mn-ea"/>
-                  <a:cs typeface="+mn-cs"/>
-                </a:rPr>
-                <a:t>規劃：累積球數與休息再檢驗</a:t>
-              </a:r>
-            </a:p>
-          </p:txBody>
-        </p:sp>
-      </p:grpSp>
-      <p:grpSp>
-        <p:nvGrpSpPr>
-          <p:cNvPr id="23" name="candidate-change"/>
-          <p:cNvGrpSpPr/>
-          <p:nvPr/>
-        </p:nvGrpSpPr>
-        <p:grpSpPr>
-          <a:xfrm>
-            <a:off x="597408" y="4699000"/>
-            <a:ext cx="4870704" cy="867918"/>
-            <a:chOff x="597408" y="4699000"/>
-            <a:chExt cx="4870704" cy="867918"/>
-          </a:xfrm>
-        </p:grpSpPr>
-        <p:sp>
-          <p:nvSpPr>
-            <p:cNvPr id="21" name="TextBox 21"/>
-            <p:cNvSpPr txBox="1"/>
-            <p:nvPr/>
-          </p:nvSpPr>
-          <p:spPr>
-            <a:xfrm>
-              <a:off x="597408" y="4699000"/>
-              <a:ext cx="4870704" cy="469392"/>
-            </a:xfrm>
-            <a:prstGeom prst="rect">
-              <a:avLst/>
-            </a:prstGeom>
-            <a:noFill/>
-            <a:ln>
-              <a:noFill/>
-            </a:ln>
-          </p:spPr>
-          <p:txBody>
-            <a:bodyPr wrap="none" lIns="0" tIns="0" rIns="0" bIns="0" anchor="t" anchorCtr="0">
-              <a:spAutoFit/>
-            </a:bodyPr>
-            <a:lstStyle/>
-            <a:p>
-              <a:pPr algn="l">
-                <a:lnSpc>
-                  <a:spcPct val="150000"/>
-                </a:lnSpc>
-              </a:pPr>
-              <a:r>
-                <a:rPr lang="zh-TW" sz="2000" b="1" dirty="0">
-                  <a:solidFill>
-                    <a:schemeClr val="accent1"/>
-                  </a:solidFill>
-                  <a:latin typeface="+mn-lt"/>
-                  <a:ea typeface="+mn-ea"/>
-                  <a:cs typeface="+mn-cs"/>
-                </a:rPr>
-                <a:t>下一步：2026 賽季實際使用</a:t>
-              </a:r>
-            </a:p>
-          </p:txBody>
-        </p:sp>
-        <p:sp>
-          <p:nvSpPr>
-            <p:cNvPr id="22" name="TextBox 22"/>
-            <p:cNvSpPr txBox="1"/>
-            <p:nvPr/>
-          </p:nvSpPr>
-          <p:spPr>
-            <a:xfrm>
-              <a:off x="598932" y="5156200"/>
-              <a:ext cx="4544568" cy="410718"/>
-            </a:xfrm>
-            <a:prstGeom prst="rect">
-              <a:avLst/>
-            </a:prstGeom>
-            <a:noFill/>
-            <a:ln>
-              <a:noFill/>
-            </a:ln>
-          </p:spPr>
-          <p:txBody>
-            <a:bodyPr wrap="none" lIns="0" tIns="0" rIns="0" bIns="0" anchor="t" anchorCtr="0">
-              <a:spAutoFit/>
-            </a:bodyPr>
-            <a:lstStyle/>
-            <a:p>
-              <a:pPr algn="l">
-                <a:lnSpc>
-                  <a:spcPct val="150000"/>
-                </a:lnSpc>
-              </a:pPr>
-              <a:r>
-                <a:rPr lang="zh-TW" sz="1800" dirty="0">
-                  <a:solidFill>
-                    <a:schemeClr val="accent5"/>
-                  </a:solidFill>
-                  <a:latin typeface="+mn-lt"/>
-                  <a:ea typeface="+mn-ea"/>
-                  <a:cs typeface="+mn-cs"/>
-                </a:rPr>
-                <a:t>每週更新資料　／　模型定期重訓　／　賽後回測檢討</a:t>
-              </a:r>
-            </a:p>
-          </p:txBody>
-        </p:sp>
-      </p:grpSp>
-      <p:grpSp>
-        <p:nvGrpSpPr>
-          <p:cNvPr id="25" name="condition-conclusion"/>
-          <p:cNvGrpSpPr/>
-          <p:nvPr/>
-        </p:nvGrpSpPr>
-        <p:grpSpPr>
-          <a:xfrm>
-            <a:off x="601218" y="5911850"/>
-            <a:ext cx="6236208" cy="322707"/>
-            <a:chOff x="601218" y="5911850"/>
-            <a:chExt cx="6236208" cy="322707"/>
-          </a:xfrm>
-        </p:grpSpPr>
-        <p:sp>
-          <p:nvSpPr>
-            <p:cNvPr id="24" name="TextBox 24"/>
-            <p:cNvSpPr txBox="1"/>
-            <p:nvPr/>
-          </p:nvSpPr>
-          <p:spPr>
-            <a:xfrm>
-              <a:off x="601218" y="5911850"/>
-              <a:ext cx="6236208" cy="322707"/>
-            </a:xfrm>
-            <a:prstGeom prst="rect">
-              <a:avLst/>
-            </a:prstGeom>
-            <a:noFill/>
-            <a:ln>
-              <a:noFill/>
-            </a:ln>
-          </p:spPr>
-          <p:txBody>
-            <a:bodyPr wrap="none" lIns="0" tIns="0" rIns="0" bIns="0" anchor="t" anchorCtr="0">
-              <a:spAutoFit/>
-            </a:bodyPr>
-            <a:lstStyle/>
-            <a:p>
-              <a:pPr algn="l">
-                <a:lnSpc>
-                  <a:spcPct val="150000"/>
-                </a:lnSpc>
-              </a:pPr>
-              <a:r>
-                <a:rPr lang="zh-TW" sz="1600" dirty="0">
-                  <a:solidFill>
-                    <a:schemeClr val="accent5"/>
-                  </a:solidFill>
-                  <a:latin typeface="+mn-lt"/>
-                  <a:ea typeface="+mn-ea"/>
-                  <a:cs typeface="+mn-cs"/>
-                </a:rPr>
-                <a:t>模型差距是估計值；換人決策仍需結合現場狀況與教練判斷。</a:t>
+                    <a:srgbClr val="18344A"/>
+                  </a:solidFill>
+                  <a:latin typeface="Arial"/>
+                  <a:ea typeface="Microsoft JhengHei"/>
+                  <a:cs typeface="Arial"/>
+                </a:rPr>
+                <a:t>目前的限制，對應後續驗證方向</a:t>
               </a:r>
             </a:p>
           </p:txBody>
@@ -10645,6 +9626,984 @@
           </a:p>
         </p:txBody>
       </p:sp>
+      <p:sp>
+        <p:nvSpPr>
+          <p:cNvPr id="8" name="Rectangle 8"/>
+          <p:cNvSpPr/>
+          <p:nvPr/>
+        </p:nvSpPr>
+        <p:spPr>
+          <a:xfrm>
+            <a:off x="609600" y="1257300"/>
+            <a:ext cx="857250" cy="38100"/>
+          </a:xfrm>
+          <a:prstGeom prst="rect">
+            <a:avLst/>
+          </a:prstGeom>
+          <a:solidFill>
+            <a:srgbClr val="B54836"/>
+          </a:solidFill>
+          <a:ln>
+            <a:noFill/>
+          </a:ln>
+        </p:spPr>
+      </p:sp>
+      <p:grpSp>
+        <p:nvGrpSpPr>
+          <p:cNvPr id="15" name="availability"/>
+          <p:cNvGrpSpPr/>
+          <p:nvPr/>
+        </p:nvGrpSpPr>
+        <p:grpSpPr>
+          <a:xfrm>
+            <a:off x="609600" y="1771650"/>
+            <a:ext cx="3238500" cy="3529965"/>
+            <a:chOff x="609600" y="1771650"/>
+            <a:chExt cx="3238500" cy="3529965"/>
+          </a:xfrm>
+        </p:grpSpPr>
+        <p:sp>
+          <p:nvSpPr>
+            <p:cNvPr id="9" name="TextBox 9"/>
+            <p:cNvSpPr txBox="1"/>
+            <p:nvPr/>
+          </p:nvSpPr>
+          <p:spPr>
+            <a:xfrm>
+              <a:off x="609600" y="1771650"/>
+              <a:ext cx="3238500" cy="335280"/>
+            </a:xfrm>
+            <a:prstGeom prst="rect">
+              <a:avLst/>
+            </a:prstGeom>
+            <a:noFill/>
+            <a:ln>
+              <a:noFill/>
+            </a:ln>
+          </p:spPr>
+          <p:txBody>
+            <a:bodyPr wrap="none" lIns="0" tIns="31433" rIns="0" bIns="0" anchor="t" anchorCtr="0">
+              <a:noAutofit/>
+            </a:bodyPr>
+            <a:lstStyle/>
+            <a:p>
+              <a:pPr algn="l"/>
+              <a:r>
+                <a:rPr lang="zh-TW" sz="1650" dirty="0">
+                  <a:solidFill>
+                    <a:srgbClr val="B54836"/>
+                  </a:solidFill>
+                  <a:latin typeface="Microsoft JhengHei"/>
+                  <a:ea typeface="Microsoft JhengHei"/>
+                  <a:cs typeface="Microsoft JhengHei"/>
+                </a:rPr>
+                <a:t>01</a:t>
+              </a:r>
+            </a:p>
+          </p:txBody>
+        </p:sp>
+        <p:sp>
+          <p:nvSpPr>
+            <p:cNvPr id="10" name="TextBox 10"/>
+            <p:cNvSpPr txBox="1"/>
+            <p:nvPr/>
+          </p:nvSpPr>
+          <p:spPr>
+            <a:xfrm>
+              <a:off x="609600" y="2200275"/>
+              <a:ext cx="3238500" cy="487680"/>
+            </a:xfrm>
+            <a:prstGeom prst="rect">
+              <a:avLst/>
+            </a:prstGeom>
+            <a:noFill/>
+            <a:ln>
+              <a:noFill/>
+            </a:ln>
+          </p:spPr>
+          <p:txBody>
+            <a:bodyPr wrap="none" lIns="0" tIns="45720" rIns="0" bIns="0" anchor="t" anchorCtr="0">
+              <a:noAutofit/>
+            </a:bodyPr>
+            <a:lstStyle/>
+            <a:p>
+              <a:pPr algn="l"/>
+              <a:r>
+                <a:rPr lang="zh-TW" sz="2400" b="1" dirty="0">
+                  <a:solidFill>
+                    <a:srgbClr val="18344A"/>
+                  </a:solidFill>
+                  <a:latin typeface="Microsoft JhengHei"/>
+                  <a:ea typeface="Microsoft JhengHei"/>
+                  <a:cs typeface="Microsoft JhengHei"/>
+                </a:rPr>
+                <a:t>可用名單</a:t>
+              </a:r>
+            </a:p>
+          </p:txBody>
+        </p:sp>
+        <p:sp>
+          <p:nvSpPr>
+            <p:cNvPr id="11" name="TextBox 11"/>
+            <p:cNvSpPr txBox="1"/>
+            <p:nvPr/>
+          </p:nvSpPr>
+          <p:spPr>
+            <a:xfrm>
+              <a:off x="609600" y="2876550"/>
+              <a:ext cx="3238500" cy="335280"/>
+            </a:xfrm>
+            <a:prstGeom prst="rect">
+              <a:avLst/>
+            </a:prstGeom>
+            <a:noFill/>
+            <a:ln>
+              <a:noFill/>
+            </a:ln>
+          </p:spPr>
+          <p:txBody>
+            <a:bodyPr wrap="none" lIns="0" tIns="31433" rIns="0" bIns="0" anchor="t" anchorCtr="0">
+              <a:noAutofit/>
+            </a:bodyPr>
+            <a:lstStyle/>
+            <a:p>
+              <a:pPr algn="l"/>
+              <a:r>
+                <a:rPr lang="zh-TW" sz="1650" dirty="0">
+                  <a:solidFill>
+                    <a:srgbClr val="58616B"/>
+                  </a:solidFill>
+                  <a:latin typeface="Microsoft JhengHei"/>
+                  <a:ea typeface="Microsoft JhengHei"/>
+                  <a:cs typeface="Microsoft JhengHei"/>
+                </a:rPr>
+                <a:t>目前限制</a:t>
+              </a:r>
+            </a:p>
+          </p:txBody>
+        </p:sp>
+        <p:sp>
+          <p:nvSpPr>
+            <p:cNvPr id="12" name="TextBox 12"/>
+            <p:cNvSpPr txBox="1"/>
+            <p:nvPr/>
+          </p:nvSpPr>
+          <p:spPr>
+            <a:xfrm>
+              <a:off x="609600" y="3248025"/>
+              <a:ext cx="3238500" cy="777240"/>
+            </a:xfrm>
+            <a:prstGeom prst="rect">
+              <a:avLst/>
+            </a:prstGeom>
+            <a:noFill/>
+            <a:ln>
+              <a:noFill/>
+            </a:ln>
+          </p:spPr>
+          <p:txBody>
+            <a:bodyPr wrap="none" lIns="0" tIns="37147" rIns="0" bIns="0" anchor="t" anchorCtr="0">
+              <a:noAutofit/>
+            </a:bodyPr>
+            <a:lstStyle/>
+            <a:p>
+              <a:pPr algn="l">
+                <a:lnSpc>
+                  <a:spcPts val="3000"/>
+                </a:lnSpc>
+              </a:pPr>
+              <a:r>
+                <a:rPr lang="zh-TW" sz="1950" dirty="0">
+                  <a:solidFill>
+                    <a:srgbClr val="18344A"/>
+                  </a:solidFill>
+                  <a:latin typeface="Microsoft JhengHei"/>
+                  <a:ea typeface="Microsoft JhengHei"/>
+                  <a:cs typeface="Microsoft JhengHei"/>
+                </a:rPr>
+                <a:t>名單與出賽資格</a:t>
+              </a:r>
+              <a:br/>
+              <a:r>
+                <a:rPr lang="zh-TW" sz="1950" dirty="0">
+                  <a:solidFill>
+                    <a:srgbClr val="18344A"/>
+                  </a:solidFill>
+                  <a:latin typeface="Microsoft JhengHei"/>
+                  <a:ea typeface="Microsoft JhengHei"/>
+                  <a:cs typeface="Microsoft JhengHei"/>
+                </a:rPr>
+                <a:t>仍需人工確認</a:t>
+              </a:r>
+            </a:p>
+          </p:txBody>
+        </p:sp>
+        <p:sp>
+          <p:nvSpPr>
+            <p:cNvPr id="13" name="TextBox 13"/>
+            <p:cNvSpPr txBox="1"/>
+            <p:nvPr/>
+          </p:nvSpPr>
+          <p:spPr>
+            <a:xfrm>
+              <a:off x="609600" y="4152900"/>
+              <a:ext cx="3238500" cy="335280"/>
+            </a:xfrm>
+            <a:prstGeom prst="rect">
+              <a:avLst/>
+            </a:prstGeom>
+            <a:noFill/>
+            <a:ln>
+              <a:noFill/>
+            </a:ln>
+          </p:spPr>
+          <p:txBody>
+            <a:bodyPr wrap="none" lIns="0" tIns="31433" rIns="0" bIns="0" anchor="t" anchorCtr="0">
+              <a:noAutofit/>
+            </a:bodyPr>
+            <a:lstStyle/>
+            <a:p>
+              <a:pPr algn="l"/>
+              <a:r>
+                <a:rPr lang="zh-TW" sz="1650" dirty="0">
+                  <a:solidFill>
+                    <a:srgbClr val="B54836"/>
+                  </a:solidFill>
+                  <a:latin typeface="Microsoft JhengHei"/>
+                  <a:ea typeface="Microsoft JhengHei"/>
+                  <a:cs typeface="Microsoft JhengHei"/>
+                </a:rPr>
+                <a:t>後續方向</a:t>
+              </a:r>
+            </a:p>
+          </p:txBody>
+        </p:sp>
+        <p:sp>
+          <p:nvSpPr>
+            <p:cNvPr id="14" name="TextBox 14"/>
+            <p:cNvSpPr txBox="1"/>
+            <p:nvPr/>
+          </p:nvSpPr>
+          <p:spPr>
+            <a:xfrm>
+              <a:off x="609600" y="4524375"/>
+              <a:ext cx="3238500" cy="777240"/>
+            </a:xfrm>
+            <a:prstGeom prst="rect">
+              <a:avLst/>
+            </a:prstGeom>
+            <a:noFill/>
+            <a:ln>
+              <a:noFill/>
+            </a:ln>
+          </p:spPr>
+          <p:txBody>
+            <a:bodyPr wrap="none" lIns="0" tIns="37147" rIns="0" bIns="0" anchor="t" anchorCtr="0">
+              <a:noAutofit/>
+            </a:bodyPr>
+            <a:lstStyle/>
+            <a:p>
+              <a:pPr algn="l">
+                <a:lnSpc>
+                  <a:spcPts val="3000"/>
+                </a:lnSpc>
+              </a:pPr>
+              <a:r>
+                <a:rPr lang="zh-TW" sz="1950" dirty="0">
+                  <a:solidFill>
+                    <a:srgbClr val="18344A"/>
+                  </a:solidFill>
+                  <a:latin typeface="Microsoft JhengHei"/>
+                  <a:ea typeface="Microsoft JhengHei"/>
+                  <a:cs typeface="Microsoft JhengHei"/>
+                </a:rPr>
+                <a:t>串接登錄與傷兵資訊</a:t>
+              </a:r>
+              <a:br/>
+              <a:r>
+                <a:rPr lang="zh-TW" sz="1950" dirty="0">
+                  <a:solidFill>
+                    <a:srgbClr val="18344A"/>
+                  </a:solidFill>
+                  <a:latin typeface="Microsoft JhengHei"/>
+                  <a:ea typeface="Microsoft JhengHei"/>
+                  <a:cs typeface="Microsoft JhengHei"/>
+                </a:rPr>
+                <a:t>核對場上及已用人選</a:t>
+              </a:r>
+            </a:p>
+          </p:txBody>
+        </p:sp>
+      </p:grpSp>
+      <p:grpSp>
+        <p:nvGrpSpPr>
+          <p:cNvPr id="22" name="ph-validation"/>
+          <p:cNvGrpSpPr/>
+          <p:nvPr/>
+        </p:nvGrpSpPr>
+        <p:grpSpPr>
+          <a:xfrm>
+            <a:off x="4305300" y="1771650"/>
+            <a:ext cx="3238500" cy="3529965"/>
+            <a:chOff x="4305300" y="1771650"/>
+            <a:chExt cx="3238500" cy="3529965"/>
+          </a:xfrm>
+        </p:grpSpPr>
+        <p:sp>
+          <p:nvSpPr>
+            <p:cNvPr id="16" name="TextBox 16"/>
+            <p:cNvSpPr txBox="1"/>
+            <p:nvPr/>
+          </p:nvSpPr>
+          <p:spPr>
+            <a:xfrm>
+              <a:off x="4305300" y="1771650"/>
+              <a:ext cx="3238500" cy="335280"/>
+            </a:xfrm>
+            <a:prstGeom prst="rect">
+              <a:avLst/>
+            </a:prstGeom>
+            <a:noFill/>
+            <a:ln>
+              <a:noFill/>
+            </a:ln>
+          </p:spPr>
+          <p:txBody>
+            <a:bodyPr wrap="none" lIns="0" tIns="31433" rIns="0" bIns="0" anchor="t" anchorCtr="0">
+              <a:noAutofit/>
+            </a:bodyPr>
+            <a:lstStyle/>
+            <a:p>
+              <a:pPr algn="l"/>
+              <a:r>
+                <a:rPr lang="zh-TW" sz="1650" dirty="0">
+                  <a:solidFill>
+                    <a:srgbClr val="B54836"/>
+                  </a:solidFill>
+                  <a:latin typeface="Microsoft JhengHei"/>
+                  <a:ea typeface="Microsoft JhengHei"/>
+                  <a:cs typeface="Microsoft JhengHei"/>
+                </a:rPr>
+                <a:t>02</a:t>
+              </a:r>
+            </a:p>
+          </p:txBody>
+        </p:sp>
+        <p:sp>
+          <p:nvSpPr>
+            <p:cNvPr id="17" name="TextBox 17"/>
+            <p:cNvSpPr txBox="1"/>
+            <p:nvPr/>
+          </p:nvSpPr>
+          <p:spPr>
+            <a:xfrm>
+              <a:off x="4305300" y="2200275"/>
+              <a:ext cx="3238500" cy="487680"/>
+            </a:xfrm>
+            <a:prstGeom prst="rect">
+              <a:avLst/>
+            </a:prstGeom>
+            <a:noFill/>
+            <a:ln>
+              <a:noFill/>
+            </a:ln>
+          </p:spPr>
+          <p:txBody>
+            <a:bodyPr wrap="none" lIns="0" tIns="45720" rIns="0" bIns="0" anchor="t" anchorCtr="0">
+              <a:noAutofit/>
+            </a:bodyPr>
+            <a:lstStyle/>
+            <a:p>
+              <a:pPr algn="l"/>
+              <a:r>
+                <a:rPr lang="zh-TW" sz="2400" b="1" dirty="0">
+                  <a:solidFill>
+                    <a:srgbClr val="18344A"/>
+                  </a:solidFill>
+                  <a:latin typeface="Microsoft JhengHei"/>
+                  <a:ea typeface="Microsoft JhengHei"/>
+                  <a:cs typeface="Microsoft JhengHei"/>
+                </a:rPr>
+                <a:t>代打時機</a:t>
+              </a:r>
+            </a:p>
+          </p:txBody>
+        </p:sp>
+        <p:sp>
+          <p:nvSpPr>
+            <p:cNvPr id="18" name="TextBox 18"/>
+            <p:cNvSpPr txBox="1"/>
+            <p:nvPr/>
+          </p:nvSpPr>
+          <p:spPr>
+            <a:xfrm>
+              <a:off x="4305300" y="2876550"/>
+              <a:ext cx="3238500" cy="335280"/>
+            </a:xfrm>
+            <a:prstGeom prst="rect">
+              <a:avLst/>
+            </a:prstGeom>
+            <a:noFill/>
+            <a:ln>
+              <a:noFill/>
+            </a:ln>
+          </p:spPr>
+          <p:txBody>
+            <a:bodyPr wrap="none" lIns="0" tIns="31433" rIns="0" bIns="0" anchor="t" anchorCtr="0">
+              <a:noAutofit/>
+            </a:bodyPr>
+            <a:lstStyle/>
+            <a:p>
+              <a:pPr algn="l"/>
+              <a:r>
+                <a:rPr lang="zh-TW" sz="1650" dirty="0">
+                  <a:solidFill>
+                    <a:srgbClr val="58616B"/>
+                  </a:solidFill>
+                  <a:latin typeface="Microsoft JhengHei"/>
+                  <a:ea typeface="Microsoft JhengHei"/>
+                  <a:cs typeface="Microsoft JhengHei"/>
+                </a:rPr>
+                <a:t>目前限制</a:t>
+              </a:r>
+            </a:p>
+          </p:txBody>
+        </p:sp>
+        <p:sp>
+          <p:nvSpPr>
+            <p:cNvPr id="19" name="TextBox 19"/>
+            <p:cNvSpPr txBox="1"/>
+            <p:nvPr/>
+          </p:nvSpPr>
+          <p:spPr>
+            <a:xfrm>
+              <a:off x="4305300" y="3248025"/>
+              <a:ext cx="3238500" cy="777240"/>
+            </a:xfrm>
+            <a:prstGeom prst="rect">
+              <a:avLst/>
+            </a:prstGeom>
+            <a:noFill/>
+            <a:ln>
+              <a:noFill/>
+            </a:ln>
+          </p:spPr>
+          <p:txBody>
+            <a:bodyPr wrap="none" lIns="0" tIns="37147" rIns="0" bIns="0" anchor="t" anchorCtr="0">
+              <a:noAutofit/>
+            </a:bodyPr>
+            <a:lstStyle/>
+            <a:p>
+              <a:pPr algn="l">
+                <a:lnSpc>
+                  <a:spcPts val="3000"/>
+                </a:lnSpc>
+              </a:pPr>
+              <a:r>
+                <a:rPr lang="zh-TW" sz="1950" dirty="0">
+                  <a:solidFill>
+                    <a:srgbClr val="18344A"/>
+                  </a:solidFill>
+                  <a:latin typeface="Microsoft JhengHei"/>
+                  <a:ea typeface="Microsoft JhengHei"/>
+                  <a:cs typeface="Microsoft JhengHei"/>
+                </a:rPr>
+                <a:t>回測中的分組差異</a:t>
+              </a:r>
+              <a:br/>
+              <a:r>
+                <a:rPr lang="zh-TW" sz="1950" dirty="0">
+                  <a:solidFill>
+                    <a:srgbClr val="18344A"/>
+                  </a:solidFill>
+                  <a:latin typeface="Microsoft JhengHei"/>
+                  <a:ea typeface="Microsoft JhengHei"/>
+                  <a:cs typeface="Microsoft JhengHei"/>
+                </a:rPr>
+                <a:t>目前尚不明顯</a:t>
+              </a:r>
+            </a:p>
+          </p:txBody>
+        </p:sp>
+        <p:sp>
+          <p:nvSpPr>
+            <p:cNvPr id="20" name="TextBox 20"/>
+            <p:cNvSpPr txBox="1"/>
+            <p:nvPr/>
+          </p:nvSpPr>
+          <p:spPr>
+            <a:xfrm>
+              <a:off x="4305300" y="4152900"/>
+              <a:ext cx="3238500" cy="335280"/>
+            </a:xfrm>
+            <a:prstGeom prst="rect">
+              <a:avLst/>
+            </a:prstGeom>
+            <a:noFill/>
+            <a:ln>
+              <a:noFill/>
+            </a:ln>
+          </p:spPr>
+          <p:txBody>
+            <a:bodyPr wrap="none" lIns="0" tIns="31433" rIns="0" bIns="0" anchor="t" anchorCtr="0">
+              <a:noAutofit/>
+            </a:bodyPr>
+            <a:lstStyle/>
+            <a:p>
+              <a:pPr algn="l"/>
+              <a:r>
+                <a:rPr lang="zh-TW" sz="1650" dirty="0">
+                  <a:solidFill>
+                    <a:srgbClr val="B54836"/>
+                  </a:solidFill>
+                  <a:latin typeface="Microsoft JhengHei"/>
+                  <a:ea typeface="Microsoft JhengHei"/>
+                  <a:cs typeface="Microsoft JhengHei"/>
+                </a:rPr>
+                <a:t>後續方向</a:t>
+              </a:r>
+            </a:p>
+          </p:txBody>
+        </p:sp>
+        <p:sp>
+          <p:nvSpPr>
+            <p:cNvPr id="21" name="TextBox 21"/>
+            <p:cNvSpPr txBox="1"/>
+            <p:nvPr/>
+          </p:nvSpPr>
+          <p:spPr>
+            <a:xfrm>
+              <a:off x="4305300" y="4524375"/>
+              <a:ext cx="3238500" cy="777240"/>
+            </a:xfrm>
+            <a:prstGeom prst="rect">
+              <a:avLst/>
+            </a:prstGeom>
+            <a:noFill/>
+            <a:ln>
+              <a:noFill/>
+            </a:ln>
+          </p:spPr>
+          <p:txBody>
+            <a:bodyPr wrap="none" lIns="0" tIns="37147" rIns="0" bIns="0" anchor="t" anchorCtr="0">
+              <a:noAutofit/>
+            </a:bodyPr>
+            <a:lstStyle/>
+            <a:p>
+              <a:pPr algn="l">
+                <a:lnSpc>
+                  <a:spcPts val="3000"/>
+                </a:lnSpc>
+              </a:pPr>
+              <a:r>
+                <a:rPr lang="zh-TW" sz="1950" dirty="0">
+                  <a:solidFill>
+                    <a:srgbClr val="18344A"/>
+                  </a:solidFill>
+                  <a:latin typeface="Microsoft JhengHei"/>
+                  <a:ea typeface="Microsoft JhengHei"/>
+                  <a:cs typeface="Microsoft JhengHei"/>
+                </a:rPr>
+                <a:t>納入更多賽季資料</a:t>
+              </a:r>
+              <a:br/>
+              <a:r>
+                <a:rPr lang="zh-TW" sz="1950" dirty="0">
+                  <a:solidFill>
+                    <a:srgbClr val="18344A"/>
+                  </a:solidFill>
+                  <a:latin typeface="Microsoft JhengHei"/>
+                  <a:ea typeface="Microsoft JhengHei"/>
+                  <a:cs typeface="Microsoft JhengHei"/>
+                </a:rPr>
+                <a:t>重跑時間切分回測</a:t>
+              </a:r>
+            </a:p>
+          </p:txBody>
+        </p:sp>
+      </p:grpSp>
+      <p:grpSp>
+        <p:nvGrpSpPr>
+          <p:cNvPr id="30" name="fatigue"/>
+          <p:cNvGrpSpPr/>
+          <p:nvPr/>
+        </p:nvGrpSpPr>
+        <p:grpSpPr>
+          <a:xfrm>
+            <a:off x="8001000" y="1771650"/>
+            <a:ext cx="3581400" cy="3529965"/>
+            <a:chOff x="8001000" y="1771650"/>
+            <a:chExt cx="3581400" cy="3529965"/>
+          </a:xfrm>
+        </p:grpSpPr>
+        <p:sp>
+          <p:nvSpPr>
+            <p:cNvPr id="23" name="TextBox 23"/>
+            <p:cNvSpPr txBox="1"/>
+            <p:nvPr/>
+          </p:nvSpPr>
+          <p:spPr>
+            <a:xfrm>
+              <a:off x="8001000" y="1771650"/>
+              <a:ext cx="3581400" cy="335280"/>
+            </a:xfrm>
+            <a:prstGeom prst="rect">
+              <a:avLst/>
+            </a:prstGeom>
+            <a:noFill/>
+            <a:ln>
+              <a:noFill/>
+            </a:ln>
+          </p:spPr>
+          <p:txBody>
+            <a:bodyPr wrap="none" lIns="0" tIns="31433" rIns="0" bIns="0" anchor="t" anchorCtr="0">
+              <a:noAutofit/>
+            </a:bodyPr>
+            <a:lstStyle/>
+            <a:p>
+              <a:pPr algn="l"/>
+              <a:r>
+                <a:rPr lang="zh-TW" sz="1650" dirty="0">
+                  <a:solidFill>
+                    <a:srgbClr val="B54836"/>
+                  </a:solidFill>
+                  <a:latin typeface="Microsoft JhengHei"/>
+                  <a:ea typeface="Microsoft JhengHei"/>
+                  <a:cs typeface="Microsoft JhengHei"/>
+                </a:rPr>
+                <a:t>03</a:t>
+              </a:r>
+            </a:p>
+          </p:txBody>
+        </p:sp>
+        <p:sp>
+          <p:nvSpPr>
+            <p:cNvPr id="24" name="TextBox 24"/>
+            <p:cNvSpPr txBox="1"/>
+            <p:nvPr/>
+          </p:nvSpPr>
+          <p:spPr>
+            <a:xfrm>
+              <a:off x="8001000" y="2200275"/>
+              <a:ext cx="3581400" cy="487680"/>
+            </a:xfrm>
+            <a:prstGeom prst="rect">
+              <a:avLst/>
+            </a:prstGeom>
+            <a:noFill/>
+            <a:ln>
+              <a:noFill/>
+            </a:ln>
+          </p:spPr>
+          <p:txBody>
+            <a:bodyPr wrap="none" lIns="0" tIns="45720" rIns="0" bIns="0" anchor="t" anchorCtr="0">
+              <a:noAutofit/>
+            </a:bodyPr>
+            <a:lstStyle/>
+            <a:p>
+              <a:pPr algn="l"/>
+              <a:r>
+                <a:rPr lang="zh-TW" sz="2400" b="1" dirty="0">
+                  <a:solidFill>
+                    <a:srgbClr val="18344A"/>
+                  </a:solidFill>
+                  <a:latin typeface="Microsoft JhengHei"/>
+                  <a:ea typeface="Microsoft JhengHei"/>
+                  <a:cs typeface="Microsoft JhengHei"/>
+                </a:rPr>
+                <a:t>疲勞與近況</a:t>
+              </a:r>
+            </a:p>
+          </p:txBody>
+        </p:sp>
+        <p:sp>
+          <p:nvSpPr>
+            <p:cNvPr id="25" name="TextBox 25"/>
+            <p:cNvSpPr txBox="1"/>
+            <p:nvPr/>
+          </p:nvSpPr>
+          <p:spPr>
+            <a:xfrm>
+              <a:off x="8001000" y="2876550"/>
+              <a:ext cx="3581400" cy="335280"/>
+            </a:xfrm>
+            <a:prstGeom prst="rect">
+              <a:avLst/>
+            </a:prstGeom>
+            <a:noFill/>
+            <a:ln>
+              <a:noFill/>
+            </a:ln>
+          </p:spPr>
+          <p:txBody>
+            <a:bodyPr wrap="none" lIns="0" tIns="31433" rIns="0" bIns="0" anchor="t" anchorCtr="0">
+              <a:noAutofit/>
+            </a:bodyPr>
+            <a:lstStyle/>
+            <a:p>
+              <a:pPr algn="l"/>
+              <a:r>
+                <a:rPr lang="zh-TW" sz="1650" dirty="0">
+                  <a:solidFill>
+                    <a:srgbClr val="58616B"/>
+                  </a:solidFill>
+                  <a:latin typeface="Microsoft JhengHei"/>
+                  <a:ea typeface="Microsoft JhengHei"/>
+                  <a:cs typeface="Microsoft JhengHei"/>
+                </a:rPr>
+                <a:t>目前限制</a:t>
+              </a:r>
+            </a:p>
+          </p:txBody>
+        </p:sp>
+        <p:sp>
+          <p:nvSpPr>
+            <p:cNvPr id="27" name="TextBox 27"/>
+            <p:cNvSpPr txBox="1"/>
+            <p:nvPr/>
+          </p:nvSpPr>
+          <p:spPr>
+            <a:xfrm>
+              <a:off x="8001000" y="3248025"/>
+              <a:ext cx="3581400" cy="777240"/>
+            </a:xfrm>
+            <a:prstGeom prst="rect">
+              <a:avLst/>
+            </a:prstGeom>
+            <a:noFill/>
+            <a:ln>
+              <a:noFill/>
+            </a:ln>
+          </p:spPr>
+          <p:txBody>
+            <a:bodyPr wrap="none" lIns="0" tIns="37147" rIns="0" bIns="0" anchor="t" anchorCtr="0">
+              <a:noAutofit/>
+            </a:bodyPr>
+            <a:lstStyle/>
+            <a:p>
+              <a:pPr algn="l">
+                <a:lnSpc>
+                  <a:spcPts val="3000"/>
+                </a:lnSpc>
+              </a:pPr>
+              <a:r>
+                <a:rPr lang="zh-TW" sz="1950" dirty="0">
+                  <a:solidFill>
+                    <a:srgbClr val="18344A"/>
+                  </a:solidFill>
+                  <a:latin typeface="Microsoft JhengHei"/>
+                  <a:ea typeface="Microsoft JhengHei"/>
+                  <a:cs typeface="Microsoft JhengHei"/>
+                </a:rPr>
+                <a:t>跨日疲勞與近況效果</a:t>
+              </a:r>
+              <a:br/>
+              <a:r>
+                <a:rPr lang="zh-TW" sz="1950" dirty="0">
+                  <a:solidFill>
+                    <a:srgbClr val="18344A"/>
+                  </a:solidFill>
+                  <a:latin typeface="Microsoft JhengHei"/>
+                  <a:ea typeface="Microsoft JhengHei"/>
+                  <a:cs typeface="Microsoft JhengHei"/>
+                </a:rPr>
+                <a:t>仍缺穩定的驗證證據</a:t>
+              </a:r>
+            </a:p>
+          </p:txBody>
+        </p:sp>
+        <p:sp>
+          <p:nvSpPr>
+            <p:cNvPr id="28" name="TextBox 28"/>
+            <p:cNvSpPr txBox="1"/>
+            <p:nvPr/>
+          </p:nvSpPr>
+          <p:spPr>
+            <a:xfrm>
+              <a:off x="8001000" y="4152900"/>
+              <a:ext cx="3581400" cy="335280"/>
+            </a:xfrm>
+            <a:prstGeom prst="rect">
+              <a:avLst/>
+            </a:prstGeom>
+            <a:noFill/>
+            <a:ln>
+              <a:noFill/>
+            </a:ln>
+          </p:spPr>
+          <p:txBody>
+            <a:bodyPr wrap="none" lIns="0" tIns="31433" rIns="0" bIns="0" anchor="t" anchorCtr="0">
+              <a:noAutofit/>
+            </a:bodyPr>
+            <a:lstStyle/>
+            <a:p>
+              <a:pPr algn="l"/>
+              <a:r>
+                <a:rPr lang="zh-TW" sz="1650" dirty="0">
+                  <a:solidFill>
+                    <a:srgbClr val="B54836"/>
+                  </a:solidFill>
+                  <a:latin typeface="Microsoft JhengHei"/>
+                  <a:ea typeface="Microsoft JhengHei"/>
+                  <a:cs typeface="Microsoft JhengHei"/>
+                </a:rPr>
+                <a:t>後續方向</a:t>
+              </a:r>
+            </a:p>
+          </p:txBody>
+        </p:sp>
+        <p:sp>
+          <p:nvSpPr>
+            <p:cNvPr id="29" name="TextBox 29"/>
+            <p:cNvSpPr txBox="1"/>
+            <p:nvPr/>
+          </p:nvSpPr>
+          <p:spPr>
+            <a:xfrm>
+              <a:off x="8001000" y="4524375"/>
+              <a:ext cx="3581400" cy="777240"/>
+            </a:xfrm>
+            <a:prstGeom prst="rect">
+              <a:avLst/>
+            </a:prstGeom>
+            <a:noFill/>
+            <a:ln>
+              <a:noFill/>
+            </a:ln>
+          </p:spPr>
+          <p:txBody>
+            <a:bodyPr wrap="none" lIns="0" tIns="37147" rIns="0" bIns="0" anchor="t" anchorCtr="0">
+              <a:noAutofit/>
+            </a:bodyPr>
+            <a:lstStyle/>
+            <a:p>
+              <a:pPr algn="l">
+                <a:lnSpc>
+                  <a:spcPts val="3000"/>
+                </a:lnSpc>
+              </a:pPr>
+              <a:r>
+                <a:rPr lang="zh-TW" sz="1950" dirty="0">
+                  <a:solidFill>
+                    <a:srgbClr val="18344A"/>
+                  </a:solidFill>
+                  <a:latin typeface="Microsoft JhengHei"/>
+                  <a:ea typeface="Microsoft JhengHei"/>
+                  <a:cs typeface="Microsoft JhengHei"/>
+                </a:rPr>
+                <a:t>累積球數、休息資料</a:t>
+              </a:r>
+              <a:br/>
+              <a:r>
+                <a:rPr lang="zh-TW" sz="1950" dirty="0">
+                  <a:solidFill>
+                    <a:srgbClr val="18344A"/>
+                  </a:solidFill>
+                  <a:latin typeface="Microsoft JhengHei"/>
+                  <a:ea typeface="Microsoft JhengHei"/>
+                  <a:cs typeface="Microsoft JhengHei"/>
+                </a:rPr>
+                <a:t>檢驗不同設定的影響</a:t>
+              </a:r>
+            </a:p>
+          </p:txBody>
+        </p:sp>
+      </p:grpSp>
+      <p:grpSp>
+        <p:nvGrpSpPr>
+          <p:cNvPr id="33" name="future-process"/>
+          <p:cNvGrpSpPr/>
+          <p:nvPr/>
+        </p:nvGrpSpPr>
+        <p:grpSpPr>
+          <a:xfrm>
+            <a:off x="609600" y="5476875"/>
+            <a:ext cx="10972800" cy="849630"/>
+            <a:chOff x="609600" y="5476875"/>
+            <a:chExt cx="10972800" cy="849630"/>
+          </a:xfrm>
+        </p:grpSpPr>
+        <p:sp>
+          <p:nvSpPr>
+            <p:cNvPr id="31" name="TextBox 31"/>
+            <p:cNvSpPr txBox="1"/>
+            <p:nvPr/>
+          </p:nvSpPr>
+          <p:spPr>
+            <a:xfrm>
+              <a:off x="609600" y="5476875"/>
+              <a:ext cx="10972800" cy="426720"/>
+            </a:xfrm>
+            <a:prstGeom prst="rect">
+              <a:avLst/>
+            </a:prstGeom>
+            <a:noFill/>
+            <a:ln>
+              <a:noFill/>
+            </a:ln>
+          </p:spPr>
+          <p:txBody>
+            <a:bodyPr wrap="none" lIns="0" tIns="40005" rIns="0" bIns="0" anchor="t" anchorCtr="0">
+              <a:noAutofit/>
+            </a:bodyPr>
+            <a:lstStyle/>
+            <a:p>
+              <a:pPr algn="l"/>
+              <a:r>
+                <a:rPr lang="zh-TW" sz="2100" b="1" dirty="0">
+                  <a:solidFill>
+                    <a:srgbClr val="18344A"/>
+                  </a:solidFill>
+                  <a:latin typeface="Microsoft JhengHei"/>
+                  <a:ea typeface="Microsoft JhengHei"/>
+                  <a:cs typeface="Microsoft JhengHei"/>
+                </a:rPr>
+                <a:t>資料更新 → 重訓與回測 → 檢視案例與適用條件</a:t>
+              </a:r>
+            </a:p>
+          </p:txBody>
+        </p:sp>
+        <p:sp>
+          <p:nvSpPr>
+            <p:cNvPr id="32" name="TextBox 32"/>
+            <p:cNvSpPr txBox="1"/>
+            <p:nvPr/>
+          </p:nvSpPr>
+          <p:spPr>
+            <a:xfrm>
+              <a:off x="609600" y="5991225"/>
+              <a:ext cx="10972800" cy="335280"/>
+            </a:xfrm>
+            <a:prstGeom prst="rect">
+              <a:avLst/>
+            </a:prstGeom>
+            <a:noFill/>
+            <a:ln>
+              <a:noFill/>
+            </a:ln>
+          </p:spPr>
+          <p:txBody>
+            <a:bodyPr wrap="none" lIns="0" tIns="31432" rIns="0" bIns="0" anchor="t" anchorCtr="0">
+              <a:noAutofit/>
+            </a:bodyPr>
+            <a:lstStyle/>
+            <a:p>
+              <a:pPr algn="l"/>
+              <a:r>
+                <a:rPr lang="zh-TW" sz="1650" dirty="0">
+                  <a:solidFill>
+                    <a:srgbClr val="58616B"/>
+                  </a:solidFill>
+                  <a:latin typeface="Microsoft JhengHei"/>
+                  <a:ea typeface="Microsoft JhengHei"/>
+                  <a:cs typeface="Microsoft JhengHei"/>
+                </a:rPr>
+                <a:t>以上為後續規劃；現場調度仍需結合實際名單、比賽狀況與教練判斷。</a:t>
+              </a:r>
+            </a:p>
+          </p:txBody>
+        </p:sp>
+      </p:grpSp>
     </p:spTree>
   </p:cSld>
   <p:clrMapOvr>
@@ -11421,7 +11380,7 @@
 </file>
 
 <file path=ppt/slides/slide4.xml><?xml version="1.0" encoding="utf-8"?>
-<p:sld xmlns:a="http://schemas.openxmlformats.org/drawingml/2006/main" xmlns:r="http://schemas.openxmlformats.org/officeDocument/2006/relationships" xmlns:p="http://schemas.openxmlformats.org/presentationml/2006/main">
+<p:sld xmlns:a="http://schemas.openxmlformats.org/drawingml/2006/main" xmlns:p="http://schemas.openxmlformats.org/presentationml/2006/main">
   <p:cSld>
     <p:bg>
       <p:bgPr>
@@ -11512,21 +11471,21 @@
         </p:nvGrpSpPr>
         <p:grpSpPr>
           <a:xfrm>
-            <a:off x="592836" y="546100"/>
+            <a:off x="592836" y="546068"/>
             <a:ext cx="5808726" cy="645414"/>
-            <a:chOff x="592836" y="546100"/>
+            <a:chOff x="592836" y="546068"/>
             <a:chExt cx="5808726" cy="645414"/>
           </a:xfrm>
         </p:grpSpPr>
         <p:sp>
           <p:nvSpPr>
             <p:cNvPr id="4" name="TextBox 4"/>
-            <p:cNvSpPr txBox="1"/>
-            <p:nvPr/>
-          </p:nvSpPr>
-          <p:spPr>
-            <a:xfrm>
-              <a:off x="592836" y="546100"/>
+            <p:cNvSpPr/>
+            <p:nvPr/>
+          </p:nvSpPr>
+          <p:spPr>
+            <a:xfrm>
+              <a:off x="592836" y="546068"/>
               <a:ext cx="5808726" cy="645414"/>
             </a:xfrm>
             <a:prstGeom prst="rect">
@@ -11538,8 +11497,8 @@
             </a:ln>
           </p:spPr>
           <p:txBody>
-            <a:bodyPr wrap="none" lIns="0" tIns="0" rIns="0" bIns="0" anchor="t" anchorCtr="0">
-              <a:spAutoFit/>
+            <a:bodyPr wrap="none" lIns="0" tIns="32" rIns="0" bIns="0" anchor="t" anchorCtr="0">
+              <a:noAutofit/>
             </a:bodyPr>
             <a:lstStyle/>
             <a:p>
@@ -11547,13 +11506,13 @@
               <a:r>
                 <a:rPr lang="zh-TW" sz="3200" b="1" dirty="0">
                   <a:solidFill>
-                    <a:schemeClr val="accent1"/>
-                  </a:solidFill>
-                  <a:latin typeface="+mn-lt"/>
-                  <a:ea typeface="+mn-ea"/>
-                  <a:cs typeface="+mn-cs"/>
-                </a:rPr>
-                <a:t>八局落後一分，現在該換代打嗎？</a:t>
+                    <a:srgbClr val="18344A"/>
+                  </a:solidFill>
+                  <a:latin typeface="Arial"/>
+                  <a:ea typeface="Microsoft JhengHei"/>
+                  <a:cs typeface="Arial"/>
+                </a:rPr>
+                <a:t>八局落後一分，代打能改變多少？</a:t>
               </a:r>
             </a:p>
           </p:txBody>
@@ -11931,21 +11890,21 @@
         </p:nvGrpSpPr>
         <p:grpSpPr>
           <a:xfrm>
-            <a:off x="597408" y="5518150"/>
+            <a:off x="597408" y="5518118"/>
             <a:ext cx="6809232" cy="469392"/>
-            <a:chOff x="597408" y="5518150"/>
+            <a:chOff x="597408" y="5518118"/>
             <a:chExt cx="6809232" cy="469392"/>
           </a:xfrm>
         </p:grpSpPr>
         <p:sp>
           <p:nvSpPr>
             <p:cNvPr id="18" name="TextBox 18"/>
-            <p:cNvSpPr txBox="1"/>
-            <p:nvPr/>
-          </p:nvSpPr>
-          <p:spPr>
-            <a:xfrm>
-              <a:off x="597408" y="5518150"/>
+            <p:cNvSpPr/>
+            <p:nvPr/>
+          </p:nvSpPr>
+          <p:spPr>
+            <a:xfrm>
+              <a:off x="597408" y="5518118"/>
               <a:ext cx="6809232" cy="469392"/>
             </a:xfrm>
             <a:prstGeom prst="rect">
@@ -11957,26 +11916,22 @@
             </a:ln>
           </p:spPr>
           <p:txBody>
-            <a:bodyPr wrap="none" lIns="0" tIns="0" rIns="0" bIns="0" anchor="t" anchorCtr="0">
-              <a:spAutoFit/>
-            </a:bodyPr>
-            <a:lstStyle/>
-            <a:p>
-              <a:pPr algn="l">
-                <a:lnSpc>
-                  <a:spcPct val="150000"/>
-                </a:lnSpc>
-              </a:pPr>
+            <a:bodyPr wrap="none" lIns="0" tIns="101632" rIns="0" bIns="0" anchor="t" anchorCtr="0">
+              <a:noAutofit/>
+            </a:bodyPr>
+            <a:lstStyle/>
+            <a:p>
+              <a:pPr algn="l"/>
               <a:r>
                 <a:rPr lang="zh-TW" sz="2000" dirty="0">
                   <a:solidFill>
-                    <a:schemeClr val="accent1"/>
-                  </a:solidFill>
-                  <a:latin typeface="+mn-lt"/>
-                  <a:ea typeface="+mn-ea"/>
-                  <a:cs typeface="+mn-cs"/>
-                </a:rPr>
-                <a:t>代打優勢，要連同局勢與守備安排一起評估。</a:t>
+                    <a:srgbClr val="18344A"/>
+                  </a:solidFill>
+                  <a:latin typeface="Arial"/>
+                  <a:ea typeface="Microsoft JhengHei"/>
+                  <a:cs typeface="Arial"/>
+                </a:rPr>
+                <a:t>比較打擊差距，也確認代打後的守備安排。</a:t>
               </a:r>
             </a:p>
           </p:txBody>
@@ -13087,7 +13042,7 @@
 </file>
 
 <file path=ppt/slides/slide7.xml><?xml version="1.0" encoding="utf-8"?>
-<p:sld xmlns:a="http://schemas.openxmlformats.org/drawingml/2006/main" xmlns:r="http://schemas.openxmlformats.org/officeDocument/2006/relationships" xmlns:p="http://schemas.openxmlformats.org/presentationml/2006/main">
+<p:sld xmlns:a="http://schemas.openxmlformats.org/drawingml/2006/main" xmlns:p="http://schemas.openxmlformats.org/presentationml/2006/main" xmlns:r="http://schemas.openxmlformats.org/officeDocument/2006/relationships">
   <p:cSld>
     <p:bg>
       <p:bgPr>
@@ -13838,21 +13793,21 @@
         </p:nvGrpSpPr>
         <p:grpSpPr>
           <a:xfrm>
-            <a:off x="601218" y="5816600"/>
+            <a:off x="601218" y="5816632"/>
             <a:ext cx="3570732" cy="322707"/>
-            <a:chOff x="601218" y="5816600"/>
+            <a:chOff x="601218" y="5816632"/>
             <a:chExt cx="3570732" cy="322707"/>
           </a:xfrm>
         </p:grpSpPr>
         <p:sp>
           <p:nvSpPr>
             <p:cNvPr id="23" name="TextBox 23"/>
-            <p:cNvSpPr txBox="1"/>
-            <p:nvPr/>
-          </p:nvSpPr>
-          <p:spPr>
-            <a:xfrm>
-              <a:off x="601218" y="5816600"/>
+            <p:cNvSpPr/>
+            <p:nvPr/>
+          </p:nvSpPr>
+          <p:spPr>
+            <a:xfrm>
+              <a:off x="601218" y="5816632"/>
               <a:ext cx="3570732" cy="322707"/>
             </a:xfrm>
             <a:prstGeom prst="rect">
@@ -13864,26 +13819,22 @@
             </a:ln>
           </p:spPr>
           <p:txBody>
-            <a:bodyPr wrap="none" lIns="0" tIns="0" rIns="0" bIns="0" anchor="t" anchorCtr="0">
-              <a:spAutoFit/>
-            </a:bodyPr>
-            <a:lstStyle/>
-            <a:p>
-              <a:pPr algn="l">
-                <a:lnSpc>
-                  <a:spcPct val="150000"/>
-                </a:lnSpc>
-              </a:pPr>
+            <a:bodyPr wrap="none" lIns="0" tIns="76168" rIns="0" bIns="0" anchor="t" anchorCtr="0">
+              <a:noAutofit/>
+            </a:bodyPr>
+            <a:lstStyle/>
+            <a:p>
+              <a:pPr algn="l"/>
               <a:r>
                 <a:rPr lang="zh-TW" sz="1600" dirty="0">
                   <a:solidFill>
-                    <a:schemeClr val="accent5"/>
-                  </a:solidFill>
-                  <a:latin typeface="+mn-lt"/>
-                  <a:ea typeface="+mn-ea"/>
-                  <a:cs typeface="+mn-cs"/>
-                </a:rPr>
-                <a:t>球路八格（4 類球種 × 高中／低）與兩模型權重由本專案設定。</a:t>
+                    <a:srgbClr val="58616B"/>
+                  </a:solidFill>
+                  <a:latin typeface="Arial"/>
+                  <a:ea typeface="Microsoft JhengHei"/>
+                  <a:cs typeface="Arial"/>
+                </a:rPr>
+                <a:t>球路八格＝4 類球種 × 2 個高度區間；模型權重由本專案設定。</a:t>
               </a:r>
             </a:p>
           </p:txBody>
@@ -13938,7 +13889,7 @@
 </file>
 
 <file path=ppt/slides/slide8.xml><?xml version="1.0" encoding="utf-8"?>
-<p:sld xmlns:a="http://schemas.openxmlformats.org/drawingml/2006/main" xmlns:r="http://schemas.openxmlformats.org/officeDocument/2006/relationships" xmlns:p="http://schemas.openxmlformats.org/presentationml/2006/main">
+<p:sld xmlns:a="http://schemas.openxmlformats.org/drawingml/2006/main" xmlns:p="http://schemas.openxmlformats.org/presentationml/2006/main">
   <p:cSld>
     <p:bg>
       <p:bgPr>
@@ -14084,21 +14035,21 @@
         </p:nvGrpSpPr>
         <p:grpSpPr>
           <a:xfrm>
-            <a:off x="590550" y="1758950"/>
-            <a:ext cx="2753106" cy="3086481"/>
-            <a:chOff x="590550" y="1758950"/>
-            <a:chExt cx="2753106" cy="3086481"/>
+            <a:off x="590550" y="1758982"/>
+            <a:ext cx="2753106" cy="3086449"/>
+            <a:chOff x="590550" y="1758982"/>
+            <a:chExt cx="2753106" cy="3086449"/>
           </a:xfrm>
         </p:grpSpPr>
         <p:sp>
           <p:nvSpPr>
             <p:cNvPr id="7" name="TextBox 7"/>
-            <p:cNvSpPr txBox="1"/>
-            <p:nvPr/>
-          </p:nvSpPr>
-          <p:spPr>
-            <a:xfrm>
-              <a:off x="601218" y="1758950"/>
+            <p:cNvSpPr/>
+            <p:nvPr/>
+          </p:nvSpPr>
+          <p:spPr>
+            <a:xfrm>
+              <a:off x="601218" y="1758982"/>
               <a:ext cx="2015871" cy="322707"/>
             </a:xfrm>
             <a:prstGeom prst="rect">
@@ -14110,26 +14061,22 @@
             </a:ln>
           </p:spPr>
           <p:txBody>
-            <a:bodyPr wrap="none" lIns="0" tIns="0" rIns="0" bIns="0" anchor="t" anchorCtr="0">
-              <a:spAutoFit/>
-            </a:bodyPr>
-            <a:lstStyle/>
-            <a:p>
-              <a:pPr algn="l">
-                <a:lnSpc>
-                  <a:spcPct val="150000"/>
-                </a:lnSpc>
-              </a:pPr>
+            <a:bodyPr wrap="none" lIns="0" tIns="76168" rIns="0" bIns="0" anchor="t" anchorCtr="0">
+              <a:noAutofit/>
+            </a:bodyPr>
+            <a:lstStyle/>
+            <a:p>
+              <a:pPr algn="l"/>
               <a:r>
                 <a:rPr lang="zh-TW" sz="1600" dirty="0">
                   <a:solidFill>
-                    <a:schemeClr val="accent2"/>
-                  </a:solidFill>
-                  <a:latin typeface="+mn-lt"/>
-                  <a:ea typeface="+mn-ea"/>
-                  <a:cs typeface="+mn-cs"/>
-                </a:rPr>
-                <a:t>誰的相對位置較高？</a:t>
+                    <a:srgbClr val="B54836"/>
+                  </a:solidFill>
+                  <a:latin typeface="Arial"/>
+                  <a:ea typeface="Microsoft JhengHei"/>
+                  <a:cs typeface="Arial"/>
+                </a:rPr>
+                <a:t>誰的相對評分較高？</a:t>
               </a:r>
             </a:p>
           </p:txBody>
@@ -14588,21 +14535,21 @@
         </p:nvGrpSpPr>
         <p:grpSpPr>
           <a:xfrm>
-            <a:off x="7984236" y="1758950"/>
-            <a:ext cx="2503170" cy="3086481"/>
-            <a:chOff x="7984236" y="1758950"/>
-            <a:chExt cx="2503170" cy="3086481"/>
+            <a:off x="7984236" y="1758982"/>
+            <a:ext cx="2503170" cy="3086449"/>
+            <a:chOff x="7984236" y="1758982"/>
+            <a:chExt cx="2503170" cy="3086449"/>
           </a:xfrm>
         </p:grpSpPr>
         <p:sp>
           <p:nvSpPr>
             <p:cNvPr id="19" name="TextBox 19"/>
-            <p:cNvSpPr txBox="1"/>
-            <p:nvPr/>
-          </p:nvSpPr>
-          <p:spPr>
-            <a:xfrm>
-              <a:off x="7992618" y="1758950"/>
+            <p:cNvSpPr/>
+            <p:nvPr/>
+          </p:nvSpPr>
+          <p:spPr>
+            <a:xfrm>
+              <a:off x="7992618" y="1758982"/>
               <a:ext cx="1793748" cy="322707"/>
             </a:xfrm>
             <a:prstGeom prst="rect">
@@ -14614,26 +14561,22 @@
             </a:ln>
           </p:spPr>
           <p:txBody>
-            <a:bodyPr wrap="none" lIns="0" tIns="0" rIns="0" bIns="0" anchor="t" anchorCtr="0">
-              <a:spAutoFit/>
-            </a:bodyPr>
-            <a:lstStyle/>
-            <a:p>
-              <a:pPr algn="l">
-                <a:lnSpc>
-                  <a:spcPct val="150000"/>
-                </a:lnSpc>
-              </a:pPr>
+            <a:bodyPr wrap="none" lIns="0" tIns="76168" rIns="0" bIns="0" anchor="t" anchorCtr="0">
+              <a:noAutofit/>
+            </a:bodyPr>
+            <a:lstStyle/>
+            <a:p>
+              <a:pPr algn="l"/>
               <a:r>
                 <a:rPr lang="zh-TW" sz="1600" dirty="0">
                   <a:solidFill>
-                    <a:schemeClr val="accent2"/>
-                  </a:solidFill>
-                  <a:latin typeface="+mn-lt"/>
-                  <a:ea typeface="+mn-ea"/>
-                  <a:cs typeface="+mn-cs"/>
-                </a:rPr>
-                <a:t>估計有多不確定？</a:t>
+                    <a:srgbClr val="B54836"/>
+                  </a:solidFill>
+                  <a:latin typeface="Arial"/>
+                  <a:ea typeface="Microsoft JhengHei"/>
+                  <a:cs typeface="Arial"/>
+                </a:rPr>
+                <a:t>如何解讀估計誤差？</a:t>
               </a:r>
             </a:p>
           </p:txBody>
@@ -14984,7 +14927,7 @@
 </file>
 
 <file path=ppt/slides/slide9.xml><?xml version="1.0" encoding="utf-8"?>
-<p:sld xmlns:a="http://schemas.openxmlformats.org/drawingml/2006/main" xmlns:r="http://schemas.openxmlformats.org/officeDocument/2006/relationships" xmlns:p="http://schemas.openxmlformats.org/presentationml/2006/main">
+<p:sld xmlns:a="http://schemas.openxmlformats.org/drawingml/2006/main" xmlns:p="http://schemas.openxmlformats.org/presentationml/2006/main">
   <p:cSld>
     <p:bg>
       <p:bgPr>
@@ -15075,21 +15018,21 @@
         </p:nvGrpSpPr>
         <p:grpSpPr>
           <a:xfrm>
-            <a:off x="592836" y="546100"/>
+            <a:off x="592836" y="546068"/>
             <a:ext cx="6697218" cy="645414"/>
-            <a:chOff x="592836" y="546100"/>
+            <a:chOff x="592836" y="546068"/>
             <a:chExt cx="6697218" cy="645414"/>
           </a:xfrm>
         </p:grpSpPr>
         <p:sp>
           <p:nvSpPr>
             <p:cNvPr id="4" name="TextBox 4"/>
-            <p:cNvSpPr txBox="1"/>
-            <p:nvPr/>
-          </p:nvSpPr>
-          <p:spPr>
-            <a:xfrm>
-              <a:off x="592836" y="546100"/>
+            <p:cNvSpPr/>
+            <p:nvPr/>
+          </p:nvSpPr>
+          <p:spPr>
+            <a:xfrm>
+              <a:off x="592836" y="546068"/>
               <a:ext cx="6697218" cy="645414"/>
             </a:xfrm>
             <a:prstGeom prst="rect">
@@ -15101,8 +15044,8 @@
             </a:ln>
           </p:spPr>
           <p:txBody>
-            <a:bodyPr wrap="none" lIns="0" tIns="0" rIns="0" bIns="0" anchor="t" anchorCtr="0">
-              <a:spAutoFit/>
+            <a:bodyPr wrap="none" lIns="0" tIns="32" rIns="0" bIns="0" anchor="t" anchorCtr="0">
+              <a:noAutofit/>
             </a:bodyPr>
             <a:lstStyle/>
             <a:p>
@@ -15110,872 +15053,13 @@
               <a:r>
                 <a:rPr lang="zh-TW" sz="3200" b="1" dirty="0">
                   <a:solidFill>
-                    <a:schemeClr val="accent1"/>
-                  </a:solidFill>
-                  <a:latin typeface="+mn-lt"/>
-                  <a:ea typeface="+mn-ea"/>
-                  <a:cs typeface="+mn-cs"/>
-                </a:rPr>
-                <a:t>回測：系統挑出的換投時機站得住</a:t>
-              </a:r>
-            </a:p>
-          </p:txBody>
-        </p:sp>
-      </p:grpSp>
-      <p:grpSp>
-        <p:nvGrpSpPr>
-          <p:cNvPr id="12" name="rank"/>
-          <p:cNvGrpSpPr/>
-          <p:nvPr/>
-        </p:nvGrpSpPr>
-        <p:grpSpPr>
-          <a:xfrm>
-            <a:off x="590550" y="1758950"/>
-            <a:ext cx="2753106" cy="3086481"/>
-            <a:chOff x="590550" y="1758950"/>
-            <a:chExt cx="2753106" cy="3086481"/>
-          </a:xfrm>
-        </p:grpSpPr>
-        <p:sp>
-          <p:nvSpPr>
-            <p:cNvPr id="7" name="TextBox 7"/>
-            <p:cNvSpPr txBox="1"/>
-            <p:nvPr/>
-          </p:nvSpPr>
-          <p:spPr>
-            <a:xfrm>
-              <a:off x="601218" y="1758950"/>
-              <a:ext cx="2015871" cy="322707"/>
-            </a:xfrm>
-            <a:prstGeom prst="rect">
-              <a:avLst/>
-            </a:prstGeom>
-            <a:noFill/>
-            <a:ln>
-              <a:noFill/>
-            </a:ln>
-          </p:spPr>
-          <p:txBody>
-            <a:bodyPr wrap="none" lIns="0" tIns="0" rIns="0" bIns="0" anchor="t" anchorCtr="0">
-              <a:spAutoFit/>
-            </a:bodyPr>
-            <a:lstStyle/>
-            <a:p>
-              <a:pPr algn="l">
-                <a:lnSpc>
-                  <a:spcPct val="150000"/>
-                </a:lnSpc>
-              </a:pPr>
-              <a:r>
-                <a:rPr lang="zh-TW" sz="1600" dirty="0">
-                  <a:solidFill>
-                    <a:schemeClr val="accent2"/>
-                  </a:solidFill>
-                  <a:latin typeface="+mn-lt"/>
-                  <a:ea typeface="+mn-ea"/>
-                  <a:cs typeface="+mn-cs"/>
-                </a:rPr>
-                <a:t>回測範圍</a:t>
-              </a:r>
-            </a:p>
-          </p:txBody>
-        </p:sp>
-        <p:sp>
-          <p:nvSpPr>
-            <p:cNvPr id="8" name="TextBox 8"/>
-            <p:cNvSpPr txBox="1"/>
-            <p:nvPr/>
-          </p:nvSpPr>
-          <p:spPr>
-            <a:xfrm>
-              <a:off x="597408" y="2184400"/>
-              <a:ext cx="1316736" cy="469392"/>
-            </a:xfrm>
-            <a:prstGeom prst="rect">
-              <a:avLst/>
-            </a:prstGeom>
-            <a:noFill/>
-            <a:ln>
-              <a:noFill/>
-            </a:ln>
-          </p:spPr>
-          <p:txBody>
-            <a:bodyPr wrap="none" lIns="0" tIns="0" rIns="0" bIns="0" anchor="t" anchorCtr="0">
-              <a:spAutoFit/>
-            </a:bodyPr>
-            <a:lstStyle/>
-            <a:p>
-              <a:pPr algn="l">
-                <a:lnSpc>
-                  <a:spcPct val="150000"/>
-                </a:lnSpc>
-              </a:pPr>
-              <a:r>
-                <a:rPr lang="zh-TW" sz="2000" b="1" dirty="0">
-                  <a:solidFill>
-                    <a:schemeClr val="accent1"/>
-                  </a:solidFill>
-                  <a:latin typeface="+mn-lt"/>
-                  <a:ea typeface="+mn-ea"/>
-                  <a:cs typeface="+mn-cs"/>
-                </a:rPr>
-                <a:t>2025 決策點</a:t>
-              </a:r>
-            </a:p>
-          </p:txBody>
-        </p:sp>
-        <p:sp>
-          <p:nvSpPr>
-            <p:cNvPr id="9" name="TextBox 9"/>
-            <p:cNvSpPr txBox="1"/>
-            <p:nvPr/>
-          </p:nvSpPr>
-          <p:spPr>
-            <a:xfrm>
-              <a:off x="590550" y="2736850"/>
-              <a:ext cx="1903933" cy="933450"/>
-            </a:xfrm>
-            <a:prstGeom prst="rect">
-              <a:avLst/>
-            </a:prstGeom>
-            <a:noFill/>
-            <a:ln>
-              <a:noFill/>
-            </a:ln>
-          </p:spPr>
-          <p:txBody>
-            <a:bodyPr wrap="none" lIns="0" tIns="0" rIns="0" bIns="0" anchor="t" anchorCtr="0">
-              <a:spAutoFit/>
-            </a:bodyPr>
-            <a:lstStyle/>
-            <a:p>
-              <a:pPr algn="l"/>
-              <a:r>
-                <a:rPr lang="zh-TW" sz="4800" b="1" dirty="0">
-                  <a:solidFill>
-                    <a:schemeClr val="accent1"/>
-                  </a:solidFill>
-                  <a:latin typeface="+mn-lt"/>
-                  <a:ea typeface="+mn-ea"/>
-                  <a:cs typeface="+mn-cs"/>
-                </a:rPr>
-                <a:t>11,962</a:t>
-              </a:r>
-            </a:p>
-          </p:txBody>
-        </p:sp>
-        <p:sp>
-          <p:nvSpPr>
-            <p:cNvPr id="10" name="TextBox 10"/>
-            <p:cNvSpPr txBox="1"/>
-            <p:nvPr/>
-          </p:nvSpPr>
-          <p:spPr>
-            <a:xfrm>
-              <a:off x="599694" y="3651250"/>
-              <a:ext cx="2743962" cy="762381"/>
-            </a:xfrm>
-            <a:prstGeom prst="rect">
-              <a:avLst/>
-            </a:prstGeom>
-            <a:noFill/>
-            <a:ln>
-              <a:noFill/>
-            </a:ln>
-          </p:spPr>
-          <p:txBody>
-            <a:bodyPr wrap="none" lIns="0" tIns="0" rIns="0" bIns="0" anchor="t" anchorCtr="0">
-              <a:spAutoFit/>
-            </a:bodyPr>
-            <a:lstStyle/>
-            <a:p>
-              <a:pPr algn="l">
-                <a:lnSpc>
-                  <a:spcPct val="150000"/>
-                </a:lnSpc>
-              </a:pPr>
-              <a:r>
-                <a:rPr lang="zh-TW" sz="1800" dirty="0">
-                  <a:solidFill>
-                    <a:schemeClr val="accent1"/>
-                  </a:solidFill>
-                  <a:latin typeface="+mn-lt"/>
-                  <a:ea typeface="+mn-ea"/>
-                  <a:cs typeface="+mn-cs"/>
-                </a:rPr>
-                <a:t>例行賽 6 局以後</a:t>
-              </a:r>
-              <a:br>
-                <a:rPr lang="zh-TW" sz="1950" dirty="0">
-                  <a:solidFill>
-                    <a:schemeClr val="accent1"/>
-                  </a:solidFill>
-                  <a:latin typeface="+mn-lt"/>
-                  <a:ea typeface="+mn-ea"/>
-                  <a:cs typeface="+mn-cs"/>
-                </a:rPr>
-              </a:br>
-              <a:r>
-                <a:rPr lang="zh-TW" sz="1800" dirty="0">
-                  <a:solidFill>
-                    <a:schemeClr val="accent1"/>
-                  </a:solidFill>
-                  <a:latin typeface="+mn-lt"/>
-                  <a:ea typeface="+mn-ea"/>
-                  <a:cs typeface="+mn-cs"/>
-                </a:rPr>
-                <a:t>每個打席開始前模擬一次</a:t>
-              </a:r>
-            </a:p>
-          </p:txBody>
-        </p:sp>
-        <p:sp>
-          <p:nvSpPr>
-            <p:cNvPr id="11" name="TextBox 11"/>
-            <p:cNvSpPr txBox="1"/>
-            <p:nvPr/>
-          </p:nvSpPr>
-          <p:spPr>
-            <a:xfrm>
-              <a:off x="599694" y="4464050"/>
-              <a:ext cx="2644902" cy="381381"/>
-            </a:xfrm>
-            <a:prstGeom prst="rect">
-              <a:avLst/>
-            </a:prstGeom>
-            <a:noFill/>
-            <a:ln>
-              <a:noFill/>
-            </a:ln>
-          </p:spPr>
-          <p:txBody>
-            <a:bodyPr wrap="none" lIns="0" tIns="0" rIns="0" bIns="0" anchor="t" anchorCtr="0">
-              <a:spAutoFit/>
-            </a:bodyPr>
-            <a:lstStyle/>
-            <a:p>
-              <a:pPr algn="l">
-                <a:lnSpc>
-                  <a:spcPct val="150000"/>
-                </a:lnSpc>
-              </a:pPr>
-              <a:r>
-                <a:rPr lang="zh-TW" sz="1800" dirty="0">
-                  <a:solidFill>
-                    <a:schemeClr val="accent1"/>
-                  </a:solidFill>
-                  <a:latin typeface="+mn-lt"/>
-                  <a:ea typeface="+mn-ea"/>
-                  <a:cs typeface="+mn-cs"/>
-                </a:rPr>
-                <a:t>與 2,184 次實際換投對照</a:t>
-              </a:r>
-            </a:p>
-          </p:txBody>
-        </p:sp>
-      </p:grpSp>
-      <p:grpSp>
-        <p:nvGrpSpPr>
-          <p:cNvPr id="18" name="difference"/>
-          <p:cNvGrpSpPr/>
-          <p:nvPr/>
-        </p:nvGrpSpPr>
-        <p:grpSpPr>
-          <a:xfrm>
-            <a:off x="4286250" y="1758950"/>
-            <a:ext cx="2391537" cy="3086481"/>
-            <a:chOff x="4286250" y="1758950"/>
-            <a:chExt cx="2391537" cy="3086481"/>
-          </a:xfrm>
-        </p:grpSpPr>
-        <p:sp>
-          <p:nvSpPr>
-            <p:cNvPr id="13" name="TextBox 13"/>
-            <p:cNvSpPr txBox="1"/>
-            <p:nvPr/>
-          </p:nvSpPr>
-          <p:spPr>
-            <a:xfrm>
-              <a:off x="4296918" y="1758950"/>
-              <a:ext cx="1571625" cy="322707"/>
-            </a:xfrm>
-            <a:prstGeom prst="rect">
-              <a:avLst/>
-            </a:prstGeom>
-            <a:noFill/>
-            <a:ln>
-              <a:noFill/>
-            </a:ln>
-          </p:spPr>
-          <p:txBody>
-            <a:bodyPr wrap="none" lIns="0" tIns="0" rIns="0" bIns="0" anchor="t" anchorCtr="0">
-              <a:spAutoFit/>
-            </a:bodyPr>
-            <a:lstStyle/>
-            <a:p>
-              <a:pPr algn="l">
-                <a:lnSpc>
-                  <a:spcPct val="150000"/>
-                </a:lnSpc>
-              </a:pPr>
-              <a:r>
-                <a:rPr lang="zh-TW" sz="1600" dirty="0">
-                  <a:solidFill>
-                    <a:schemeClr val="accent2"/>
-                  </a:solidFill>
-                  <a:latin typeface="+mn-lt"/>
-                  <a:ea typeface="+mn-ea"/>
-                  <a:cs typeface="+mn-cs"/>
-                </a:rPr>
-                <a:t>換投時機</a:t>
-              </a:r>
-            </a:p>
-          </p:txBody>
-        </p:sp>
-        <p:sp>
-          <p:nvSpPr>
-            <p:cNvPr id="14" name="TextBox 14"/>
-            <p:cNvSpPr txBox="1"/>
-            <p:nvPr/>
-          </p:nvSpPr>
-          <p:spPr>
-            <a:xfrm>
-              <a:off x="4293108" y="2184400"/>
-              <a:ext cx="1639824" cy="469392"/>
-            </a:xfrm>
-            <a:prstGeom prst="rect">
-              <a:avLst/>
-            </a:prstGeom>
-            <a:noFill/>
-            <a:ln>
-              <a:noFill/>
-            </a:ln>
-          </p:spPr>
-          <p:txBody>
-            <a:bodyPr wrap="none" lIns="0" tIns="0" rIns="0" bIns="0" anchor="t" anchorCtr="0">
-              <a:spAutoFit/>
-            </a:bodyPr>
-            <a:lstStyle/>
-            <a:p>
-              <a:pPr algn="l">
-                <a:lnSpc>
-                  <a:spcPct val="150000"/>
-                </a:lnSpc>
-              </a:pPr>
-              <a:r>
-                <a:rPr lang="zh-TW" sz="2000" b="1" dirty="0">
-                  <a:solidFill>
-                    <a:schemeClr val="accent1"/>
-                  </a:solidFill>
-                  <a:latin typeface="+mn-lt"/>
-                  <a:ea typeface="+mn-ea"/>
-                  <a:cs typeface="+mn-cs"/>
-                </a:rPr>
-                <a:t>續投時失分差</a:t>
-              </a:r>
-            </a:p>
-          </p:txBody>
-        </p:sp>
-        <p:sp>
-          <p:nvSpPr>
-            <p:cNvPr id="15" name="TextBox 15"/>
-            <p:cNvSpPr txBox="1"/>
-            <p:nvPr/>
-          </p:nvSpPr>
-          <p:spPr>
-            <a:xfrm>
-              <a:off x="4286250" y="2736850"/>
-              <a:ext cx="1903933" cy="933450"/>
-            </a:xfrm>
-            <a:prstGeom prst="rect">
-              <a:avLst/>
-            </a:prstGeom>
-            <a:noFill/>
-            <a:ln>
-              <a:noFill/>
-            </a:ln>
-          </p:spPr>
-          <p:txBody>
-            <a:bodyPr wrap="none" lIns="0" tIns="0" rIns="0" bIns="0" anchor="t" anchorCtr="0">
-              <a:spAutoFit/>
-            </a:bodyPr>
-            <a:lstStyle/>
-            <a:p>
-              <a:pPr algn="l"/>
-              <a:r>
-                <a:rPr lang="zh-TW" sz="4800" b="1" dirty="0">
-                  <a:solidFill>
-                    <a:srgbClr val="237A53"/>
-                  </a:solidFill>
-                  <a:latin typeface="+mn-lt"/>
-                  <a:ea typeface="+mn-ea"/>
-                  <a:cs typeface="+mn-cs"/>
-                </a:rPr>
-                <a:t>+0.043</a:t>
-              </a:r>
-            </a:p>
-          </p:txBody>
-        </p:sp>
-        <p:sp>
-          <p:nvSpPr>
-            <p:cNvPr id="16" name="TextBox 16"/>
-            <p:cNvSpPr txBox="1"/>
-            <p:nvPr/>
-          </p:nvSpPr>
-          <p:spPr>
-            <a:xfrm>
-              <a:off x="4295394" y="3651250"/>
-              <a:ext cx="1753362" cy="762381"/>
-            </a:xfrm>
-            <a:prstGeom prst="rect">
-              <a:avLst/>
-            </a:prstGeom>
-            <a:noFill/>
-            <a:ln>
-              <a:noFill/>
-            </a:ln>
-          </p:spPr>
-          <p:txBody>
-            <a:bodyPr wrap="none" lIns="0" tIns="0" rIns="0" bIns="0" anchor="t" anchorCtr="0">
-              <a:spAutoFit/>
-            </a:bodyPr>
-            <a:lstStyle/>
-            <a:p>
-              <a:pPr algn="l">
-                <a:lnSpc>
-                  <a:spcPct val="150000"/>
-                </a:lnSpc>
-              </a:pPr>
-              <a:r>
-                <a:rPr lang="zh-TW" sz="1800" dirty="0">
-                  <a:solidFill>
-                    <a:schemeClr val="accent1"/>
-                  </a:solidFill>
-                  <a:latin typeface="+mn-lt"/>
-                  <a:ea typeface="+mn-ea"/>
-                  <a:cs typeface="+mn-cs"/>
-                </a:rPr>
-                <a:t>單位：得分期望（RE24）</a:t>
-              </a:r>
-              <a:br>
-                <a:rPr lang="zh-TW" sz="1950" dirty="0">
-                  <a:solidFill>
-                    <a:schemeClr val="accent1"/>
-                  </a:solidFill>
-                  <a:latin typeface="+mn-lt"/>
-                  <a:ea typeface="+mn-ea"/>
-                  <a:cs typeface="+mn-cs"/>
-                </a:rPr>
-              </a:br>
-              <a:r>
-                <a:rPr lang="zh-TW" sz="1800" dirty="0">
-                  <a:solidFill>
-                    <a:schemeClr val="accent1"/>
-                  </a:solidFill>
-                  <a:latin typeface="+mn-lt"/>
-                  <a:ea typeface="+mn-ea"/>
-                  <a:cs typeface="+mn-cs"/>
-                </a:rPr>
-                <a:t>95% 區間 +0.017 ~ +0.068</a:t>
-              </a:r>
-            </a:p>
-          </p:txBody>
-        </p:sp>
-        <p:sp>
-          <p:nvSpPr>
-            <p:cNvPr id="17" name="TextBox 17"/>
-            <p:cNvSpPr txBox="1"/>
-            <p:nvPr/>
-          </p:nvSpPr>
-          <p:spPr>
-            <a:xfrm>
-              <a:off x="4295394" y="4464050"/>
-              <a:ext cx="2382393" cy="381381"/>
-            </a:xfrm>
-            <a:prstGeom prst="rect">
-              <a:avLst/>
-            </a:prstGeom>
-            <a:noFill/>
-            <a:ln>
-              <a:noFill/>
-            </a:ln>
-          </p:spPr>
-          <p:txBody>
-            <a:bodyPr wrap="none" lIns="0" tIns="0" rIns="0" bIns="0" anchor="t" anchorCtr="0">
-              <a:spAutoFit/>
-            </a:bodyPr>
-            <a:lstStyle/>
-            <a:p>
-              <a:pPr algn="l">
-                <a:lnSpc>
-                  <a:spcPct val="150000"/>
-                </a:lnSpc>
-              </a:pPr>
-              <a:r>
-                <a:rPr lang="zh-TW" sz="1800" dirty="0">
-                  <a:solidFill>
-                    <a:schemeClr val="accent1"/>
-                  </a:solidFill>
-                  <a:latin typeface="+mn-lt"/>
-                  <a:ea typeface="+mn-ea"/>
-                  <a:cs typeface="+mn-cs"/>
-                </a:rPr>
-                <a:t>建議換卻續投時較易失分</a:t>
-              </a:r>
-            </a:p>
-          </p:txBody>
-        </p:sp>
-      </p:grpSp>
-      <p:grpSp>
-        <p:nvGrpSpPr>
-          <p:cNvPr id="24" name="uncertainty"/>
-          <p:cNvGrpSpPr/>
-          <p:nvPr/>
-        </p:nvGrpSpPr>
-        <p:grpSpPr>
-          <a:xfrm>
-            <a:off x="7984236" y="1758950"/>
-            <a:ext cx="2503170" cy="3086481"/>
-            <a:chOff x="7984236" y="1758950"/>
-            <a:chExt cx="2503170" cy="3086481"/>
-          </a:xfrm>
-        </p:grpSpPr>
-        <p:sp>
-          <p:nvSpPr>
-            <p:cNvPr id="19" name="TextBox 19"/>
-            <p:cNvSpPr txBox="1"/>
-            <p:nvPr/>
-          </p:nvSpPr>
-          <p:spPr>
-            <a:xfrm>
-              <a:off x="7992618" y="1758950"/>
-              <a:ext cx="1793748" cy="322707"/>
-            </a:xfrm>
-            <a:prstGeom prst="rect">
-              <a:avLst/>
-            </a:prstGeom>
-            <a:noFill/>
-            <a:ln>
-              <a:noFill/>
-            </a:ln>
-          </p:spPr>
-          <p:txBody>
-            <a:bodyPr wrap="none" lIns="0" tIns="0" rIns="0" bIns="0" anchor="t" anchorCtr="0">
-              <a:spAutoFit/>
-            </a:bodyPr>
-            <a:lstStyle/>
-            <a:p>
-              <a:pPr algn="l">
-                <a:lnSpc>
-                  <a:spcPct val="150000"/>
-                </a:lnSpc>
-              </a:pPr>
-              <a:r>
-                <a:rPr lang="zh-TW" sz="1600" dirty="0">
-                  <a:solidFill>
-                    <a:schemeClr val="accent2"/>
-                  </a:solidFill>
-                  <a:latin typeface="+mn-lt"/>
-                  <a:ea typeface="+mn-ea"/>
-                  <a:cs typeface="+mn-cs"/>
-                </a:rPr>
-                <a:t>代打時機</a:t>
-              </a:r>
-            </a:p>
-          </p:txBody>
-        </p:sp>
-        <p:sp>
-          <p:nvSpPr>
-            <p:cNvPr id="20" name="TextBox 20"/>
-            <p:cNvSpPr txBox="1"/>
-            <p:nvPr/>
-          </p:nvSpPr>
-          <p:spPr>
-            <a:xfrm>
-              <a:off x="7988808" y="2184400"/>
-              <a:ext cx="993648" cy="469392"/>
-            </a:xfrm>
-            <a:prstGeom prst="rect">
-              <a:avLst/>
-            </a:prstGeom>
-            <a:noFill/>
-            <a:ln>
-              <a:noFill/>
-            </a:ln>
-          </p:spPr>
-          <p:txBody>
-            <a:bodyPr wrap="none" lIns="0" tIns="0" rIns="0" bIns="0" anchor="t" anchorCtr="0">
-              <a:spAutoFit/>
-            </a:bodyPr>
-            <a:lstStyle/>
-            <a:p>
-              <a:pPr algn="l">
-                <a:lnSpc>
-                  <a:spcPct val="150000"/>
-                </a:lnSpc>
-              </a:pPr>
-              <a:r>
-                <a:rPr lang="zh-TW" sz="2000" b="1" dirty="0">
-                  <a:solidFill>
-                    <a:schemeClr val="accent1"/>
-                  </a:solidFill>
-                  <a:latin typeface="+mn-lt"/>
-                  <a:ea typeface="+mn-ea"/>
-                  <a:cs typeface="+mn-cs"/>
-                </a:rPr>
-                <a:t>原打者得分差</a:t>
-              </a:r>
-            </a:p>
-          </p:txBody>
-        </p:sp>
-        <p:sp>
-          <p:nvSpPr>
-            <p:cNvPr id="21" name="TextBox 21"/>
-            <p:cNvSpPr txBox="1"/>
-            <p:nvPr/>
-          </p:nvSpPr>
-          <p:spPr>
-            <a:xfrm>
-              <a:off x="7984236" y="2927350"/>
-              <a:ext cx="1810512" cy="645414"/>
-            </a:xfrm>
-            <a:prstGeom prst="rect">
-              <a:avLst/>
-            </a:prstGeom>
-            <a:noFill/>
-            <a:ln>
-              <a:noFill/>
-            </a:ln>
-          </p:spPr>
-          <p:txBody>
-            <a:bodyPr wrap="none" lIns="0" tIns="0" rIns="0" bIns="0" anchor="t" anchorCtr="0">
-              <a:spAutoFit/>
-            </a:bodyPr>
-            <a:lstStyle/>
-            <a:p>
-              <a:pPr algn="l"/>
-              <a:r>
-                <a:rPr lang="zh-TW" sz="3200" b="1" dirty="0">
-                  <a:solidFill>
-                    <a:schemeClr val="accent1"/>
-                  </a:solidFill>
-                  <a:latin typeface="+mn-lt"/>
-                  <a:ea typeface="+mn-ea"/>
-                  <a:cs typeface="+mn-cs"/>
-                </a:rPr>
-                <a:t>不明顯</a:t>
-              </a:r>
-            </a:p>
-          </p:txBody>
-        </p:sp>
-        <p:sp>
-          <p:nvSpPr>
-            <p:cNvPr id="22" name="TextBox 22"/>
-            <p:cNvSpPr txBox="1"/>
-            <p:nvPr/>
-          </p:nvSpPr>
-          <p:spPr>
-            <a:xfrm>
-              <a:off x="7991094" y="3651250"/>
-              <a:ext cx="2496312" cy="762381"/>
-            </a:xfrm>
-            <a:prstGeom prst="rect">
-              <a:avLst/>
-            </a:prstGeom>
-            <a:noFill/>
-            <a:ln>
-              <a:noFill/>
-            </a:ln>
-          </p:spPr>
-          <p:txBody>
-            <a:bodyPr wrap="none" lIns="0" tIns="0" rIns="0" bIns="0" anchor="t" anchorCtr="0">
-              <a:spAutoFit/>
-            </a:bodyPr>
-            <a:lstStyle/>
-            <a:p>
-              <a:pPr algn="l">
-                <a:lnSpc>
-                  <a:spcPct val="150000"/>
-                </a:lnSpc>
-              </a:pPr>
-              <a:r>
-                <a:rPr lang="zh-TW" sz="1800" dirty="0">
-                  <a:solidFill>
-                    <a:schemeClr val="accent1"/>
-                  </a:solidFill>
-                  <a:latin typeface="+mn-lt"/>
-                  <a:ea typeface="+mn-ea"/>
-                  <a:cs typeface="+mn-cs"/>
-                </a:rPr>
-                <a:t>−0.025（95% 區間</a:t>
-              </a:r>
-              <a:br>
-                <a:rPr lang="zh-TW" sz="1950" dirty="0">
-                  <a:solidFill>
-                    <a:schemeClr val="accent1"/>
-                  </a:solidFill>
-                  <a:latin typeface="+mn-lt"/>
-                  <a:ea typeface="+mn-ea"/>
-                  <a:cs typeface="+mn-cs"/>
-                </a:rPr>
-              </a:br>
-              <a:r>
-                <a:rPr lang="zh-TW" sz="1800" dirty="0">
-                  <a:solidFill>
-                    <a:schemeClr val="accent1"/>
-                  </a:solidFill>
-                  <a:latin typeface="+mn-lt"/>
-                  <a:ea typeface="+mn-ea"/>
-                  <a:cs typeface="+mn-cs"/>
-                </a:rPr>
-                <a:t>−0.074 ~ +0.024）</a:t>
-              </a:r>
-            </a:p>
-          </p:txBody>
-        </p:sp>
-        <p:sp>
-          <p:nvSpPr>
-            <p:cNvPr id="23" name="TextBox 23"/>
-            <p:cNvSpPr txBox="1"/>
-            <p:nvPr/>
-          </p:nvSpPr>
-          <p:spPr>
-            <a:xfrm>
-              <a:off x="7991094" y="4464050"/>
-              <a:ext cx="2382393" cy="381381"/>
-            </a:xfrm>
-            <a:prstGeom prst="rect">
-              <a:avLst/>
-            </a:prstGeom>
-            <a:noFill/>
-            <a:ln>
-              <a:noFill/>
-            </a:ln>
-          </p:spPr>
-          <p:txBody>
-            <a:bodyPr wrap="none" lIns="0" tIns="0" rIns="0" bIns="0" anchor="t" anchorCtr="0">
-              <a:spAutoFit/>
-            </a:bodyPr>
-            <a:lstStyle/>
-            <a:p>
-              <a:pPr algn="l">
-                <a:lnSpc>
-                  <a:spcPct val="150000"/>
-                </a:lnSpc>
-              </a:pPr>
-              <a:r>
-                <a:rPr lang="zh-TW" sz="1800" dirty="0">
-                  <a:solidFill>
-                    <a:schemeClr val="accent1"/>
-                  </a:solidFill>
-                  <a:latin typeface="+mn-lt"/>
-                  <a:ea typeface="+mn-ea"/>
-                  <a:cs typeface="+mn-cs"/>
-                </a:rPr>
-                <a:t>網站標示「僅供參考」</a:t>
-              </a:r>
-            </a:p>
-          </p:txBody>
-        </p:sp>
-      </p:grpSp>
-      <p:grpSp>
-        <p:nvGrpSpPr>
-          <p:cNvPr id="27" name="boundaries"/>
-          <p:cNvGrpSpPr/>
-          <p:nvPr/>
-        </p:nvGrpSpPr>
-        <p:grpSpPr>
-          <a:xfrm>
-            <a:off x="598932" y="5413375"/>
-            <a:ext cx="6960394" cy="811657"/>
-            <a:chOff x="598932" y="5413375"/>
-            <a:chExt cx="6960394" cy="811657"/>
-          </a:xfrm>
-        </p:grpSpPr>
-        <p:sp>
-          <p:nvSpPr>
-            <p:cNvPr id="25" name="TextBox 25"/>
-            <p:cNvSpPr txBox="1"/>
-            <p:nvPr/>
-          </p:nvSpPr>
-          <p:spPr>
-            <a:xfrm>
-              <a:off x="598932" y="5413375"/>
-              <a:ext cx="3979164" cy="410718"/>
-            </a:xfrm>
-            <a:prstGeom prst="rect">
-              <a:avLst/>
-            </a:prstGeom>
-            <a:noFill/>
-            <a:ln>
-              <a:noFill/>
-            </a:ln>
-          </p:spPr>
-          <p:txBody>
-            <a:bodyPr wrap="none" lIns="0" tIns="0" rIns="0" bIns="0" anchor="t" anchorCtr="0">
-              <a:spAutoFit/>
-            </a:bodyPr>
-            <a:lstStyle/>
-            <a:p>
-              <a:pPr algn="l">
-                <a:lnSpc>
-                  <a:spcPct val="150000"/>
-                </a:lnSpc>
-              </a:pPr>
-              <a:r>
-                <a:rPr lang="zh-TW" sz="1800" b="1" dirty="0">
-                  <a:solidFill>
-                    <a:schemeClr val="accent1"/>
-                  </a:solidFill>
-                  <a:latin typeface="+mn-lt"/>
-                  <a:ea typeface="+mn-ea"/>
-                  <a:cs typeface="+mn-cs"/>
-                </a:rPr>
-                <a:t>只用比賽當天以前的資料，模擬「打席開始前會不會建議換人」</a:t>
-              </a:r>
-            </a:p>
-          </p:txBody>
-        </p:sp>
-        <p:sp>
-          <p:nvSpPr>
-            <p:cNvPr id="26" name="TextBox 26"/>
-            <p:cNvSpPr txBox="1"/>
-            <p:nvPr/>
-          </p:nvSpPr>
-          <p:spPr>
-            <a:xfrm>
-              <a:off x="601218" y="5902325"/>
-              <a:ext cx="6958108" cy="322707"/>
-            </a:xfrm>
-            <a:prstGeom prst="rect">
-              <a:avLst/>
-            </a:prstGeom>
-            <a:noFill/>
-            <a:ln>
-              <a:noFill/>
-            </a:ln>
-          </p:spPr>
-          <p:txBody>
-            <a:bodyPr wrap="none" lIns="0" tIns="0" rIns="0" bIns="0" anchor="t" anchorCtr="0">
-              <a:spAutoFit/>
-            </a:bodyPr>
-            <a:lstStyle/>
-            <a:p>
-              <a:pPr algn="l">
-                <a:lnSpc>
-                  <a:spcPct val="150000"/>
-                </a:lnSpc>
-              </a:pPr>
-              <a:r>
-                <a:rPr lang="zh-TW" sz="1600" dirty="0">
-                  <a:solidFill>
-                    <a:schemeClr val="accent5"/>
-                  </a:solidFill>
-                  <a:latin typeface="+mn-lt"/>
-                  <a:ea typeface="+mn-ea"/>
-                  <a:cs typeface="+mn-cs"/>
-                </a:rPr>
-                <a:t>換人後的結果無法觀測，只比較模型估計；門檻 1 百分點，只看接下來 3 棒。</a:t>
+                    <a:srgbClr val="18344A"/>
+                  </a:solidFill>
+                  <a:latin typeface="Arial"/>
+                  <a:ea typeface="Microsoft JhengHei"/>
+                  <a:cs typeface="Arial"/>
+                </a:rPr>
+                <a:t>回測：換投提示與續投風險有關聯</a:t>
               </a:r>
             </a:p>
           </p:txBody>
@@ -16021,6 +15105,803 @@
           </a:p>
         </p:txBody>
       </p:sp>
+      <p:sp>
+        <p:nvSpPr>
+          <p:cNvPr id="8" name="Rectangle 8"/>
+          <p:cNvSpPr/>
+          <p:nvPr/>
+        </p:nvSpPr>
+        <p:spPr>
+          <a:xfrm>
+            <a:off x="609600" y="1257300"/>
+            <a:ext cx="857250" cy="38100"/>
+          </a:xfrm>
+          <a:prstGeom prst="rect">
+            <a:avLst/>
+          </a:prstGeom>
+          <a:solidFill>
+            <a:srgbClr val="B54836"/>
+          </a:solidFill>
+          <a:ln>
+            <a:noFill/>
+          </a:ln>
+        </p:spPr>
+      </p:sp>
+      <p:grpSp>
+        <p:nvGrpSpPr>
+          <p:cNvPr id="11" name="backtest-scope"/>
+          <p:cNvGrpSpPr/>
+          <p:nvPr/>
+        </p:nvGrpSpPr>
+        <p:grpSpPr>
+          <a:xfrm>
+            <a:off x="609600" y="1524000"/>
+            <a:ext cx="10972800" cy="784860"/>
+            <a:chOff x="609600" y="1524000"/>
+            <a:chExt cx="10972800" cy="784860"/>
+          </a:xfrm>
+        </p:grpSpPr>
+        <p:sp>
+          <p:nvSpPr>
+            <p:cNvPr id="9" name="TextBox 9"/>
+            <p:cNvSpPr txBox="1"/>
+            <p:nvPr/>
+          </p:nvSpPr>
+          <p:spPr>
+            <a:xfrm>
+              <a:off x="609600" y="1524000"/>
+              <a:ext cx="10972800" cy="426720"/>
+            </a:xfrm>
+            <a:prstGeom prst="rect">
+              <a:avLst/>
+            </a:prstGeom>
+            <a:noFill/>
+            <a:ln>
+              <a:noFill/>
+            </a:ln>
+          </p:spPr>
+          <p:txBody>
+            <a:bodyPr wrap="none" lIns="0" tIns="40005" rIns="0" bIns="0" anchor="t" anchorCtr="0">
+              <a:noAutofit/>
+            </a:bodyPr>
+            <a:lstStyle/>
+            <a:p>
+              <a:pPr algn="l"/>
+              <a:r>
+                <a:rPr lang="zh-TW" sz="2100" b="1" dirty="0">
+                  <a:solidFill>
+                    <a:srgbClr val="18344A"/>
+                  </a:solidFill>
+                  <a:latin typeface="Microsoft JhengHei"/>
+                  <a:ea typeface="Microsoft JhengHei"/>
+                  <a:cs typeface="Microsoft JhengHei"/>
+                </a:rPr>
+                <a:t>2025 例行賽第 6 局起｜11,962 個打席決策點</a:t>
+              </a:r>
+            </a:p>
+          </p:txBody>
+        </p:sp>
+        <p:sp>
+          <p:nvSpPr>
+            <p:cNvPr id="10" name="TextBox 10"/>
+            <p:cNvSpPr txBox="1"/>
+            <p:nvPr/>
+          </p:nvSpPr>
+          <p:spPr>
+            <a:xfrm>
+              <a:off x="609600" y="1943100"/>
+              <a:ext cx="10972800" cy="365760"/>
+            </a:xfrm>
+            <a:prstGeom prst="rect">
+              <a:avLst/>
+            </a:prstGeom>
+            <a:noFill/>
+            <a:ln>
+              <a:noFill/>
+            </a:ln>
+          </p:spPr>
+          <p:txBody>
+            <a:bodyPr wrap="none" lIns="0" tIns="34290" rIns="0" bIns="0" anchor="t" anchorCtr="0">
+              <a:noAutofit/>
+            </a:bodyPr>
+            <a:lstStyle/>
+            <a:p>
+              <a:pPr algn="l"/>
+              <a:r>
+                <a:rPr lang="zh-TW" sz="1800" dirty="0">
+                  <a:solidFill>
+                    <a:srgbClr val="58616B"/>
+                  </a:solidFill>
+                  <a:latin typeface="Microsoft JhengHei"/>
+                  <a:ea typeface="Microsoft JhengHei"/>
+                  <a:cs typeface="Microsoft JhengHei"/>
+                </a:rPr>
+                <a:t>每個打席前評估一次；候選差距達 1 百分點視為系統建議。</a:t>
+              </a:r>
+            </a:p>
+          </p:txBody>
+        </p:sp>
+      </p:grpSp>
+      <p:grpSp>
+        <p:nvGrpSpPr>
+          <p:cNvPr id="24" name="backtest-comparison"/>
+          <p:cNvGrpSpPr/>
+          <p:nvPr/>
+        </p:nvGrpSpPr>
+        <p:grpSpPr>
+          <a:xfrm>
+            <a:off x="609600" y="2552700"/>
+            <a:ext cx="10972800" cy="2268855"/>
+            <a:chOff x="609600" y="2552700"/>
+            <a:chExt cx="10972800" cy="2268855"/>
+          </a:xfrm>
+        </p:grpSpPr>
+        <p:sp>
+          <p:nvSpPr>
+            <p:cNvPr id="12" name="TextBox 12"/>
+            <p:cNvSpPr txBox="1"/>
+            <p:nvPr/>
+          </p:nvSpPr>
+          <p:spPr>
+            <a:xfrm>
+              <a:off x="609600" y="2552700"/>
+              <a:ext cx="10972800" cy="396240"/>
+            </a:xfrm>
+            <a:prstGeom prst="rect">
+              <a:avLst/>
+            </a:prstGeom>
+            <a:noFill/>
+            <a:ln>
+              <a:noFill/>
+            </a:ln>
+          </p:spPr>
+          <p:txBody>
+            <a:bodyPr wrap="none" lIns="0" tIns="37147" rIns="0" bIns="0" anchor="t" anchorCtr="0">
+              <a:noAutofit/>
+            </a:bodyPr>
+            <a:lstStyle/>
+            <a:p>
+              <a:pPr algn="l"/>
+              <a:r>
+                <a:rPr lang="zh-TW" sz="1950" b="1" dirty="0">
+                  <a:solidFill>
+                    <a:srgbClr val="18344A"/>
+                  </a:solidFill>
+                  <a:latin typeface="Microsoft JhengHei"/>
+                  <a:ea typeface="Microsoft JhengHei"/>
+                  <a:cs typeface="Microsoft JhengHei"/>
+                </a:rPr>
+                <a:t>實際未換投時，比較「建議換」與「不建議換」兩組</a:t>
+              </a:r>
+            </a:p>
+          </p:txBody>
+        </p:sp>
+        <p:sp>
+          <p:nvSpPr>
+            <p:cNvPr id="13" name="TextBox 13"/>
+            <p:cNvSpPr txBox="1"/>
+            <p:nvPr/>
+          </p:nvSpPr>
+          <p:spPr>
+            <a:xfrm>
+              <a:off x="609600" y="2971800"/>
+              <a:ext cx="10972800" cy="335280"/>
+            </a:xfrm>
+            <a:prstGeom prst="rect">
+              <a:avLst/>
+            </a:prstGeom>
+            <a:noFill/>
+            <a:ln>
+              <a:noFill/>
+            </a:ln>
+          </p:spPr>
+          <p:txBody>
+            <a:bodyPr wrap="none" lIns="0" tIns="31433" rIns="0" bIns="0" anchor="t" anchorCtr="0">
+              <a:noAutofit/>
+            </a:bodyPr>
+            <a:lstStyle/>
+            <a:p>
+              <a:pPr algn="l"/>
+              <a:r>
+                <a:rPr lang="zh-TW" sz="1650" dirty="0">
+                  <a:solidFill>
+                    <a:srgbClr val="58616B"/>
+                  </a:solidFill>
+                  <a:latin typeface="Microsoft JhengHei"/>
+                  <a:ea typeface="Microsoft JhengHei"/>
+                  <a:cs typeface="Microsoft JhengHei"/>
+                </a:rPr>
+                <a:t>續投打席的 RE24 差</a:t>
+              </a:r>
+            </a:p>
+          </p:txBody>
+        </p:sp>
+        <p:sp>
+          <p:nvSpPr>
+            <p:cNvPr id="14" name="Line 14"/>
+            <p:cNvSpPr/>
+            <p:nvPr/>
+          </p:nvSpPr>
+          <p:spPr>
+            <a:xfrm>
+              <a:off x="990600" y="3771900"/>
+              <a:ext cx="6172200" cy="9525"/>
+            </a:xfrm>
+            <a:custGeom>
+              <a:avLst/>
+              <a:gdLst/>
+              <a:ahLst/>
+              <a:cxnLst/>
+              <a:rect l="l" t="t" r="r" b="b"/>
+              <a:pathLst>
+                <a:path w="6172200" h="9525">
+                  <a:moveTo>
+                    <a:pt x="0" y="0"/>
+                  </a:moveTo>
+                  <a:lnTo>
+                    <a:pt x="6172200" y="0"/>
+                  </a:lnTo>
+                </a:path>
+              </a:pathLst>
+            </a:custGeom>
+            <a:noFill/>
+            <a:ln w="19050">
+              <a:solidFill>
+                <a:srgbClr val="D7D1C5"/>
+              </a:solidFill>
+            </a:ln>
+          </p:spPr>
+        </p:sp>
+        <p:sp>
+          <p:nvSpPr>
+            <p:cNvPr id="15" name="Line 15"/>
+            <p:cNvSpPr/>
+            <p:nvPr/>
+          </p:nvSpPr>
+          <p:spPr>
+            <a:xfrm>
+              <a:off x="2225040" y="3381375"/>
+              <a:ext cx="9525" cy="638175"/>
+            </a:xfrm>
+            <a:custGeom>
+              <a:avLst/>
+              <a:gdLst/>
+              <a:ahLst/>
+              <a:cxnLst/>
+              <a:rect l="l" t="t" r="r" b="b"/>
+              <a:pathLst>
+                <a:path w="9525" h="638175">
+                  <a:moveTo>
+                    <a:pt x="0" y="0"/>
+                  </a:moveTo>
+                  <a:lnTo>
+                    <a:pt x="0" y="638175"/>
+                  </a:lnTo>
+                </a:path>
+              </a:pathLst>
+            </a:custGeom>
+            <a:noFill/>
+            <a:ln w="19050">
+              <a:solidFill>
+                <a:srgbClr val="58616B"/>
+              </a:solidFill>
+              <a:prstDash val="dash"/>
+            </a:ln>
+          </p:spPr>
+        </p:sp>
+        <p:sp>
+          <p:nvSpPr>
+            <p:cNvPr id="16" name="Line 16"/>
+            <p:cNvSpPr/>
+            <p:nvPr/>
+          </p:nvSpPr>
+          <p:spPr>
+            <a:xfrm>
+              <a:off x="3274314" y="3648075"/>
+              <a:ext cx="3147822" cy="9525"/>
+            </a:xfrm>
+            <a:custGeom>
+              <a:avLst/>
+              <a:gdLst/>
+              <a:ahLst/>
+              <a:cxnLst/>
+              <a:rect l="l" t="t" r="r" b="b"/>
+              <a:pathLst>
+                <a:path w="3147822" h="9525">
+                  <a:moveTo>
+                    <a:pt x="0" y="0"/>
+                  </a:moveTo>
+                  <a:lnTo>
+                    <a:pt x="3147822" y="0"/>
+                  </a:lnTo>
+                </a:path>
+              </a:pathLst>
+            </a:custGeom>
+            <a:noFill/>
+            <a:ln w="47625">
+              <a:solidFill>
+                <a:srgbClr val="B54836"/>
+              </a:solidFill>
+            </a:ln>
+          </p:spPr>
+        </p:sp>
+        <p:sp>
+          <p:nvSpPr>
+            <p:cNvPr id="17" name="Line 17"/>
+            <p:cNvSpPr/>
+            <p:nvPr/>
+          </p:nvSpPr>
+          <p:spPr>
+            <a:xfrm>
+              <a:off x="3274314" y="3533775"/>
+              <a:ext cx="9525" cy="228600"/>
+            </a:xfrm>
+            <a:custGeom>
+              <a:avLst/>
+              <a:gdLst/>
+              <a:ahLst/>
+              <a:cxnLst/>
+              <a:rect l="l" t="t" r="r" b="b"/>
+              <a:pathLst>
+                <a:path w="9525" h="228600">
+                  <a:moveTo>
+                    <a:pt x="0" y="0"/>
+                  </a:moveTo>
+                  <a:lnTo>
+                    <a:pt x="0" y="228600"/>
+                  </a:lnTo>
+                </a:path>
+              </a:pathLst>
+            </a:custGeom>
+            <a:noFill/>
+            <a:ln w="28575">
+              <a:solidFill>
+                <a:srgbClr val="B54836"/>
+              </a:solidFill>
+            </a:ln>
+          </p:spPr>
+        </p:sp>
+        <p:sp>
+          <p:nvSpPr>
+            <p:cNvPr id="18" name="Line 18"/>
+            <p:cNvSpPr/>
+            <p:nvPr/>
+          </p:nvSpPr>
+          <p:spPr>
+            <a:xfrm>
+              <a:off x="6422136" y="3533775"/>
+              <a:ext cx="9525" cy="228600"/>
+            </a:xfrm>
+            <a:custGeom>
+              <a:avLst/>
+              <a:gdLst/>
+              <a:ahLst/>
+              <a:cxnLst/>
+              <a:rect l="l" t="t" r="r" b="b"/>
+              <a:pathLst>
+                <a:path w="9525" h="228600">
+                  <a:moveTo>
+                    <a:pt x="0" y="0"/>
+                  </a:moveTo>
+                  <a:lnTo>
+                    <a:pt x="0" y="228600"/>
+                  </a:lnTo>
+                </a:path>
+              </a:pathLst>
+            </a:custGeom>
+            <a:noFill/>
+            <a:ln w="28575">
+              <a:solidFill>
+                <a:srgbClr val="B54836"/>
+              </a:solidFill>
+            </a:ln>
+          </p:spPr>
+        </p:sp>
+        <p:sp>
+          <p:nvSpPr>
+            <p:cNvPr id="19" name="Ellipse 19"/>
+            <p:cNvSpPr/>
+            <p:nvPr/>
+          </p:nvSpPr>
+          <p:spPr>
+            <a:xfrm>
+              <a:off x="4793361" y="3562350"/>
+              <a:ext cx="171450" cy="171450"/>
+            </a:xfrm>
+            <a:prstGeom prst="ellipse">
+              <a:avLst/>
+            </a:prstGeom>
+            <a:solidFill>
+              <a:srgbClr val="B54836"/>
+            </a:solidFill>
+            <a:ln>
+              <a:noFill/>
+            </a:ln>
+          </p:spPr>
+        </p:sp>
+        <p:sp>
+          <p:nvSpPr>
+            <p:cNvPr id="20" name="TextBox 20"/>
+            <p:cNvSpPr txBox="1"/>
+            <p:nvPr/>
+          </p:nvSpPr>
+          <p:spPr>
+            <a:xfrm>
+              <a:off x="2072640" y="4086225"/>
+              <a:ext cx="9509760" cy="304800"/>
+            </a:xfrm>
+            <a:prstGeom prst="rect">
+              <a:avLst/>
+            </a:prstGeom>
+            <a:noFill/>
+            <a:ln>
+              <a:noFill/>
+            </a:ln>
+          </p:spPr>
+          <p:txBody>
+            <a:bodyPr wrap="none" lIns="0" tIns="28575" rIns="0" bIns="0" anchor="t" anchorCtr="0">
+              <a:noAutofit/>
+            </a:bodyPr>
+            <a:lstStyle/>
+            <a:p>
+              <a:pPr algn="l"/>
+              <a:r>
+                <a:rPr lang="zh-TW" sz="1500" dirty="0">
+                  <a:solidFill>
+                    <a:srgbClr val="58616B"/>
+                  </a:solidFill>
+                  <a:latin typeface="Microsoft JhengHei"/>
+                  <a:ea typeface="Microsoft JhengHei"/>
+                  <a:cs typeface="Microsoft JhengHei"/>
+                </a:rPr>
+                <a:t>0</a:t>
+              </a:r>
+            </a:p>
+          </p:txBody>
+        </p:sp>
+        <p:sp>
+          <p:nvSpPr>
+            <p:cNvPr id="21" name="TextBox 21"/>
+            <p:cNvSpPr txBox="1"/>
+            <p:nvPr/>
+          </p:nvSpPr>
+          <p:spPr>
+            <a:xfrm>
+              <a:off x="4541520" y="4086225"/>
+              <a:ext cx="7040880" cy="304800"/>
+            </a:xfrm>
+            <a:prstGeom prst="rect">
+              <a:avLst/>
+            </a:prstGeom>
+            <a:noFill/>
+            <a:ln>
+              <a:noFill/>
+            </a:ln>
+          </p:spPr>
+          <p:txBody>
+            <a:bodyPr wrap="none" lIns="0" tIns="28575" rIns="0" bIns="0" anchor="t" anchorCtr="0">
+              <a:noAutofit/>
+            </a:bodyPr>
+            <a:lstStyle/>
+            <a:p>
+              <a:pPr algn="l"/>
+              <a:r>
+                <a:rPr lang="zh-TW" sz="1500" dirty="0">
+                  <a:solidFill>
+                    <a:srgbClr val="58616B"/>
+                  </a:solidFill>
+                  <a:latin typeface="Microsoft JhengHei"/>
+                  <a:ea typeface="Microsoft JhengHei"/>
+                  <a:cs typeface="Microsoft JhengHei"/>
+                </a:rPr>
+                <a:t>+0.04</a:t>
+              </a:r>
+            </a:p>
+          </p:txBody>
+        </p:sp>
+        <p:sp>
+          <p:nvSpPr>
+            <p:cNvPr id="22" name="TextBox 22"/>
+            <p:cNvSpPr txBox="1"/>
+            <p:nvPr/>
+          </p:nvSpPr>
+          <p:spPr>
+            <a:xfrm>
+              <a:off x="7010400" y="4086225"/>
+              <a:ext cx="4572000" cy="304800"/>
+            </a:xfrm>
+            <a:prstGeom prst="rect">
+              <a:avLst/>
+            </a:prstGeom>
+            <a:noFill/>
+            <a:ln>
+              <a:noFill/>
+            </a:ln>
+          </p:spPr>
+          <p:txBody>
+            <a:bodyPr wrap="none" lIns="0" tIns="28575" rIns="0" bIns="0" anchor="t" anchorCtr="0">
+              <a:noAutofit/>
+            </a:bodyPr>
+            <a:lstStyle/>
+            <a:p>
+              <a:pPr algn="l"/>
+              <a:r>
+                <a:rPr lang="zh-TW" sz="1500" dirty="0">
+                  <a:solidFill>
+                    <a:srgbClr val="58616B"/>
+                  </a:solidFill>
+                  <a:latin typeface="Microsoft JhengHei"/>
+                  <a:ea typeface="Microsoft JhengHei"/>
+                  <a:cs typeface="Microsoft JhengHei"/>
+                </a:rPr>
+                <a:t>+0.08</a:t>
+              </a:r>
+            </a:p>
+          </p:txBody>
+        </p:sp>
+        <p:sp>
+          <p:nvSpPr>
+            <p:cNvPr id="23" name="TextBox 23"/>
+            <p:cNvSpPr txBox="1"/>
+            <p:nvPr/>
+          </p:nvSpPr>
+          <p:spPr>
+            <a:xfrm>
+              <a:off x="609600" y="4486275"/>
+              <a:ext cx="10972800" cy="335280"/>
+            </a:xfrm>
+            <a:prstGeom prst="rect">
+              <a:avLst/>
+            </a:prstGeom>
+            <a:noFill/>
+            <a:ln>
+              <a:noFill/>
+            </a:ln>
+          </p:spPr>
+          <p:txBody>
+            <a:bodyPr wrap="none" lIns="0" tIns="31433" rIns="0" bIns="0" anchor="t" anchorCtr="0">
+              <a:noAutofit/>
+            </a:bodyPr>
+            <a:lstStyle/>
+            <a:p>
+              <a:pPr algn="l"/>
+              <a:r>
+                <a:rPr lang="zh-TW" sz="1650" dirty="0">
+                  <a:solidFill>
+                    <a:srgbClr val="58616B"/>
+                  </a:solidFill>
+                  <a:latin typeface="Microsoft JhengHei"/>
+                  <a:ea typeface="Microsoft JhengHei"/>
+                  <a:cs typeface="Microsoft JhengHei"/>
+                </a:rPr>
+                <a:t>95% 區間：+0.017 ～ +0.068；高於 0 表示「建議換投」組的續投風險較高。</a:t>
+              </a:r>
+            </a:p>
+          </p:txBody>
+        </p:sp>
+      </p:grpSp>
+      <p:grpSp>
+        <p:nvGrpSpPr>
+          <p:cNvPr id="27" name="backtest-result"/>
+          <p:cNvGrpSpPr/>
+          <p:nvPr/>
+        </p:nvGrpSpPr>
+        <p:grpSpPr>
+          <a:xfrm>
+            <a:off x="8001000" y="2667000"/>
+            <a:ext cx="3581400" cy="1720215"/>
+            <a:chOff x="8001000" y="2667000"/>
+            <a:chExt cx="3581400" cy="1720215"/>
+          </a:xfrm>
+        </p:grpSpPr>
+        <p:sp>
+          <p:nvSpPr>
+            <p:cNvPr id="25" name="TextBox 25"/>
+            <p:cNvSpPr txBox="1"/>
+            <p:nvPr/>
+          </p:nvSpPr>
+          <p:spPr>
+            <a:xfrm>
+              <a:off x="8001000" y="2667000"/>
+              <a:ext cx="3581400" cy="975360"/>
+            </a:xfrm>
+            <a:prstGeom prst="rect">
+              <a:avLst/>
+            </a:prstGeom>
+            <a:noFill/>
+            <a:ln>
+              <a:noFill/>
+            </a:ln>
+          </p:spPr>
+          <p:txBody>
+            <a:bodyPr wrap="none" lIns="0" tIns="91440" rIns="0" bIns="0" anchor="t" anchorCtr="0">
+              <a:noAutofit/>
+            </a:bodyPr>
+            <a:lstStyle/>
+            <a:p>
+              <a:pPr algn="l"/>
+              <a:r>
+                <a:rPr lang="zh-TW" sz="4800" b="1" dirty="0">
+                  <a:solidFill>
+                    <a:srgbClr val="B54836"/>
+                  </a:solidFill>
+                  <a:latin typeface="Microsoft JhengHei"/>
+                  <a:ea typeface="Microsoft JhengHei"/>
+                  <a:cs typeface="Microsoft JhengHei"/>
+                </a:rPr>
+                <a:t>+0.043</a:t>
+              </a:r>
+            </a:p>
+          </p:txBody>
+        </p:sp>
+        <p:sp>
+          <p:nvSpPr>
+            <p:cNvPr id="26" name="TextBox 26"/>
+            <p:cNvSpPr txBox="1"/>
+            <p:nvPr/>
+          </p:nvSpPr>
+          <p:spPr>
+            <a:xfrm>
+              <a:off x="8001000" y="3562350"/>
+              <a:ext cx="3581400" cy="824865"/>
+            </a:xfrm>
+            <a:prstGeom prst="rect">
+              <a:avLst/>
+            </a:prstGeom>
+            <a:noFill/>
+            <a:ln>
+              <a:noFill/>
+            </a:ln>
+          </p:spPr>
+          <p:txBody>
+            <a:bodyPr wrap="none" lIns="0" tIns="37147" rIns="0" bIns="0" anchor="t" anchorCtr="0">
+              <a:noAutofit/>
+            </a:bodyPr>
+            <a:lstStyle/>
+            <a:p>
+              <a:pPr algn="l">
+                <a:lnSpc>
+                  <a:spcPts val="3375"/>
+                </a:lnSpc>
+              </a:pPr>
+              <a:r>
+                <a:rPr lang="zh-TW" sz="1950" dirty="0">
+                  <a:solidFill>
+                    <a:srgbClr val="18344A"/>
+                  </a:solidFill>
+                  <a:latin typeface="Microsoft JhengHei"/>
+                  <a:ea typeface="Microsoft JhengHei"/>
+                  <a:cs typeface="Microsoft JhengHei"/>
+                </a:rPr>
+                <a:t>得分期望差（RE24）</a:t>
+              </a:r>
+              <a:br/>
+              <a:r>
+                <a:rPr lang="zh-TW" sz="1950" dirty="0">
+                  <a:solidFill>
+                    <a:srgbClr val="18344A"/>
+                  </a:solidFill>
+                  <a:latin typeface="Microsoft JhengHei"/>
+                  <a:ea typeface="Microsoft JhengHei"/>
+                  <a:cs typeface="Microsoft JhengHei"/>
+                </a:rPr>
+                <a:t>提供換投風險線索</a:t>
+              </a:r>
+            </a:p>
+          </p:txBody>
+        </p:sp>
+      </p:grpSp>
+      <p:grpSp>
+        <p:nvGrpSpPr>
+          <p:cNvPr id="31" name="backtest-limits"/>
+          <p:cNvGrpSpPr/>
+          <p:nvPr/>
+        </p:nvGrpSpPr>
+        <p:grpSpPr>
+          <a:xfrm>
+            <a:off x="609600" y="5124450"/>
+            <a:ext cx="10972800" cy="1173480"/>
+            <a:chOff x="609600" y="5124450"/>
+            <a:chExt cx="10972800" cy="1173480"/>
+          </a:xfrm>
+        </p:grpSpPr>
+        <p:sp>
+          <p:nvSpPr>
+            <p:cNvPr id="29" name="TextBox 29"/>
+            <p:cNvSpPr txBox="1"/>
+            <p:nvPr/>
+          </p:nvSpPr>
+          <p:spPr>
+            <a:xfrm>
+              <a:off x="609600" y="5124450"/>
+              <a:ext cx="10972800" cy="426720"/>
+            </a:xfrm>
+            <a:prstGeom prst="rect">
+              <a:avLst/>
+            </a:prstGeom>
+            <a:noFill/>
+            <a:ln>
+              <a:noFill/>
+            </a:ln>
+          </p:spPr>
+          <p:txBody>
+            <a:bodyPr wrap="none" lIns="0" tIns="40005" rIns="0" bIns="0" anchor="t" anchorCtr="0">
+              <a:noAutofit/>
+            </a:bodyPr>
+            <a:lstStyle/>
+            <a:p>
+              <a:pPr algn="l"/>
+              <a:r>
+                <a:rPr lang="zh-TW" sz="2100" b="1" dirty="0">
+                  <a:solidFill>
+                    <a:srgbClr val="18344A"/>
+                  </a:solidFill>
+                  <a:latin typeface="Microsoft JhengHei"/>
+                  <a:ea typeface="Microsoft JhengHei"/>
+                  <a:cs typeface="Microsoft JhengHei"/>
+                </a:rPr>
+                <a:t>代打時機：差異尚不明顯，維持參考性解讀。</a:t>
+              </a:r>
+            </a:p>
+          </p:txBody>
+        </p:sp>
+        <p:sp>
+          <p:nvSpPr>
+            <p:cNvPr id="30" name="TextBox 30"/>
+            <p:cNvSpPr txBox="1"/>
+            <p:nvPr/>
+          </p:nvSpPr>
+          <p:spPr>
+            <a:xfrm>
+              <a:off x="609600" y="5638800"/>
+              <a:ext cx="10972800" cy="659130"/>
+            </a:xfrm>
+            <a:prstGeom prst="rect">
+              <a:avLst/>
+            </a:prstGeom>
+            <a:noFill/>
+            <a:ln>
+              <a:noFill/>
+            </a:ln>
+          </p:spPr>
+          <p:txBody>
+            <a:bodyPr wrap="none" lIns="0" tIns="31432" rIns="0" bIns="0" anchor="t" anchorCtr="0">
+              <a:noAutofit/>
+            </a:bodyPr>
+            <a:lstStyle/>
+            <a:p>
+              <a:pPr algn="l">
+                <a:lnSpc>
+                  <a:spcPts val="2550"/>
+                </a:lnSpc>
+              </a:pPr>
+              <a:r>
+                <a:rPr lang="zh-TW" sz="1650" dirty="0">
+                  <a:solidFill>
+                    <a:srgbClr val="58616B"/>
+                  </a:solidFill>
+                  <a:latin typeface="Microsoft JhengHei"/>
+                  <a:ea typeface="Microsoft JhengHei"/>
+                  <a:cs typeface="Microsoft JhengHei"/>
+                </a:rPr>
+                <a:t>分組比較不代表因果效益，無法得知同一情境「換人後」的實際結果。</a:t>
+              </a:r>
+              <a:br/>
+              <a:r>
+                <a:rPr lang="zh-TW" sz="1650" dirty="0">
+                  <a:solidFill>
+                    <a:srgbClr val="58616B"/>
+                  </a:solidFill>
+                  <a:latin typeface="Microsoft JhengHei"/>
+                  <a:ea typeface="Microsoft JhengHei"/>
+                  <a:cs typeface="Microsoft JhengHei"/>
+                </a:rPr>
+                <a:t>可用名單由歷史出賽推估；模型只比較後續 3 棒。</a:t>
+              </a:r>
+            </a:p>
+          </p:txBody>
+        </p:sp>
+      </p:grpSp>
     </p:spTree>
   </p:cSld>
   <p:clrMapOvr>
